--- a/static/ppts/G6_Math_T5_Charts_Graphs.pptx
+++ b/static/ppts/G6_Math_T5_Charts_Graphs.pptx
@@ -9,9 +9,10 @@
     <p:sldId id="257" r:id="rId3"/>
     <p:sldId id="258" r:id="rId4"/>
     <p:sldId id="259" r:id="rId5"/>
+    <p:sldId id="260" r:id="rId6"/>
   </p:sldIdLst>
   <p:notesMasterIdLst>
-    <p:notesMasterId r:id="rId6"/>
+    <p:notesMasterId r:id="rId7"/>
   </p:notesMasterIdLst>
   <p:sldSz cx="9144000" cy="5143500"/>
   <p:notesSz cx="5143500" cy="9144000"/>
@@ -811,6 +812,94 @@
 </p:notes>
 </file>
 
+<file path=ppt/notesSlides/notesSlide5.xml><?xml version="1.0" encoding="utf-8"?>
+<p:notes xmlns:a="http://schemas.openxmlformats.org/drawingml/2006/main" xmlns:r="http://schemas.openxmlformats.org/officeDocument/2006/relationships" xmlns:p="http://schemas.openxmlformats.org/presentationml/2006/main">
+  <p:cSld>
+    <p:spTree>
+      <p:nvGrpSpPr>
+        <p:cNvPr id="1" name=""/>
+        <p:cNvGrpSpPr/>
+        <p:nvPr/>
+      </p:nvGrpSpPr>
+      <p:grpSpPr>
+        <a:xfrm>
+          <a:off x="0" y="0"/>
+          <a:ext cx="0" cy="0"/>
+          <a:chOff x="0" y="0"/>
+          <a:chExt cx="0" cy="0"/>
+        </a:xfrm>
+      </p:grpSpPr>
+      <p:sp>
+        <p:nvSpPr>
+          <p:cNvPr id="2" name="Slide Image Placeholder 1"/>
+          <p:cNvSpPr>
+            <a:spLocks noGrp="1" noRot="1" noChangeAspect="1"/>
+          </p:cNvSpPr>
+          <p:nvPr>
+            <p:ph type="sldImg"/>
+          </p:nvPr>
+        </p:nvSpPr>
+        <p:spPr/>
+      </p:sp>
+      <p:sp>
+        <p:nvSpPr>
+          <p:cNvPr id="3" name="Notes Placeholder 2"/>
+          <p:cNvSpPr>
+            <a:spLocks noGrp="1"/>
+          </p:cNvSpPr>
+          <p:nvPr>
+            <p:ph type="body" idx="1"/>
+          </p:nvPr>
+        </p:nvSpPr>
+        <p:spPr/>
+        <p:txBody>
+          <a:bodyPr/>
+          <a:lstStyle/>
+          <a:p>
+            <a:r>
+              <a:rPr lang="en-US" dirty="0"/>
+              <a:t/>
+            </a:r>
+            <a:endParaRPr lang="en-US" dirty="0"/>
+          </a:p>
+        </p:txBody>
+      </p:sp>
+      <p:sp>
+        <p:nvSpPr>
+          <p:cNvPr id="4" name="Slide Number Placeholder 3"/>
+          <p:cNvSpPr>
+            <a:spLocks noGrp="1"/>
+          </p:cNvSpPr>
+          <p:nvPr>
+            <p:ph type="sldNum" sz="quarter" idx="10"/>
+          </p:nvPr>
+        </p:nvSpPr>
+        <p:spPr/>
+        <p:txBody>
+          <a:bodyPr/>
+          <a:lstStyle/>
+          <a:p>
+            <a:fld id="{F7021451-1387-4CA6-816F-3879F97B5CBC}" type="slidenum">
+              <a:rPr lang="en-US"/>
+              <a:t>5</a:t>
+            </a:fld>
+            <a:endParaRPr lang="en-US"/>
+          </a:p>
+        </p:txBody>
+      </p:sp>
+    </p:spTree>
+    <p:extLst>
+      <p:ext uri="{BB962C8B-B14F-4D97-AF65-F5344CB8AC3E}">
+        <p14:creationId xmlns:p14="http://schemas.microsoft.com/office/powerpoint/2010/main" val="1024086991"/>
+      </p:ext>
+    </p:extLst>
+  </p:cSld>
+  <p:clrMapOvr>
+    <a:masterClrMapping/>
+  </p:clrMapOvr>
+</p:notes>
+</file>
+
 <file path=ppt/slideLayouts/slideLayout1.xml><?xml version="1.0" encoding="utf-8"?>
 <p:sldLayout xmlns:a="http://schemas.openxmlformats.org/drawingml/2006/main" xmlns:r="http://schemas.openxmlformats.org/officeDocument/2006/relationships" xmlns:p="http://schemas.openxmlformats.org/presentationml/2006/main" preserve="1">
   <p:cSld name="DEFAULT">
@@ -1170,7 +1259,7 @@
         </p:nvSpPr>
         <p:spPr>
           <a:xfrm>
-            <a:off x="731520" y="1280160"/>
+            <a:off x="731520" y="1097280"/>
             <a:ext cx="7772400" cy="1371600"/>
           </a:xfrm>
           <a:prstGeom prst="rect">
@@ -1187,7 +1276,7 @@
               <a:buNone/>
             </a:pPr>
             <a:r>
-              <a:rPr lang="en-US" sz="3600" b="1" dirty="0">
+              <a:rPr lang="en-US" sz="4000" b="1" dirty="0">
                 <a:solidFill>
                   <a:srgbClr val="FFFFFF"/>
                 </a:solidFill>
@@ -1197,7 +1286,7 @@
               </a:rPr>
               <a:t>Charts &amp; Graphs</a:t>
             </a:r>
-            <a:endParaRPr lang="en-US" sz="3600" dirty="0"/>
+            <a:endParaRPr lang="en-US" sz="4000" dirty="0"/>
           </a:p>
         </p:txBody>
       </p:sp>
@@ -1209,7 +1298,7 @@
         </p:nvSpPr>
         <p:spPr>
           <a:xfrm>
-            <a:off x="731520" y="2743200"/>
+            <a:off x="731520" y="2560320"/>
             <a:ext cx="7772400" cy="548640"/>
           </a:xfrm>
           <a:prstGeom prst="rect">
@@ -1228,13 +1317,13 @@
             <a:r>
               <a:rPr lang="en-US" sz="1600" dirty="0">
                 <a:solidFill>
-                  <a:srgbClr val="9B9690"/>
+                  <a:srgbClr val="E9C46A"/>
                 </a:solidFill>
                 <a:latin typeface="Calibri" pitchFamily="34" charset="0"/>
                 <a:ea typeface="Calibri" pitchFamily="34" charset="-122"/>
                 <a:cs typeface="Calibri" pitchFamily="34" charset="-120"/>
               </a:rPr>
-              <a:t>G6 Maths · Probability &amp; Statistics</a:t>
+              <a:t>Grade 6 Mathematics · Mr Zocchi</a:t>
             </a:r>
             <a:endParaRPr lang="en-US" sz="1600" dirty="0"/>
           </a:p>
@@ -1242,14 +1331,36 @@
       </p:sp>
       <p:sp>
         <p:nvSpPr>
-          <p:cNvPr id="5" name="Text 3"/>
-          <p:cNvSpPr/>
-          <p:nvPr/>
-        </p:nvSpPr>
-        <p:spPr>
-          <a:xfrm>
-            <a:off x="731520" y="4389120"/>
-            <a:ext cx="7772400" cy="457200"/>
+          <p:cNvPr id="5" name="Shape 3"/>
+          <p:cNvSpPr/>
+          <p:nvPr/>
+        </p:nvSpPr>
+        <p:spPr>
+          <a:xfrm>
+            <a:off x="731520" y="3474720"/>
+            <a:ext cx="2011680" cy="411480"/>
+          </a:xfrm>
+          <a:prstGeom prst="roundRect">
+            <a:avLst>
+              <a:gd name="adj" fmla="val 17778"/>
+            </a:avLst>
+          </a:prstGeom>
+          <a:solidFill>
+            <a:srgbClr val="2A9D8F"/>
+          </a:solidFill>
+          <a:ln/>
+        </p:spPr>
+      </p:sp>
+      <p:sp>
+        <p:nvSpPr>
+          <p:cNvPr id="6" name="Text 4"/>
+          <p:cNvSpPr/>
+          <p:nvPr/>
+        </p:nvSpPr>
+        <p:spPr>
+          <a:xfrm>
+            <a:off x="731520" y="3474720"/>
+            <a:ext cx="2011680" cy="411480"/>
           </a:xfrm>
           <a:prstGeom prst="rect">
             <a:avLst/>
@@ -1261,21 +1372,21 @@
           <a:bodyPr wrap="square" rtlCol="0" anchor="ctr"/>
           <a:lstStyle/>
           <a:p>
-            <a:pPr indent="0" marL="0">
+            <a:pPr algn="ctr" indent="0" marL="0">
               <a:buNone/>
             </a:pPr>
             <a:r>
-              <a:rPr lang="en-US" sz="1000" dirty="0">
-                <a:solidFill>
-                  <a:srgbClr val="6B6660"/>
+              <a:rPr lang="en-US" sz="1200" b="1" dirty="0">
+                <a:solidFill>
+                  <a:srgbClr val="FFFFFF"/>
                 </a:solidFill>
                 <a:latin typeface="Calibri" pitchFamily="34" charset="0"/>
                 <a:ea typeface="Calibri" pitchFamily="34" charset="-122"/>
                 <a:cs typeface="Calibri" pitchFamily="34" charset="-120"/>
               </a:rPr>
-              <a:t>Mr Zocchi · mrzocchi.com</a:t>
-            </a:r>
-            <a:endParaRPr lang="en-US" sz="1000" dirty="0"/>
+              <a:t>Term 5 · Probability &amp; Statistics</a:t>
+            </a:r>
+            <a:endParaRPr lang="en-US" sz="1200" dirty="0"/>
           </a:p>
         </p:txBody>
       </p:sp>
@@ -1293,7 +1404,7 @@
     <p:bg>
       <p:bgPr>
         <a:solidFill>
-          <a:srgbClr val="FFFFFF"/>
+          <a:srgbClr val="FAF8F5"/>
         </a:solidFill>
       </p:bgPr>
     </p:bg>
@@ -1339,8 +1450,8 @@
         </p:nvSpPr>
         <p:spPr>
           <a:xfrm>
-            <a:off x="548640" y="274320"/>
-            <a:ext cx="8046720" cy="640080"/>
+            <a:off x="7772400" y="4709160"/>
+            <a:ext cx="1097280" cy="320040"/>
           </a:xfrm>
           <a:prstGeom prst="rect">
             <a:avLst/>
@@ -1349,14 +1460,105 @@
           <a:ln/>
         </p:spPr>
         <p:txBody>
-          <a:bodyPr wrap="square" lIns="0" tIns="0" rIns="0" bIns="0" rtlCol="0" anchor="ctr"/>
+          <a:bodyPr wrap="square" rtlCol="0" anchor="ctr"/>
+          <a:lstStyle/>
+          <a:p>
+            <a:pPr algn="r" indent="0" marL="0">
+              <a:buNone/>
+            </a:pPr>
+            <a:r>
+              <a:rPr lang="en-US" sz="900" dirty="0">
+                <a:solidFill>
+                  <a:srgbClr val="6B6660"/>
+                </a:solidFill>
+                <a:latin typeface="Calibri" pitchFamily="34" charset="0"/>
+                <a:ea typeface="Calibri" pitchFamily="34" charset="-122"/>
+                <a:cs typeface="Calibri" pitchFamily="34" charset="-120"/>
+              </a:rPr>
+              <a:t>2 / 5</a:t>
+            </a:r>
+            <a:endParaRPr lang="en-US" sz="900" dirty="0"/>
+          </a:p>
+        </p:txBody>
+      </p:sp>
+      <p:sp>
+        <p:nvSpPr>
+          <p:cNvPr id="4" name="Shape 2"/>
+          <p:cNvSpPr/>
+          <p:nvPr/>
+        </p:nvSpPr>
+        <p:spPr>
+          <a:xfrm>
+            <a:off x="1371600" y="914400"/>
+            <a:ext cx="6400800" cy="3200400"/>
+          </a:xfrm>
+          <a:prstGeom prst="rect">
+            <a:avLst/>
+          </a:prstGeom>
+          <a:solidFill>
+            <a:srgbClr val="FFFFFF"/>
+          </a:solidFill>
+          <a:ln w="12700">
+            <a:solidFill>
+              <a:srgbClr val="E5E2DC"/>
+            </a:solidFill>
+            <a:prstDash val="solid"/>
+          </a:ln>
+          <a:effectLst>
+            <a:outerShdw sx="100000" sy="100000" kx="0" ky="0" algn="bl" rotWithShape="0" blurRad="50800" dist="25400" dir="8100000">
+              <a:srgbClr val="000000">
+                <a:alpha val="10000"/>
+              </a:srgbClr>
+            </a:outerShdw>
+          </a:effectLst>
+        </p:spPr>
+      </p:sp>
+      <p:sp>
+        <p:nvSpPr>
+          <p:cNvPr id="5" name="Shape 3"/>
+          <p:cNvSpPr/>
+          <p:nvPr/>
+        </p:nvSpPr>
+        <p:spPr>
+          <a:xfrm>
+            <a:off x="1371600" y="914400"/>
+            <a:ext cx="91440" cy="3200400"/>
+          </a:xfrm>
+          <a:prstGeom prst="rect">
+            <a:avLst/>
+          </a:prstGeom>
+          <a:solidFill>
+            <a:srgbClr val="2A9D8F"/>
+          </a:solidFill>
+          <a:ln/>
+        </p:spPr>
+      </p:sp>
+      <p:sp>
+        <p:nvSpPr>
+          <p:cNvPr id="6" name="Text 4"/>
+          <p:cNvSpPr/>
+          <p:nvPr/>
+        </p:nvSpPr>
+        <p:spPr>
+          <a:xfrm>
+            <a:off x="1828800" y="1097280"/>
+            <a:ext cx="5669280" cy="640080"/>
+          </a:xfrm>
+          <a:prstGeom prst="rect">
+            <a:avLst/>
+          </a:prstGeom>
+          <a:noFill/>
+          <a:ln/>
+        </p:spPr>
+        <p:txBody>
+          <a:bodyPr wrap="square" rtlCol="0" anchor="ctr"/>
           <a:lstStyle/>
           <a:p>
             <a:pPr indent="0" marL="0">
               <a:buNone/>
             </a:pPr>
             <a:r>
-              <a:rPr lang="en-US" sz="2600" b="1" dirty="0">
+              <a:rPr lang="en-US" sz="2400" b="1" dirty="0">
                 <a:solidFill>
                   <a:srgbClr val="1B2A4A"/>
                 </a:solidFill>
@@ -1364,22 +1566,22 @@
                 <a:ea typeface="Georgia" pitchFamily="34" charset="-122"/>
                 <a:cs typeface="Georgia" pitchFamily="34" charset="-120"/>
               </a:rPr>
-              <a:t>Choosing the Right Chart</a:t>
-            </a:r>
-            <a:endParaRPr lang="en-US" sz="2600" dirty="0"/>
-          </a:p>
-        </p:txBody>
-      </p:sp>
-      <p:sp>
-        <p:nvSpPr>
-          <p:cNvPr id="4" name="Text 2"/>
-          <p:cNvSpPr/>
-          <p:nvPr/>
-        </p:nvSpPr>
-        <p:spPr>
-          <a:xfrm>
-            <a:off x="548640" y="1097280"/>
-            <a:ext cx="8046720" cy="3474720"/>
+              <a:t>Displaying Data Visually</a:t>
+            </a:r>
+            <a:endParaRPr lang="en-US" sz="2400" dirty="0"/>
+          </a:p>
+        </p:txBody>
+      </p:sp>
+      <p:sp>
+        <p:nvSpPr>
+          <p:cNvPr id="7" name="Text 5"/>
+          <p:cNvSpPr/>
+          <p:nvPr/>
+        </p:nvSpPr>
+        <p:spPr>
+          <a:xfrm>
+            <a:off x="1828800" y="1828800"/>
+            <a:ext cx="5669280" cy="2011680"/>
           </a:xfrm>
           <a:prstGeom prst="rect">
             <a:avLst/>
@@ -1391,12 +1593,11 @@
           <a:bodyPr wrap="square" rtlCol="0" anchor="t"/>
           <a:lstStyle/>
           <a:p>
-            <a:pPr marL="342900" indent="-342900">
-              <a:spcAft>
-                <a:spcPts val="800"/>
-              </a:spcAft>
-              <a:buSzPct val="100000"/>
-              <a:buChar char="•"/>
+            <a:pPr indent="0" marL="0">
+              <a:lnSpc>
+                <a:spcPct val="130000"/>
+              </a:lnSpc>
+              <a:buNone/>
             </a:pPr>
             <a:r>
               <a:rPr lang="en-US" sz="1500" dirty="0">
@@ -1407,129 +1608,9 @@
                 <a:ea typeface="Calibri" pitchFamily="34" charset="-122"/>
                 <a:cs typeface="Calibri" pitchFamily="34" charset="-120"/>
               </a:rPr>
-              <a:t>Bar chart: comparing categories (discrete data)</a:t>
+              <a:t>Charts and graphs make data easier to understand. The type of chart you choose depends on what data you have and what you want to show. A good chart has a title, labelled axes, and an appropriate scale.</a:t>
             </a:r>
             <a:endParaRPr lang="en-US" sz="1500" dirty="0"/>
-          </a:p>
-          <a:p>
-            <a:pPr marL="342900" indent="-342900">
-              <a:spcAft>
-                <a:spcPts val="800"/>
-              </a:spcAft>
-              <a:buSzPct val="100000"/>
-              <a:buChar char="•"/>
-            </a:pPr>
-            <a:r>
-              <a:rPr lang="en-US" sz="1500" dirty="0">
-                <a:solidFill>
-                  <a:srgbClr val="3D3A36"/>
-                </a:solidFill>
-                <a:latin typeface="Calibri" pitchFamily="34" charset="0"/>
-                <a:ea typeface="Calibri" pitchFamily="34" charset="-122"/>
-                <a:cs typeface="Calibri" pitchFamily="34" charset="-120"/>
-              </a:rPr>
-              <a:t>Pictogram: using pictures to represent data (include a key!)</a:t>
-            </a:r>
-            <a:endParaRPr lang="en-US" sz="1500" dirty="0"/>
-          </a:p>
-          <a:p>
-            <a:pPr marL="342900" indent="-342900">
-              <a:spcAft>
-                <a:spcPts val="800"/>
-              </a:spcAft>
-              <a:buSzPct val="100000"/>
-              <a:buChar char="•"/>
-            </a:pPr>
-            <a:r>
-              <a:rPr lang="en-US" sz="1500" dirty="0">
-                <a:solidFill>
-                  <a:srgbClr val="3D3A36"/>
-                </a:solidFill>
-                <a:latin typeface="Calibri" pitchFamily="34" charset="0"/>
-                <a:ea typeface="Calibri" pitchFamily="34" charset="-122"/>
-                <a:cs typeface="Calibri" pitchFamily="34" charset="-120"/>
-              </a:rPr>
-              <a:t>Pie chart: showing proportions of a whole (must add up to 360°)</a:t>
-            </a:r>
-            <a:endParaRPr lang="en-US" sz="1500" dirty="0"/>
-          </a:p>
-          <a:p>
-            <a:pPr marL="342900" indent="-342900">
-              <a:spcAft>
-                <a:spcPts val="800"/>
-              </a:spcAft>
-              <a:buSzPct val="100000"/>
-              <a:buChar char="•"/>
-            </a:pPr>
-            <a:r>
-              <a:rPr lang="en-US" sz="1500" dirty="0">
-                <a:solidFill>
-                  <a:srgbClr val="3D3A36"/>
-                </a:solidFill>
-                <a:latin typeface="Calibri" pitchFamily="34" charset="0"/>
-                <a:ea typeface="Calibri" pitchFamily="34" charset="-122"/>
-                <a:cs typeface="Calibri" pitchFamily="34" charset="-120"/>
-              </a:rPr>
-              <a:t>Line graph: showing change over time (continuous data)</a:t>
-            </a:r>
-            <a:endParaRPr lang="en-US" sz="1500" dirty="0"/>
-          </a:p>
-          <a:p>
-            <a:pPr marL="342900" indent="-342900">
-              <a:spcAft>
-                <a:spcPts val="800"/>
-              </a:spcAft>
-              <a:buSzPct val="100000"/>
-              <a:buChar char="•"/>
-            </a:pPr>
-            <a:r>
-              <a:rPr lang="en-US" sz="1500" dirty="0">
-                <a:solidFill>
-                  <a:srgbClr val="3D3A36"/>
-                </a:solidFill>
-                <a:latin typeface="Calibri" pitchFamily="34" charset="0"/>
-                <a:ea typeface="Calibri" pitchFamily="34" charset="-122"/>
-                <a:cs typeface="Calibri" pitchFamily="34" charset="-120"/>
-              </a:rPr>
-              <a:t>Scatter graph: showing relationship between two variables</a:t>
-            </a:r>
-            <a:endParaRPr lang="en-US" sz="1500" dirty="0"/>
-          </a:p>
-        </p:txBody>
-      </p:sp>
-      <p:sp>
-        <p:nvSpPr>
-          <p:cNvPr id="5" name="Text 3"/>
-          <p:cNvSpPr/>
-          <p:nvPr/>
-        </p:nvSpPr>
-        <p:spPr>
-          <a:xfrm>
-            <a:off x="548640" y="4800600"/>
-            <a:ext cx="3657600" cy="274320"/>
-          </a:xfrm>
-          <a:prstGeom prst="rect">
-            <a:avLst/>
-          </a:prstGeom>
-          <a:noFill/>
-          <a:ln/>
-        </p:spPr>
-        <p:txBody>
-          <a:bodyPr wrap="square" rtlCol="0" anchor="ctr"/>
-          <a:lstStyle/>
-          <a:p>
-            <a:pPr indent="0" marL="0">
-              <a:buNone/>
-            </a:pPr>
-            <a:r>
-              <a:rPr lang="en-US" sz="800" dirty="0">
-                <a:solidFill>
-                  <a:srgbClr val="9B9690"/>
-                </a:solidFill>
-              </a:rPr>
-              <a:t>mrzocchi.com</a:t>
-            </a:r>
-            <a:endParaRPr lang="en-US" sz="800" dirty="0"/>
           </a:p>
         </p:txBody>
       </p:sp>
@@ -1547,7 +1628,7 @@
     <p:bg>
       <p:bgPr>
         <a:solidFill>
-          <a:srgbClr val="FFFFFF"/>
+          <a:srgbClr val="FAF8F5"/>
         </a:solidFill>
       </p:bgPr>
     </p:bg>
@@ -1593,8 +1674,8 @@
         </p:nvSpPr>
         <p:spPr>
           <a:xfrm>
-            <a:off x="548640" y="274320"/>
-            <a:ext cx="8046720" cy="640080"/>
+            <a:off x="7772400" y="4709160"/>
+            <a:ext cx="1097280" cy="320040"/>
           </a:xfrm>
           <a:prstGeom prst="rect">
             <a:avLst/>
@@ -1603,7 +1684,46 @@
           <a:ln/>
         </p:spPr>
         <p:txBody>
-          <a:bodyPr wrap="square" lIns="0" tIns="0" rIns="0" bIns="0" rtlCol="0" anchor="ctr"/>
+          <a:bodyPr wrap="square" rtlCol="0" anchor="ctr"/>
+          <a:lstStyle/>
+          <a:p>
+            <a:pPr algn="r" indent="0" marL="0">
+              <a:buNone/>
+            </a:pPr>
+            <a:r>
+              <a:rPr lang="en-US" sz="900" dirty="0">
+                <a:solidFill>
+                  <a:srgbClr val="6B6660"/>
+                </a:solidFill>
+                <a:latin typeface="Calibri" pitchFamily="34" charset="0"/>
+                <a:ea typeface="Calibri" pitchFamily="34" charset="-122"/>
+                <a:cs typeface="Calibri" pitchFamily="34" charset="-120"/>
+              </a:rPr>
+              <a:t>3 / 5</a:t>
+            </a:r>
+            <a:endParaRPr lang="en-US" sz="900" dirty="0"/>
+          </a:p>
+        </p:txBody>
+      </p:sp>
+      <p:sp>
+        <p:nvSpPr>
+          <p:cNvPr id="4" name="Text 2"/>
+          <p:cNvSpPr/>
+          <p:nvPr/>
+        </p:nvSpPr>
+        <p:spPr>
+          <a:xfrm>
+            <a:off x="457200" y="274320"/>
+            <a:ext cx="8229600" cy="640080"/>
+          </a:xfrm>
+          <a:prstGeom prst="rect">
+            <a:avLst/>
+          </a:prstGeom>
+          <a:noFill/>
+          <a:ln/>
+        </p:spPr>
+        <p:txBody>
+          <a:bodyPr wrap="square" rtlCol="0" anchor="ctr"/>
           <a:lstStyle/>
           <a:p>
             <a:pPr indent="0" marL="0">
@@ -1618,7 +1738,7 @@
                 <a:ea typeface="Georgia" pitchFamily="34" charset="-122"/>
                 <a:cs typeface="Georgia" pitchFamily="34" charset="-120"/>
               </a:rPr>
-              <a:t>Drawing Good Charts</a:t>
+              <a:t>Types of Charts</a:t>
             </a:r>
             <a:endParaRPr lang="en-US" sz="2600" dirty="0"/>
           </a:p>
@@ -1626,14 +1746,66 @@
       </p:sp>
       <p:sp>
         <p:nvSpPr>
-          <p:cNvPr id="4" name="Text 2"/>
-          <p:cNvSpPr/>
-          <p:nvPr/>
-        </p:nvSpPr>
-        <p:spPr>
-          <a:xfrm>
-            <a:off x="548640" y="1097280"/>
-            <a:ext cx="8046720" cy="3474720"/>
+          <p:cNvPr id="5" name="Shape 3"/>
+          <p:cNvSpPr/>
+          <p:nvPr/>
+        </p:nvSpPr>
+        <p:spPr>
+          <a:xfrm>
+            <a:off x="457200" y="1188720"/>
+            <a:ext cx="2560320" cy="1828800"/>
+          </a:xfrm>
+          <a:prstGeom prst="rect">
+            <a:avLst/>
+          </a:prstGeom>
+          <a:solidFill>
+            <a:srgbClr val="FFFFFF"/>
+          </a:solidFill>
+          <a:ln w="12700">
+            <a:solidFill>
+              <a:srgbClr val="E5E2DC"/>
+            </a:solidFill>
+            <a:prstDash val="solid"/>
+          </a:ln>
+          <a:effectLst>
+            <a:outerShdw sx="100000" sy="100000" kx="0" ky="0" algn="bl" rotWithShape="0" blurRad="50800" dist="25400" dir="8100000">
+              <a:srgbClr val="000000">
+                <a:alpha val="10000"/>
+              </a:srgbClr>
+            </a:outerShdw>
+          </a:effectLst>
+        </p:spPr>
+      </p:sp>
+      <p:sp>
+        <p:nvSpPr>
+          <p:cNvPr id="6" name="Shape 4"/>
+          <p:cNvSpPr/>
+          <p:nvPr/>
+        </p:nvSpPr>
+        <p:spPr>
+          <a:xfrm>
+            <a:off x="457200" y="1188720"/>
+            <a:ext cx="2560320" cy="54864"/>
+          </a:xfrm>
+          <a:prstGeom prst="rect">
+            <a:avLst/>
+          </a:prstGeom>
+          <a:solidFill>
+            <a:srgbClr val="2A9D8F"/>
+          </a:solidFill>
+          <a:ln/>
+        </p:spPr>
+      </p:sp>
+      <p:sp>
+        <p:nvSpPr>
+          <p:cNvPr id="7" name="Text 5"/>
+          <p:cNvSpPr/>
+          <p:nvPr/>
+        </p:nvSpPr>
+        <p:spPr>
+          <a:xfrm>
+            <a:off x="594360" y="1325880"/>
+            <a:ext cx="2286000" cy="365760"/>
           </a:xfrm>
           <a:prstGeom prst="rect">
             <a:avLst/>
@@ -1642,39 +1814,53 @@
           <a:ln/>
         </p:spPr>
         <p:txBody>
-          <a:bodyPr wrap="square" rtlCol="0" anchor="t"/>
-          <a:lstStyle/>
-          <a:p>
-            <a:pPr marL="342900" indent="-342900">
-              <a:spcAft>
-                <a:spcPts val="800"/>
-              </a:spcAft>
-              <a:buSzPct val="100000"/>
-              <a:buChar char="•"/>
-            </a:pPr>
-            <a:r>
-              <a:rPr lang="en-US" sz="1500" dirty="0">
-                <a:solidFill>
-                  <a:srgbClr val="3D3A36"/>
+          <a:bodyPr wrap="square" rtlCol="0" anchor="ctr"/>
+          <a:lstStyle/>
+          <a:p>
+            <a:pPr indent="0" marL="0">
+              <a:buNone/>
+            </a:pPr>
+            <a:r>
+              <a:rPr lang="en-US" sz="1400" b="1" dirty="0">
+                <a:solidFill>
+                  <a:srgbClr val="1B2A4A"/>
                 </a:solidFill>
                 <a:latin typeface="Calibri" pitchFamily="34" charset="0"/>
                 <a:ea typeface="Calibri" pitchFamily="34" charset="-122"/>
                 <a:cs typeface="Calibri" pitchFamily="34" charset="-120"/>
               </a:rPr>
-              <a:t>Always include a TITLE describing what the chart shows</a:t>
-            </a:r>
-            <a:endParaRPr lang="en-US" sz="1500" dirty="0"/>
-          </a:p>
-          <a:p>
-            <a:pPr marL="342900" indent="-342900">
-              <a:spcAft>
-                <a:spcPts val="800"/>
-              </a:spcAft>
-              <a:buSzPct val="100000"/>
-              <a:buChar char="•"/>
-            </a:pPr>
-            <a:r>
-              <a:rPr lang="en-US" sz="1500" dirty="0">
+              <a:t>Bar Chart</a:t>
+            </a:r>
+            <a:endParaRPr lang="en-US" sz="1400" dirty="0"/>
+          </a:p>
+        </p:txBody>
+      </p:sp>
+      <p:sp>
+        <p:nvSpPr>
+          <p:cNvPr id="8" name="Text 6"/>
+          <p:cNvSpPr/>
+          <p:nvPr/>
+        </p:nvSpPr>
+        <p:spPr>
+          <a:xfrm>
+            <a:off x="594360" y="1737360"/>
+            <a:ext cx="2286000" cy="1097280"/>
+          </a:xfrm>
+          <a:prstGeom prst="rect">
+            <a:avLst/>
+          </a:prstGeom>
+          <a:noFill/>
+          <a:ln/>
+        </p:spPr>
+        <p:txBody>
+          <a:bodyPr wrap="square" rtlCol="0" anchor="t"/>
+          <a:lstStyle/>
+          <a:p>
+            <a:pPr indent="0" marL="0">
+              <a:buNone/>
+            </a:pPr>
+            <a:r>
+              <a:rPr lang="en-US" sz="1100" dirty="0">
                 <a:solidFill>
                   <a:srgbClr val="3D3A36"/>
                 </a:solidFill>
@@ -1682,41 +1868,129 @@
                 <a:ea typeface="Calibri" pitchFamily="34" charset="-122"/>
                 <a:cs typeface="Calibri" pitchFamily="34" charset="-120"/>
               </a:rPr>
-              <a:t>Label BOTH axes with variable name and unit</a:t>
-            </a:r>
-            <a:endParaRPr lang="en-US" sz="1500" dirty="0"/>
-          </a:p>
-          <a:p>
-            <a:pPr marL="342900" indent="-342900">
-              <a:spcAft>
-                <a:spcPts val="800"/>
-              </a:spcAft>
-              <a:buSzPct val="100000"/>
-              <a:buChar char="•"/>
-            </a:pPr>
-            <a:r>
-              <a:rPr lang="en-US" sz="1500" dirty="0">
-                <a:solidFill>
-                  <a:srgbClr val="3D3A36"/>
+              <a:t>Categoric data. Bars DON'T touch. Equal width. Frequency on y-axis. Example: favourite colours in a class.</a:t>
+            </a:r>
+            <a:endParaRPr lang="en-US" sz="1100" dirty="0"/>
+          </a:p>
+        </p:txBody>
+      </p:sp>
+      <p:sp>
+        <p:nvSpPr>
+          <p:cNvPr id="9" name="Shape 7"/>
+          <p:cNvSpPr/>
+          <p:nvPr/>
+        </p:nvSpPr>
+        <p:spPr>
+          <a:xfrm>
+            <a:off x="3291840" y="1188720"/>
+            <a:ext cx="2560320" cy="1828800"/>
+          </a:xfrm>
+          <a:prstGeom prst="rect">
+            <a:avLst/>
+          </a:prstGeom>
+          <a:solidFill>
+            <a:srgbClr val="FFFFFF"/>
+          </a:solidFill>
+          <a:ln w="12700">
+            <a:solidFill>
+              <a:srgbClr val="E5E2DC"/>
+            </a:solidFill>
+            <a:prstDash val="solid"/>
+          </a:ln>
+          <a:effectLst>
+            <a:outerShdw sx="100000" sy="100000" kx="0" ky="0" algn="bl" rotWithShape="0" blurRad="50800" dist="25400" dir="8100000">
+              <a:srgbClr val="000000">
+                <a:alpha val="10000"/>
+              </a:srgbClr>
+            </a:outerShdw>
+          </a:effectLst>
+        </p:spPr>
+      </p:sp>
+      <p:sp>
+        <p:nvSpPr>
+          <p:cNvPr id="10" name="Shape 8"/>
+          <p:cNvSpPr/>
+          <p:nvPr/>
+        </p:nvSpPr>
+        <p:spPr>
+          <a:xfrm>
+            <a:off x="3291840" y="1188720"/>
+            <a:ext cx="2560320" cy="54864"/>
+          </a:xfrm>
+          <a:prstGeom prst="rect">
+            <a:avLst/>
+          </a:prstGeom>
+          <a:solidFill>
+            <a:srgbClr val="2A9D8F"/>
+          </a:solidFill>
+          <a:ln/>
+        </p:spPr>
+      </p:sp>
+      <p:sp>
+        <p:nvSpPr>
+          <p:cNvPr id="11" name="Text 9"/>
+          <p:cNvSpPr/>
+          <p:nvPr/>
+        </p:nvSpPr>
+        <p:spPr>
+          <a:xfrm>
+            <a:off x="3429000" y="1325880"/>
+            <a:ext cx="2286000" cy="365760"/>
+          </a:xfrm>
+          <a:prstGeom prst="rect">
+            <a:avLst/>
+          </a:prstGeom>
+          <a:noFill/>
+          <a:ln/>
+        </p:spPr>
+        <p:txBody>
+          <a:bodyPr wrap="square" rtlCol="0" anchor="ctr"/>
+          <a:lstStyle/>
+          <a:p>
+            <a:pPr indent="0" marL="0">
+              <a:buNone/>
+            </a:pPr>
+            <a:r>
+              <a:rPr lang="en-US" sz="1400" b="1" dirty="0">
+                <a:solidFill>
+                  <a:srgbClr val="1B2A4A"/>
                 </a:solidFill>
                 <a:latin typeface="Calibri" pitchFamily="34" charset="0"/>
                 <a:ea typeface="Calibri" pitchFamily="34" charset="-122"/>
                 <a:cs typeface="Calibri" pitchFamily="34" charset="-120"/>
               </a:rPr>
-              <a:t>Use a consistent scale — don't skip numbers</a:t>
-            </a:r>
-            <a:endParaRPr lang="en-US" sz="1500" dirty="0"/>
-          </a:p>
-          <a:p>
-            <a:pPr marL="342900" indent="-342900">
-              <a:spcAft>
-                <a:spcPts val="800"/>
-              </a:spcAft>
-              <a:buSzPct val="100000"/>
-              <a:buChar char="•"/>
-            </a:pPr>
-            <a:r>
-              <a:rPr lang="en-US" sz="1500" dirty="0">
+              <a:t>Pie Chart</a:t>
+            </a:r>
+            <a:endParaRPr lang="en-US" sz="1400" dirty="0"/>
+          </a:p>
+        </p:txBody>
+      </p:sp>
+      <p:sp>
+        <p:nvSpPr>
+          <p:cNvPr id="12" name="Text 10"/>
+          <p:cNvSpPr/>
+          <p:nvPr/>
+        </p:nvSpPr>
+        <p:spPr>
+          <a:xfrm>
+            <a:off x="3429000" y="1737360"/>
+            <a:ext cx="2286000" cy="1097280"/>
+          </a:xfrm>
+          <a:prstGeom prst="rect">
+            <a:avLst/>
+          </a:prstGeom>
+          <a:noFill/>
+          <a:ln/>
+        </p:spPr>
+        <p:txBody>
+          <a:bodyPr wrap="square" rtlCol="0" anchor="t"/>
+          <a:lstStyle/>
+          <a:p>
+            <a:pPr indent="0" marL="0">
+              <a:buNone/>
+            </a:pPr>
+            <a:r>
+              <a:rPr lang="en-US" sz="1100" dirty="0">
                 <a:solidFill>
                   <a:srgbClr val="3D3A36"/>
                 </a:solidFill>
@@ -1724,41 +1998,129 @@
                 <a:ea typeface="Calibri" pitchFamily="34" charset="-122"/>
                 <a:cs typeface="Calibri" pitchFamily="34" charset="-120"/>
               </a:rPr>
-              <a:t>Bars on bar charts should have gaps between them</a:t>
-            </a:r>
-            <a:endParaRPr lang="en-US" sz="1500" dirty="0"/>
-          </a:p>
-          <a:p>
-            <a:pPr marL="342900" indent="-342900">
-              <a:spcAft>
-                <a:spcPts val="800"/>
-              </a:spcAft>
-              <a:buSzPct val="100000"/>
-              <a:buChar char="•"/>
-            </a:pPr>
-            <a:r>
-              <a:rPr lang="en-US" sz="1500" dirty="0">
-                <a:solidFill>
-                  <a:srgbClr val="3D3A36"/>
+              <a:t>Shows proportions. All sections = 100% (360°). Fraction × 360 = angle. Best for 3–6 categories.</a:t>
+            </a:r>
+            <a:endParaRPr lang="en-US" sz="1100" dirty="0"/>
+          </a:p>
+        </p:txBody>
+      </p:sp>
+      <p:sp>
+        <p:nvSpPr>
+          <p:cNvPr id="13" name="Shape 11"/>
+          <p:cNvSpPr/>
+          <p:nvPr/>
+        </p:nvSpPr>
+        <p:spPr>
+          <a:xfrm>
+            <a:off x="6126480" y="1188720"/>
+            <a:ext cx="2560320" cy="1828800"/>
+          </a:xfrm>
+          <a:prstGeom prst="rect">
+            <a:avLst/>
+          </a:prstGeom>
+          <a:solidFill>
+            <a:srgbClr val="FFFFFF"/>
+          </a:solidFill>
+          <a:ln w="12700">
+            <a:solidFill>
+              <a:srgbClr val="E5E2DC"/>
+            </a:solidFill>
+            <a:prstDash val="solid"/>
+          </a:ln>
+          <a:effectLst>
+            <a:outerShdw sx="100000" sy="100000" kx="0" ky="0" algn="bl" rotWithShape="0" blurRad="50800" dist="25400" dir="8100000">
+              <a:srgbClr val="000000">
+                <a:alpha val="10000"/>
+              </a:srgbClr>
+            </a:outerShdw>
+          </a:effectLst>
+        </p:spPr>
+      </p:sp>
+      <p:sp>
+        <p:nvSpPr>
+          <p:cNvPr id="14" name="Shape 12"/>
+          <p:cNvSpPr/>
+          <p:nvPr/>
+        </p:nvSpPr>
+        <p:spPr>
+          <a:xfrm>
+            <a:off x="6126480" y="1188720"/>
+            <a:ext cx="2560320" cy="54864"/>
+          </a:xfrm>
+          <a:prstGeom prst="rect">
+            <a:avLst/>
+          </a:prstGeom>
+          <a:solidFill>
+            <a:srgbClr val="2A9D8F"/>
+          </a:solidFill>
+          <a:ln/>
+        </p:spPr>
+      </p:sp>
+      <p:sp>
+        <p:nvSpPr>
+          <p:cNvPr id="15" name="Text 13"/>
+          <p:cNvSpPr/>
+          <p:nvPr/>
+        </p:nvSpPr>
+        <p:spPr>
+          <a:xfrm>
+            <a:off x="6263640" y="1325880"/>
+            <a:ext cx="2286000" cy="365760"/>
+          </a:xfrm>
+          <a:prstGeom prst="rect">
+            <a:avLst/>
+          </a:prstGeom>
+          <a:noFill/>
+          <a:ln/>
+        </p:spPr>
+        <p:txBody>
+          <a:bodyPr wrap="square" rtlCol="0" anchor="ctr"/>
+          <a:lstStyle/>
+          <a:p>
+            <a:pPr indent="0" marL="0">
+              <a:buNone/>
+            </a:pPr>
+            <a:r>
+              <a:rPr lang="en-US" sz="1400" b="1" dirty="0">
+                <a:solidFill>
+                  <a:srgbClr val="1B2A4A"/>
                 </a:solidFill>
                 <a:latin typeface="Calibri" pitchFamily="34" charset="0"/>
                 <a:ea typeface="Calibri" pitchFamily="34" charset="-122"/>
                 <a:cs typeface="Calibri" pitchFamily="34" charset="-120"/>
               </a:rPr>
-              <a:t>Line graphs: plot points accurately, then join with straight lines</a:t>
-            </a:r>
-            <a:endParaRPr lang="en-US" sz="1500" dirty="0"/>
-          </a:p>
-          <a:p>
-            <a:pPr marL="342900" indent="-342900">
-              <a:spcAft>
-                <a:spcPts val="800"/>
-              </a:spcAft>
-              <a:buSzPct val="100000"/>
-              <a:buChar char="•"/>
-            </a:pPr>
-            <a:r>
-              <a:rPr lang="en-US" sz="1500" dirty="0">
+              <a:t>Line Graph</a:t>
+            </a:r>
+            <a:endParaRPr lang="en-US" sz="1400" dirty="0"/>
+          </a:p>
+        </p:txBody>
+      </p:sp>
+      <p:sp>
+        <p:nvSpPr>
+          <p:cNvPr id="16" name="Text 14"/>
+          <p:cNvSpPr/>
+          <p:nvPr/>
+        </p:nvSpPr>
+        <p:spPr>
+          <a:xfrm>
+            <a:off x="6263640" y="1737360"/>
+            <a:ext cx="2286000" cy="1097280"/>
+          </a:xfrm>
+          <a:prstGeom prst="rect">
+            <a:avLst/>
+          </a:prstGeom>
+          <a:noFill/>
+          <a:ln/>
+        </p:spPr>
+        <p:txBody>
+          <a:bodyPr wrap="square" rtlCol="0" anchor="t"/>
+          <a:lstStyle/>
+          <a:p>
+            <a:pPr indent="0" marL="0">
+              <a:buNone/>
+            </a:pPr>
+            <a:r>
+              <a:rPr lang="en-US" sz="1100" dirty="0">
                 <a:solidFill>
                   <a:srgbClr val="3D3A36"/>
                 </a:solidFill>
@@ -1766,45 +2128,9 @@
                 <a:ea typeface="Calibri" pitchFamily="34" charset="-122"/>
                 <a:cs typeface="Calibri" pitchFamily="34" charset="-120"/>
               </a:rPr>
-              <a:t>Pie charts: calculate angles (fraction × 360°)</a:t>
-            </a:r>
-            <a:endParaRPr lang="en-US" sz="1500" dirty="0"/>
-          </a:p>
-        </p:txBody>
-      </p:sp>
-      <p:sp>
-        <p:nvSpPr>
-          <p:cNvPr id="5" name="Text 3"/>
-          <p:cNvSpPr/>
-          <p:nvPr/>
-        </p:nvSpPr>
-        <p:spPr>
-          <a:xfrm>
-            <a:off x="548640" y="4800600"/>
-            <a:ext cx="3657600" cy="274320"/>
-          </a:xfrm>
-          <a:prstGeom prst="rect">
-            <a:avLst/>
-          </a:prstGeom>
-          <a:noFill/>
-          <a:ln/>
-        </p:spPr>
-        <p:txBody>
-          <a:bodyPr wrap="square" rtlCol="0" anchor="ctr"/>
-          <a:lstStyle/>
-          <a:p>
-            <a:pPr indent="0" marL="0">
-              <a:buNone/>
-            </a:pPr>
-            <a:r>
-              <a:rPr lang="en-US" sz="800" dirty="0">
-                <a:solidFill>
-                  <a:srgbClr val="9B9690"/>
-                </a:solidFill>
-              </a:rPr>
-              <a:t>mrzocchi.com</a:t>
-            </a:r>
-            <a:endParaRPr lang="en-US" sz="800" dirty="0"/>
+              <a:t>Continuous data over time. Points connected with lines. Shows trends. Example: temperature over 24 hours.</a:t>
+            </a:r>
+            <a:endParaRPr lang="en-US" sz="1100" dirty="0"/>
           </a:p>
         </p:txBody>
       </p:sp>
@@ -1819,6 +2145,507 @@
 <file path=ppt/slides/slide4.xml><?xml version="1.0" encoding="utf-8"?>
 <p:sld xmlns:a="http://schemas.openxmlformats.org/drawingml/2006/main" xmlns:r="http://schemas.openxmlformats.org/officeDocument/2006/relationships" xmlns:p="http://schemas.openxmlformats.org/presentationml/2006/main">
   <p:cSld name="Slide 4">
+    <p:bg>
+      <p:bgPr>
+        <a:solidFill>
+          <a:srgbClr val="FAF8F5"/>
+        </a:solidFill>
+      </p:bgPr>
+    </p:bg>
+    <p:spTree>
+      <p:nvGrpSpPr>
+        <p:cNvPr id="1" name=""/>
+        <p:cNvGrpSpPr/>
+        <p:nvPr/>
+      </p:nvGrpSpPr>
+      <p:grpSpPr>
+        <a:xfrm>
+          <a:off x="0" y="0"/>
+          <a:ext cx="0" cy="0"/>
+          <a:chOff x="0" y="0"/>
+          <a:chExt cx="0" cy="0"/>
+        </a:xfrm>
+      </p:grpSpPr>
+      <p:sp>
+        <p:nvSpPr>
+          <p:cNvPr id="2" name="Shape 0"/>
+          <p:cNvSpPr/>
+          <p:nvPr/>
+        </p:nvSpPr>
+        <p:spPr>
+          <a:xfrm>
+            <a:off x="0" y="0"/>
+            <a:ext cx="9144000" cy="54864"/>
+          </a:xfrm>
+          <a:prstGeom prst="rect">
+            <a:avLst/>
+          </a:prstGeom>
+          <a:solidFill>
+            <a:srgbClr val="2A9D8F"/>
+          </a:solidFill>
+          <a:ln/>
+        </p:spPr>
+      </p:sp>
+      <p:sp>
+        <p:nvSpPr>
+          <p:cNvPr id="3" name="Text 1"/>
+          <p:cNvSpPr/>
+          <p:nvPr/>
+        </p:nvSpPr>
+        <p:spPr>
+          <a:xfrm>
+            <a:off x="7772400" y="4709160"/>
+            <a:ext cx="1097280" cy="320040"/>
+          </a:xfrm>
+          <a:prstGeom prst="rect">
+            <a:avLst/>
+          </a:prstGeom>
+          <a:noFill/>
+          <a:ln/>
+        </p:spPr>
+        <p:txBody>
+          <a:bodyPr wrap="square" rtlCol="0" anchor="ctr"/>
+          <a:lstStyle/>
+          <a:p>
+            <a:pPr algn="r" indent="0" marL="0">
+              <a:buNone/>
+            </a:pPr>
+            <a:r>
+              <a:rPr lang="en-US" sz="900" dirty="0">
+                <a:solidFill>
+                  <a:srgbClr val="6B6660"/>
+                </a:solidFill>
+                <a:latin typeface="Calibri" pitchFamily="34" charset="0"/>
+                <a:ea typeface="Calibri" pitchFamily="34" charset="-122"/>
+                <a:cs typeface="Calibri" pitchFamily="34" charset="-120"/>
+              </a:rPr>
+              <a:t>4 / 5</a:t>
+            </a:r>
+            <a:endParaRPr lang="en-US" sz="900" dirty="0"/>
+          </a:p>
+        </p:txBody>
+      </p:sp>
+      <p:sp>
+        <p:nvSpPr>
+          <p:cNvPr id="4" name="Text 2"/>
+          <p:cNvSpPr/>
+          <p:nvPr/>
+        </p:nvSpPr>
+        <p:spPr>
+          <a:xfrm>
+            <a:off x="457200" y="274320"/>
+            <a:ext cx="8229600" cy="640080"/>
+          </a:xfrm>
+          <a:prstGeom prst="rect">
+            <a:avLst/>
+          </a:prstGeom>
+          <a:noFill/>
+          <a:ln/>
+        </p:spPr>
+        <p:txBody>
+          <a:bodyPr wrap="square" rtlCol="0" anchor="ctr"/>
+          <a:lstStyle/>
+          <a:p>
+            <a:pPr indent="0" marL="0">
+              <a:buNone/>
+            </a:pPr>
+            <a:r>
+              <a:rPr lang="en-US" sz="2600" b="1" dirty="0">
+                <a:solidFill>
+                  <a:srgbClr val="1B2A4A"/>
+                </a:solidFill>
+                <a:latin typeface="Georgia" pitchFamily="34" charset="0"/>
+                <a:ea typeface="Georgia" pitchFamily="34" charset="-122"/>
+                <a:cs typeface="Georgia" pitchFamily="34" charset="-120"/>
+              </a:rPr>
+              <a:t>Drawing Charts Well</a:t>
+            </a:r>
+            <a:endParaRPr lang="en-US" sz="2600" dirty="0"/>
+          </a:p>
+        </p:txBody>
+      </p:sp>
+      <p:sp>
+        <p:nvSpPr>
+          <p:cNvPr id="5" name="Text 3"/>
+          <p:cNvSpPr/>
+          <p:nvPr/>
+        </p:nvSpPr>
+        <p:spPr>
+          <a:xfrm>
+            <a:off x="457200" y="1188720"/>
+            <a:ext cx="3840480" cy="3474720"/>
+          </a:xfrm>
+          <a:prstGeom prst="rect">
+            <a:avLst/>
+          </a:prstGeom>
+          <a:noFill/>
+          <a:ln/>
+        </p:spPr>
+        <p:txBody>
+          <a:bodyPr wrap="square" rtlCol="0" anchor="t"/>
+          <a:lstStyle/>
+          <a:p>
+            <a:pPr marL="342900" indent="-342900">
+              <a:spcAft>
+                <a:spcPts val="600"/>
+              </a:spcAft>
+              <a:buSzPct val="100000"/>
+              <a:buChar char="•"/>
+            </a:pPr>
+            <a:r>
+              <a:rPr lang="en-US" sz="1400" dirty="0">
+                <a:solidFill>
+                  <a:srgbClr val="3D3A36"/>
+                </a:solidFill>
+                <a:latin typeface="Calibri" pitchFamily="34" charset="0"/>
+                <a:ea typeface="Calibri" pitchFamily="34" charset="-122"/>
+                <a:cs typeface="Calibri" pitchFamily="34" charset="-120"/>
+              </a:rPr>
+              <a:t>Title: describes what the chart shows</a:t>
+            </a:r>
+            <a:endParaRPr lang="en-US" sz="1400" dirty="0"/>
+          </a:p>
+          <a:p>
+            <a:pPr marL="342900" indent="-342900">
+              <a:spcAft>
+                <a:spcPts val="600"/>
+              </a:spcAft>
+              <a:buSzPct val="100000"/>
+              <a:buChar char="•"/>
+            </a:pPr>
+            <a:r>
+              <a:rPr lang="en-US" sz="1400" dirty="0">
+                <a:solidFill>
+                  <a:srgbClr val="3D3A36"/>
+                </a:solidFill>
+                <a:latin typeface="Calibri" pitchFamily="34" charset="0"/>
+                <a:ea typeface="Calibri" pitchFamily="34" charset="-122"/>
+                <a:cs typeface="Calibri" pitchFamily="34" charset="-120"/>
+              </a:rPr>
+              <a:t>Axes: labelled with variable name AND unit</a:t>
+            </a:r>
+            <a:endParaRPr lang="en-US" sz="1400" dirty="0"/>
+          </a:p>
+          <a:p>
+            <a:pPr marL="342900" indent="-342900">
+              <a:spcAft>
+                <a:spcPts val="600"/>
+              </a:spcAft>
+              <a:buSzPct val="100000"/>
+              <a:buChar char="•"/>
+            </a:pPr>
+            <a:r>
+              <a:rPr lang="en-US" sz="1400" dirty="0">
+                <a:solidFill>
+                  <a:srgbClr val="3D3A36"/>
+                </a:solidFill>
+                <a:latin typeface="Calibri" pitchFamily="34" charset="0"/>
+                <a:ea typeface="Calibri" pitchFamily="34" charset="-122"/>
+                <a:cs typeface="Calibri" pitchFamily="34" charset="-120"/>
+              </a:rPr>
+              <a:t>Scale: even intervals, uses most of the space</a:t>
+            </a:r>
+            <a:endParaRPr lang="en-US" sz="1400" dirty="0"/>
+          </a:p>
+          <a:p>
+            <a:pPr marL="342900" indent="-342900">
+              <a:spcAft>
+                <a:spcPts val="600"/>
+              </a:spcAft>
+              <a:buSzPct val="100000"/>
+              <a:buChar char="•"/>
+            </a:pPr>
+            <a:r>
+              <a:rPr lang="en-US" sz="1400" dirty="0">
+                <a:solidFill>
+                  <a:srgbClr val="3D3A36"/>
+                </a:solidFill>
+                <a:latin typeface="Calibri" pitchFamily="34" charset="0"/>
+                <a:ea typeface="Calibri" pitchFamily="34" charset="-122"/>
+                <a:cs typeface="Calibri" pitchFamily="34" charset="-120"/>
+              </a:rPr>
+              <a:t>Bars: equal width, equal gaps, don't touch</a:t>
+            </a:r>
+            <a:endParaRPr lang="en-US" sz="1400" dirty="0"/>
+          </a:p>
+          <a:p>
+            <a:pPr marL="342900" indent="-342900">
+              <a:spcAft>
+                <a:spcPts val="600"/>
+              </a:spcAft>
+              <a:buSzPct val="100000"/>
+              <a:buChar char="•"/>
+            </a:pPr>
+            <a:r>
+              <a:rPr lang="en-US" sz="1400" dirty="0">
+                <a:solidFill>
+                  <a:srgbClr val="3D3A36"/>
+                </a:solidFill>
+                <a:latin typeface="Calibri" pitchFamily="34" charset="0"/>
+                <a:ea typeface="Calibri" pitchFamily="34" charset="-122"/>
+                <a:cs typeface="Calibri" pitchFamily="34" charset="-120"/>
+              </a:rPr>
+              <a:t>Pie: calculate angles (fraction × 360°)</a:t>
+            </a:r>
+            <a:endParaRPr lang="en-US" sz="1400" dirty="0"/>
+          </a:p>
+          <a:p>
+            <a:pPr marL="342900" indent="-342900">
+              <a:spcAft>
+                <a:spcPts val="600"/>
+              </a:spcAft>
+              <a:buSzPct val="100000"/>
+              <a:buChar char="•"/>
+            </a:pPr>
+            <a:r>
+              <a:rPr lang="en-US" sz="1400" dirty="0">
+                <a:solidFill>
+                  <a:srgbClr val="3D3A36"/>
+                </a:solidFill>
+                <a:latin typeface="Calibri" pitchFamily="34" charset="0"/>
+                <a:ea typeface="Calibri" pitchFamily="34" charset="-122"/>
+                <a:cs typeface="Calibri" pitchFamily="34" charset="-120"/>
+              </a:rPr>
+              <a:t>Line: plot points carefully, connect with straight lines</a:t>
+            </a:r>
+            <a:endParaRPr lang="en-US" sz="1400" dirty="0"/>
+          </a:p>
+        </p:txBody>
+      </p:sp>
+      <p:sp>
+        <p:nvSpPr>
+          <p:cNvPr id="6" name="Shape 4"/>
+          <p:cNvSpPr/>
+          <p:nvPr/>
+        </p:nvSpPr>
+        <p:spPr>
+          <a:xfrm>
+            <a:off x="4846320" y="1188720"/>
+            <a:ext cx="3840480" cy="3474720"/>
+          </a:xfrm>
+          <a:prstGeom prst="rect">
+            <a:avLst/>
+          </a:prstGeom>
+          <a:solidFill>
+            <a:srgbClr val="FFFFFF"/>
+          </a:solidFill>
+          <a:ln w="12700">
+            <a:solidFill>
+              <a:srgbClr val="E5E2DC"/>
+            </a:solidFill>
+            <a:prstDash val="solid"/>
+          </a:ln>
+          <a:effectLst>
+            <a:outerShdw sx="100000" sy="100000" kx="0" ky="0" algn="bl" rotWithShape="0" blurRad="50800" dist="25400" dir="8100000">
+              <a:srgbClr val="000000">
+                <a:alpha val="10000"/>
+              </a:srgbClr>
+            </a:outerShdw>
+          </a:effectLst>
+        </p:spPr>
+      </p:sp>
+      <p:sp>
+        <p:nvSpPr>
+          <p:cNvPr id="7" name="Shape 5"/>
+          <p:cNvSpPr/>
+          <p:nvPr/>
+        </p:nvSpPr>
+        <p:spPr>
+          <a:xfrm>
+            <a:off x="4846320" y="1188720"/>
+            <a:ext cx="3840480" cy="54864"/>
+          </a:xfrm>
+          <a:prstGeom prst="rect">
+            <a:avLst/>
+          </a:prstGeom>
+          <a:solidFill>
+            <a:srgbClr val="2A9D8F"/>
+          </a:solidFill>
+          <a:ln/>
+        </p:spPr>
+      </p:sp>
+      <p:sp>
+        <p:nvSpPr>
+          <p:cNvPr id="8" name="Text 6"/>
+          <p:cNvSpPr/>
+          <p:nvPr/>
+        </p:nvSpPr>
+        <p:spPr>
+          <a:xfrm>
+            <a:off x="5120640" y="1371600"/>
+            <a:ext cx="3291840" cy="3108960"/>
+          </a:xfrm>
+          <a:prstGeom prst="rect">
+            <a:avLst/>
+          </a:prstGeom>
+          <a:noFill/>
+          <a:ln/>
+        </p:spPr>
+        <p:txBody>
+          <a:bodyPr wrap="square" rtlCol="0" anchor="t"/>
+          <a:lstStyle/>
+          <a:p>
+            <a:pPr indent="0" marL="0">
+              <a:spcAft>
+                <a:spcPts val="400"/>
+              </a:spcAft>
+              <a:buNone/>
+            </a:pPr>
+            <a:r>
+              <a:rPr lang="en-US" sz="1600" b="1" dirty="0">
+                <a:solidFill>
+                  <a:srgbClr val="1B2A4A"/>
+                </a:solidFill>
+                <a:latin typeface="Calibri" pitchFamily="34" charset="0"/>
+                <a:ea typeface="Calibri" pitchFamily="34" charset="-122"/>
+                <a:cs typeface="Calibri" pitchFamily="34" charset="-120"/>
+              </a:rPr>
+              <a:t>Reading and Interpreting</a:t>
+            </a:r>
+            <a:endParaRPr lang="en-US" sz="1600" dirty="0"/>
+          </a:p>
+          <a:p>
+            <a:pPr indent="0" marL="0">
+              <a:spcAft>
+                <a:spcPts val="400"/>
+              </a:spcAft>
+              <a:buNone/>
+            </a:pPr>
+            <a:endParaRPr lang="en-US" sz="1600" dirty="0"/>
+          </a:p>
+          <a:p>
+            <a:pPr indent="0" marL="0">
+              <a:spcAft>
+                <a:spcPts val="400"/>
+              </a:spcAft>
+              <a:buNone/>
+            </a:pPr>
+            <a:r>
+              <a:rPr lang="en-US" sz="1300" dirty="0">
+                <a:solidFill>
+                  <a:srgbClr val="3D3A36"/>
+                </a:solidFill>
+                <a:latin typeface="Calibri" pitchFamily="34" charset="0"/>
+                <a:ea typeface="Calibri" pitchFamily="34" charset="-122"/>
+                <a:cs typeface="Calibri" pitchFamily="34" charset="-120"/>
+              </a:rPr>
+              <a:t>Describe the overall pattern or trend</a:t>
+            </a:r>
+            <a:endParaRPr lang="en-US" sz="1600" dirty="0"/>
+          </a:p>
+          <a:p>
+            <a:pPr indent="0" marL="0">
+              <a:spcAft>
+                <a:spcPts val="400"/>
+              </a:spcAft>
+              <a:buNone/>
+            </a:pPr>
+            <a:r>
+              <a:rPr lang="en-US" sz="1300" dirty="0">
+                <a:solidFill>
+                  <a:srgbClr val="3D3A36"/>
+                </a:solidFill>
+                <a:latin typeface="Calibri" pitchFamily="34" charset="0"/>
+                <a:ea typeface="Calibri" pitchFamily="34" charset="-122"/>
+                <a:cs typeface="Calibri" pitchFamily="34" charset="-120"/>
+              </a:rPr>
+              <a:t>Compare specific values using the data</a:t>
+            </a:r>
+            <a:endParaRPr lang="en-US" sz="1600" dirty="0"/>
+          </a:p>
+          <a:p>
+            <a:pPr indent="0" marL="0">
+              <a:spcAft>
+                <a:spcPts val="400"/>
+              </a:spcAft>
+              <a:buNone/>
+            </a:pPr>
+            <a:r>
+              <a:rPr lang="en-US" sz="1300" dirty="0">
+                <a:solidFill>
+                  <a:srgbClr val="3D3A36"/>
+                </a:solidFill>
+                <a:latin typeface="Calibri" pitchFamily="34" charset="0"/>
+                <a:ea typeface="Calibri" pitchFamily="34" charset="-122"/>
+                <a:cs typeface="Calibri" pitchFamily="34" charset="-120"/>
+              </a:rPr>
+              <a:t>Identify the highest/lowest values</a:t>
+            </a:r>
+            <a:endParaRPr lang="en-US" sz="1600" dirty="0"/>
+          </a:p>
+          <a:p>
+            <a:pPr indent="0" marL="0">
+              <a:spcAft>
+                <a:spcPts val="400"/>
+              </a:spcAft>
+              <a:buNone/>
+            </a:pPr>
+            <a:r>
+              <a:rPr lang="en-US" sz="1300" dirty="0">
+                <a:solidFill>
+                  <a:srgbClr val="3D3A36"/>
+                </a:solidFill>
+                <a:latin typeface="Calibri" pitchFamily="34" charset="0"/>
+                <a:ea typeface="Calibri" pitchFamily="34" charset="-122"/>
+                <a:cs typeface="Calibri" pitchFamily="34" charset="-120"/>
+              </a:rPr>
+              <a:t>Look for anomalies or unexpected results</a:t>
+            </a:r>
+            <a:endParaRPr lang="en-US" sz="1600" dirty="0"/>
+          </a:p>
+          <a:p>
+            <a:pPr indent="0" marL="0">
+              <a:spcAft>
+                <a:spcPts val="400"/>
+              </a:spcAft>
+              <a:buNone/>
+            </a:pPr>
+            <a:r>
+              <a:rPr lang="en-US" sz="1300" dirty="0">
+                <a:solidFill>
+                  <a:srgbClr val="3D3A36"/>
+                </a:solidFill>
+                <a:latin typeface="Calibri" pitchFamily="34" charset="0"/>
+                <a:ea typeface="Calibri" pitchFamily="34" charset="-122"/>
+                <a:cs typeface="Calibri" pitchFamily="34" charset="-120"/>
+              </a:rPr>
+              <a:t>Use data to answer the original question</a:t>
+            </a:r>
+            <a:endParaRPr lang="en-US" sz="1600" dirty="0"/>
+          </a:p>
+          <a:p>
+            <a:pPr indent="0" marL="0">
+              <a:spcAft>
+                <a:spcPts val="400"/>
+              </a:spcAft>
+              <a:buNone/>
+            </a:pPr>
+            <a:r>
+              <a:rPr lang="en-US" sz="1300" dirty="0">
+                <a:solidFill>
+                  <a:srgbClr val="3D3A36"/>
+                </a:solidFill>
+                <a:latin typeface="Calibri" pitchFamily="34" charset="0"/>
+                <a:ea typeface="Calibri" pitchFamily="34" charset="-122"/>
+                <a:cs typeface="Calibri" pitchFamily="34" charset="-120"/>
+              </a:rPr>
+              <a:t>'The most popular colour was blue with 12 votes'</a:t>
+            </a:r>
+            <a:endParaRPr lang="en-US" sz="1600" dirty="0"/>
+          </a:p>
+        </p:txBody>
+      </p:sp>
+    </p:spTree>
+  </p:cSld>
+  <p:clrMapOvr>
+    <a:masterClrMapping/>
+  </p:clrMapOvr>
+</p:sld>
+</file>
+
+<file path=ppt/slides/slide5.xml><?xml version="1.0" encoding="utf-8"?>
+<p:sld xmlns:a="http://schemas.openxmlformats.org/drawingml/2006/main" xmlns:r="http://schemas.openxmlformats.org/officeDocument/2006/relationships" xmlns:p="http://schemas.openxmlformats.org/presentationml/2006/main">
+  <p:cSld name="Slide 5">
     <p:bg>
       <p:bgPr>
         <a:solidFill>
@@ -1849,13 +2676,13 @@
         <p:spPr>
           <a:xfrm>
             <a:off x="0" y="0"/>
-            <a:ext cx="9144000" cy="54864"/>
-          </a:xfrm>
-          <a:prstGeom prst="rect">
-            <a:avLst/>
-          </a:prstGeom>
-          <a:solidFill>
-            <a:srgbClr val="2A9D8F"/>
+            <a:ext cx="109728" cy="5143500"/>
+          </a:xfrm>
+          <a:prstGeom prst="rect">
+            <a:avLst/>
+          </a:prstGeom>
+          <a:solidFill>
+            <a:srgbClr val="E9C46A"/>
           </a:solidFill>
           <a:ln/>
         </p:spPr>
@@ -1868,8 +2695,8 @@
         </p:nvSpPr>
         <p:spPr>
           <a:xfrm>
-            <a:off x="548640" y="457200"/>
-            <a:ext cx="8046720" cy="640080"/>
+            <a:off x="731520" y="457200"/>
+            <a:ext cx="7772400" cy="731520"/>
           </a:xfrm>
           <a:prstGeom prst="rect">
             <a:avLst/>
@@ -1885,7 +2712,7 @@
               <a:buNone/>
             </a:pPr>
             <a:r>
-              <a:rPr lang="en-US" sz="2800" b="1" dirty="0">
+              <a:rPr lang="en-US" sz="3200" b="1" dirty="0">
                 <a:solidFill>
                   <a:srgbClr val="FFFFFF"/>
                 </a:solidFill>
@@ -1895,7 +2722,7 @@
               </a:rPr>
               <a:t>Key Takeaways</a:t>
             </a:r>
-            <a:endParaRPr lang="en-US" sz="2800" dirty="0"/>
+            <a:endParaRPr lang="en-US" sz="3200" dirty="0"/>
           </a:p>
         </p:txBody>
       </p:sp>
@@ -1907,8 +2734,8 @@
         </p:nvSpPr>
         <p:spPr>
           <a:xfrm>
-            <a:off x="731520" y="1371600"/>
-            <a:ext cx="7680960" cy="3200400"/>
+            <a:off x="731520" y="1463040"/>
+            <a:ext cx="7772400" cy="3200400"/>
           </a:xfrm>
           <a:prstGeom prst="rect">
             <a:avLst/>
@@ -1928,7 +2755,7 @@
               <a:buChar char="•"/>
             </a:pPr>
             <a:r>
-              <a:rPr lang="en-US" sz="1600" dirty="0">
+              <a:rPr lang="en-US" sz="1500" dirty="0">
                 <a:solidFill>
                   <a:srgbClr val="CADCFC"/>
                 </a:solidFill>
@@ -1936,9 +2763,9 @@
                 <a:ea typeface="Calibri" pitchFamily="34" charset="-122"/>
                 <a:cs typeface="Calibri" pitchFamily="34" charset="-120"/>
               </a:rPr>
-              <a:t>Bar charts: categories | Line graphs: change over time | Pie charts: proportions</a:t>
-            </a:r>
-            <a:endParaRPr lang="en-US" sz="1600" dirty="0"/>
+              <a:t>Bar chart: categories (bars don't touch). Pie: proportions (360°). Line: trends over time</a:t>
+            </a:r>
+            <a:endParaRPr lang="en-US" sz="1500" dirty="0"/>
           </a:p>
           <a:p>
             <a:pPr marL="342900" indent="-342900">
@@ -1949,7 +2776,7 @@
               <a:buChar char="•"/>
             </a:pPr>
             <a:r>
-              <a:rPr lang="en-US" sz="1600" dirty="0">
+              <a:rPr lang="en-US" sz="1500" dirty="0">
                 <a:solidFill>
                   <a:srgbClr val="CADCFC"/>
                 </a:solidFill>
@@ -1957,9 +2784,9 @@
                 <a:ea typeface="Calibri" pitchFamily="34" charset="-122"/>
                 <a:cs typeface="Calibri" pitchFamily="34" charset="-120"/>
               </a:rPr>
-              <a:t>Always: title, labelled axes, consistent scale</a:t>
-            </a:r>
-            <a:endParaRPr lang="en-US" sz="1600" dirty="0"/>
+              <a:t>Title, labelled axes, appropriate scale — essential for every chart</a:t>
+            </a:r>
+            <a:endParaRPr lang="en-US" sz="1500" dirty="0"/>
           </a:p>
           <a:p>
             <a:pPr marL="342900" indent="-342900">
@@ -1970,7 +2797,7 @@
               <a:buChar char="•"/>
             </a:pPr>
             <a:r>
-              <a:rPr lang="en-US" sz="1600" dirty="0">
+              <a:rPr lang="en-US" sz="1500" dirty="0">
                 <a:solidFill>
                   <a:srgbClr val="CADCFC"/>
                 </a:solidFill>
@@ -1978,9 +2805,9 @@
                 <a:ea typeface="Calibri" pitchFamily="34" charset="-122"/>
                 <a:cs typeface="Calibri" pitchFamily="34" charset="-120"/>
               </a:rPr>
-              <a:t>Bar chart gaps separate categories; histograms have no gaps</a:t>
-            </a:r>
-            <a:endParaRPr lang="en-US" sz="1600" dirty="0"/>
+              <a:t>Pie chart angles: fraction of total × 360°</a:t>
+            </a:r>
+            <a:endParaRPr lang="en-US" sz="1500" dirty="0"/>
           </a:p>
           <a:p>
             <a:pPr marL="342900" indent="-342900">
@@ -1991,7 +2818,7 @@
               <a:buChar char="•"/>
             </a:pPr>
             <a:r>
-              <a:rPr lang="en-US" sz="1600" dirty="0">
+              <a:rPr lang="en-US" sz="1500" dirty="0">
                 <a:solidFill>
                   <a:srgbClr val="CADCFC"/>
                 </a:solidFill>
@@ -1999,9 +2826,30 @@
                 <a:ea typeface="Calibri" pitchFamily="34" charset="-122"/>
                 <a:cs typeface="Calibri" pitchFamily="34" charset="-120"/>
               </a:rPr>
-              <a:t>Pie chart angles: (frequency ÷ total) × 360°</a:t>
-            </a:r>
-            <a:endParaRPr lang="en-US" sz="1600" dirty="0"/>
+              <a:t>Describe trends, compare values, identify patterns</a:t>
+            </a:r>
+            <a:endParaRPr lang="en-US" sz="1500" dirty="0"/>
+          </a:p>
+          <a:p>
+            <a:pPr marL="342900" indent="-342900">
+              <a:spcAft>
+                <a:spcPts val="1000"/>
+              </a:spcAft>
+              <a:buSzPct val="100000"/>
+              <a:buChar char="•"/>
+            </a:pPr>
+            <a:r>
+              <a:rPr lang="en-US" sz="1500" dirty="0">
+                <a:solidFill>
+                  <a:srgbClr val="CADCFC"/>
+                </a:solidFill>
+                <a:latin typeface="Calibri" pitchFamily="34" charset="0"/>
+                <a:ea typeface="Calibri" pitchFamily="34" charset="-122"/>
+                <a:cs typeface="Calibri" pitchFamily="34" charset="-120"/>
+              </a:rPr>
+              <a:t>Choose the right chart for your data type</a:t>
+            </a:r>
+            <a:endParaRPr lang="en-US" sz="1500" dirty="0"/>
           </a:p>
         </p:txBody>
       </p:sp>
@@ -2013,8 +2861,8 @@
         </p:nvSpPr>
         <p:spPr>
           <a:xfrm>
-            <a:off x="548640" y="4572000"/>
-            <a:ext cx="3657600" cy="274320"/>
+            <a:off x="731520" y="4572000"/>
+            <a:ext cx="7772400" cy="365760"/>
           </a:xfrm>
           <a:prstGeom prst="rect">
             <a:avLst/>
@@ -2030,14 +2878,17 @@
               <a:buNone/>
             </a:pPr>
             <a:r>
-              <a:rPr lang="en-US" sz="1000" dirty="0">
-                <a:solidFill>
-                  <a:srgbClr val="6B6660"/>
-                </a:solidFill>
+              <a:rPr lang="en-US" sz="1100" dirty="0">
+                <a:solidFill>
+                  <a:srgbClr val="E9C46A"/>
+                </a:solidFill>
+                <a:latin typeface="Calibri" pitchFamily="34" charset="0"/>
+                <a:ea typeface="Calibri" pitchFamily="34" charset="-122"/>
+                <a:cs typeface="Calibri" pitchFamily="34" charset="-120"/>
               </a:rPr>
               <a:t>mrzocchi.com</a:t>
             </a:r>
-            <a:endParaRPr lang="en-US" sz="1000" dirty="0"/>
+            <a:endParaRPr lang="en-US" sz="1100" dirty="0"/>
           </a:p>
         </p:txBody>
       </p:sp>

--- a/static/ppts/G6_Math_T5_Charts_Graphs.pptx
+++ b/static/ppts/G6_Math_T5_Charts_Graphs.pptx
@@ -10,9 +10,11 @@
     <p:sldId id="258" r:id="rId4"/>
     <p:sldId id="259" r:id="rId5"/>
     <p:sldId id="260" r:id="rId6"/>
+    <p:sldId id="261" r:id="rId7"/>
+    <p:sldId id="262" r:id="rId8"/>
   </p:sldIdLst>
   <p:notesMasterIdLst>
-    <p:notesMasterId r:id="rId7"/>
+    <p:notesMasterId r:id="rId9"/>
   </p:notesMasterIdLst>
   <p:sldSz cx="9144000" cy="5143500"/>
   <p:notesSz cx="5143500" cy="9144000"/>
@@ -900,6 +902,182 @@
 </p:notes>
 </file>
 
+<file path=ppt/notesSlides/notesSlide6.xml><?xml version="1.0" encoding="utf-8"?>
+<p:notes xmlns:a="http://schemas.openxmlformats.org/drawingml/2006/main" xmlns:r="http://schemas.openxmlformats.org/officeDocument/2006/relationships" xmlns:p="http://schemas.openxmlformats.org/presentationml/2006/main">
+  <p:cSld>
+    <p:spTree>
+      <p:nvGrpSpPr>
+        <p:cNvPr id="1" name=""/>
+        <p:cNvGrpSpPr/>
+        <p:nvPr/>
+      </p:nvGrpSpPr>
+      <p:grpSpPr>
+        <a:xfrm>
+          <a:off x="0" y="0"/>
+          <a:ext cx="0" cy="0"/>
+          <a:chOff x="0" y="0"/>
+          <a:chExt cx="0" cy="0"/>
+        </a:xfrm>
+      </p:grpSpPr>
+      <p:sp>
+        <p:nvSpPr>
+          <p:cNvPr id="2" name="Slide Image Placeholder 1"/>
+          <p:cNvSpPr>
+            <a:spLocks noGrp="1" noRot="1" noChangeAspect="1"/>
+          </p:cNvSpPr>
+          <p:nvPr>
+            <p:ph type="sldImg"/>
+          </p:nvPr>
+        </p:nvSpPr>
+        <p:spPr/>
+      </p:sp>
+      <p:sp>
+        <p:nvSpPr>
+          <p:cNvPr id="3" name="Notes Placeholder 2"/>
+          <p:cNvSpPr>
+            <a:spLocks noGrp="1"/>
+          </p:cNvSpPr>
+          <p:nvPr>
+            <p:ph type="body" idx="1"/>
+          </p:nvPr>
+        </p:nvSpPr>
+        <p:spPr/>
+        <p:txBody>
+          <a:bodyPr/>
+          <a:lstStyle/>
+          <a:p>
+            <a:r>
+              <a:rPr lang="en-US" dirty="0"/>
+              <a:t/>
+            </a:r>
+            <a:endParaRPr lang="en-US" dirty="0"/>
+          </a:p>
+        </p:txBody>
+      </p:sp>
+      <p:sp>
+        <p:nvSpPr>
+          <p:cNvPr id="4" name="Slide Number Placeholder 3"/>
+          <p:cNvSpPr>
+            <a:spLocks noGrp="1"/>
+          </p:cNvSpPr>
+          <p:nvPr>
+            <p:ph type="sldNum" sz="quarter" idx="10"/>
+          </p:nvPr>
+        </p:nvSpPr>
+        <p:spPr/>
+        <p:txBody>
+          <a:bodyPr/>
+          <a:lstStyle/>
+          <a:p>
+            <a:fld id="{F7021451-1387-4CA6-816F-3879F97B5CBC}" type="slidenum">
+              <a:rPr lang="en-US"/>
+              <a:t>6</a:t>
+            </a:fld>
+            <a:endParaRPr lang="en-US"/>
+          </a:p>
+        </p:txBody>
+      </p:sp>
+    </p:spTree>
+    <p:extLst>
+      <p:ext uri="{BB962C8B-B14F-4D97-AF65-F5344CB8AC3E}">
+        <p14:creationId xmlns:p14="http://schemas.microsoft.com/office/powerpoint/2010/main" val="1024086991"/>
+      </p:ext>
+    </p:extLst>
+  </p:cSld>
+  <p:clrMapOvr>
+    <a:masterClrMapping/>
+  </p:clrMapOvr>
+</p:notes>
+</file>
+
+<file path=ppt/notesSlides/notesSlide7.xml><?xml version="1.0" encoding="utf-8"?>
+<p:notes xmlns:a="http://schemas.openxmlformats.org/drawingml/2006/main" xmlns:r="http://schemas.openxmlformats.org/officeDocument/2006/relationships" xmlns:p="http://schemas.openxmlformats.org/presentationml/2006/main">
+  <p:cSld>
+    <p:spTree>
+      <p:nvGrpSpPr>
+        <p:cNvPr id="1" name=""/>
+        <p:cNvGrpSpPr/>
+        <p:nvPr/>
+      </p:nvGrpSpPr>
+      <p:grpSpPr>
+        <a:xfrm>
+          <a:off x="0" y="0"/>
+          <a:ext cx="0" cy="0"/>
+          <a:chOff x="0" y="0"/>
+          <a:chExt cx="0" cy="0"/>
+        </a:xfrm>
+      </p:grpSpPr>
+      <p:sp>
+        <p:nvSpPr>
+          <p:cNvPr id="2" name="Slide Image Placeholder 1"/>
+          <p:cNvSpPr>
+            <a:spLocks noGrp="1" noRot="1" noChangeAspect="1"/>
+          </p:cNvSpPr>
+          <p:nvPr>
+            <p:ph type="sldImg"/>
+          </p:nvPr>
+        </p:nvSpPr>
+        <p:spPr/>
+      </p:sp>
+      <p:sp>
+        <p:nvSpPr>
+          <p:cNvPr id="3" name="Notes Placeholder 2"/>
+          <p:cNvSpPr>
+            <a:spLocks noGrp="1"/>
+          </p:cNvSpPr>
+          <p:nvPr>
+            <p:ph type="body" idx="1"/>
+          </p:nvPr>
+        </p:nvSpPr>
+        <p:spPr/>
+        <p:txBody>
+          <a:bodyPr/>
+          <a:lstStyle/>
+          <a:p>
+            <a:r>
+              <a:rPr lang="en-US" dirty="0"/>
+              <a:t/>
+            </a:r>
+            <a:endParaRPr lang="en-US" dirty="0"/>
+          </a:p>
+        </p:txBody>
+      </p:sp>
+      <p:sp>
+        <p:nvSpPr>
+          <p:cNvPr id="4" name="Slide Number Placeholder 3"/>
+          <p:cNvSpPr>
+            <a:spLocks noGrp="1"/>
+          </p:cNvSpPr>
+          <p:nvPr>
+            <p:ph type="sldNum" sz="quarter" idx="10"/>
+          </p:nvPr>
+        </p:nvSpPr>
+        <p:spPr/>
+        <p:txBody>
+          <a:bodyPr/>
+          <a:lstStyle/>
+          <a:p>
+            <a:fld id="{F7021451-1387-4CA6-816F-3879F97B5CBC}" type="slidenum">
+              <a:rPr lang="en-US"/>
+              <a:t>7</a:t>
+            </a:fld>
+            <a:endParaRPr lang="en-US"/>
+          </a:p>
+        </p:txBody>
+      </p:sp>
+    </p:spTree>
+    <p:extLst>
+      <p:ext uri="{BB962C8B-B14F-4D97-AF65-F5344CB8AC3E}">
+        <p14:creationId xmlns:p14="http://schemas.microsoft.com/office/powerpoint/2010/main" val="1024086991"/>
+      </p:ext>
+    </p:extLst>
+  </p:cSld>
+  <p:clrMapOvr>
+    <a:masterClrMapping/>
+  </p:clrMapOvr>
+</p:notes>
+</file>
+
 <file path=ppt/slideLayouts/slideLayout1.xml><?xml version="1.0" encoding="utf-8"?>
 <p:sldLayout xmlns:a="http://schemas.openxmlformats.org/drawingml/2006/main" xmlns:r="http://schemas.openxmlformats.org/officeDocument/2006/relationships" xmlns:p="http://schemas.openxmlformats.org/presentationml/2006/main" preserve="1">
   <p:cSld name="DEFAULT">
@@ -1210,13 +1388,6 @@
 <file path=ppt/slides/slide1.xml><?xml version="1.0" encoding="utf-8"?>
 <p:sld xmlns:a="http://schemas.openxmlformats.org/drawingml/2006/main" xmlns:r="http://schemas.openxmlformats.org/officeDocument/2006/relationships" xmlns:p="http://schemas.openxmlformats.org/presentationml/2006/main">
   <p:cSld name="Slide 1">
-    <p:bg>
-      <p:bgPr>
-        <a:solidFill>
-          <a:srgbClr val="1B2A4A"/>
-        </a:solidFill>
-      </p:bgPr>
-    </p:bg>
     <p:spTree>
       <p:nvGrpSpPr>
         <p:cNvPr id="1" name=""/>
@@ -1240,7 +1411,27 @@
         <p:spPr>
           <a:xfrm>
             <a:off x="0" y="0"/>
-            <a:ext cx="109728" cy="5143500"/>
+            <a:ext cx="9144000" cy="5143500"/>
+          </a:xfrm>
+          <a:prstGeom prst="rect">
+            <a:avLst/>
+          </a:prstGeom>
+          <a:solidFill>
+            <a:srgbClr val="1B2A4A"/>
+          </a:solidFill>
+          <a:ln/>
+        </p:spPr>
+      </p:sp>
+      <p:sp>
+        <p:nvSpPr>
+          <p:cNvPr id="3" name="Shape 1"/>
+          <p:cNvSpPr/>
+          <p:nvPr/>
+        </p:nvSpPr>
+        <p:spPr>
+          <a:xfrm>
+            <a:off x="0" y="4777740"/>
+            <a:ext cx="9144000" cy="365760"/>
           </a:xfrm>
           <a:prstGeom prst="rect">
             <a:avLst/>
@@ -1253,14 +1444,36 @@
       </p:sp>
       <p:sp>
         <p:nvSpPr>
-          <p:cNvPr id="3" name="Text 1"/>
-          <p:cNvSpPr/>
-          <p:nvPr/>
-        </p:nvSpPr>
-        <p:spPr>
-          <a:xfrm>
-            <a:off x="731520" y="1097280"/>
-            <a:ext cx="7772400" cy="1371600"/>
+          <p:cNvPr id="4" name="Shape 2"/>
+          <p:cNvSpPr/>
+          <p:nvPr/>
+        </p:nvSpPr>
+        <p:spPr>
+          <a:xfrm>
+            <a:off x="6858000" y="-1371600"/>
+            <a:ext cx="4572000" cy="4572000"/>
+          </a:xfrm>
+          <a:prstGeom prst="ellipse">
+            <a:avLst/>
+          </a:prstGeom>
+          <a:solidFill>
+            <a:srgbClr val="2A9D8F">
+              <a:alpha val="12000"/>
+            </a:srgbClr>
+          </a:solidFill>
+          <a:ln/>
+        </p:spPr>
+      </p:sp>
+      <p:sp>
+        <p:nvSpPr>
+          <p:cNvPr id="5" name="Text 3"/>
+          <p:cNvSpPr/>
+          <p:nvPr/>
+        </p:nvSpPr>
+        <p:spPr>
+          <a:xfrm>
+            <a:off x="731520" y="914400"/>
+            <a:ext cx="7680960" cy="457200"/>
           </a:xfrm>
           <a:prstGeom prst="rect">
             <a:avLst/>
@@ -1276,7 +1489,46 @@
               <a:buNone/>
             </a:pPr>
             <a:r>
-              <a:rPr lang="en-US" sz="4000" b="1" dirty="0">
+              <a:rPr lang="en-US" sz="1300" b="1" spc="500" kern="0" dirty="0">
+                <a:solidFill>
+                  <a:srgbClr val="2A9D8F"/>
+                </a:solidFill>
+                <a:latin typeface="Calibri" pitchFamily="34" charset="0"/>
+                <a:ea typeface="Calibri" pitchFamily="34" charset="-122"/>
+                <a:cs typeface="Calibri" pitchFamily="34" charset="-120"/>
+              </a:rPr>
+              <a:t>GRADE 6 MATHEMATICS</a:t>
+            </a:r>
+            <a:endParaRPr lang="en-US" sz="1300" dirty="0"/>
+          </a:p>
+        </p:txBody>
+      </p:sp>
+      <p:sp>
+        <p:nvSpPr>
+          <p:cNvPr id="6" name="Text 4"/>
+          <p:cNvSpPr/>
+          <p:nvPr/>
+        </p:nvSpPr>
+        <p:spPr>
+          <a:xfrm>
+            <a:off x="731520" y="1463040"/>
+            <a:ext cx="6858000" cy="1645920"/>
+          </a:xfrm>
+          <a:prstGeom prst="rect">
+            <a:avLst/>
+          </a:prstGeom>
+          <a:noFill/>
+          <a:ln/>
+        </p:spPr>
+        <p:txBody>
+          <a:bodyPr wrap="square" rtlCol="0" anchor="t"/>
+          <a:lstStyle/>
+          <a:p>
+            <a:pPr indent="0" marL="0">
+              <a:buNone/>
+            </a:pPr>
+            <a:r>
+              <a:rPr lang="en-US" sz="3800" b="1" dirty="0">
                 <a:solidFill>
                   <a:srgbClr val="FFFFFF"/>
                 </a:solidFill>
@@ -1286,20 +1538,20 @@
               </a:rPr>
               <a:t>Charts &amp; Graphs</a:t>
             </a:r>
-            <a:endParaRPr lang="en-US" sz="4000" dirty="0"/>
+            <a:endParaRPr lang="en-US" sz="3800" dirty="0"/>
           </a:p>
         </p:txBody>
       </p:sp>
       <p:sp>
         <p:nvSpPr>
-          <p:cNvPr id="4" name="Text 2"/>
-          <p:cNvSpPr/>
-          <p:nvPr/>
-        </p:nvSpPr>
-        <p:spPr>
-          <a:xfrm>
-            <a:off x="731520" y="2560320"/>
-            <a:ext cx="7772400" cy="548640"/>
+          <p:cNvPr id="7" name="Text 5"/>
+          <p:cNvSpPr/>
+          <p:nvPr/>
+        </p:nvSpPr>
+        <p:spPr>
+          <a:xfrm>
+            <a:off x="731520" y="3200400"/>
+            <a:ext cx="6400800" cy="548640"/>
           </a:xfrm>
           <a:prstGeom prst="rect">
             <a:avLst/>
@@ -1315,15 +1567,15 @@
               <a:buNone/>
             </a:pPr>
             <a:r>
-              <a:rPr lang="en-US" sz="1600" dirty="0">
+              <a:rPr lang="en-US" sz="1600" i="1" dirty="0">
                 <a:solidFill>
-                  <a:srgbClr val="E9C46A"/>
+                  <a:srgbClr val="9B9690"/>
                 </a:solidFill>
                 <a:latin typeface="Calibri" pitchFamily="34" charset="0"/>
                 <a:ea typeface="Calibri" pitchFamily="34" charset="-122"/>
                 <a:cs typeface="Calibri" pitchFamily="34" charset="-120"/>
               </a:rPr>
-              <a:t>Grade 6 Mathematics · Mr Zocchi</a:t>
+              <a:t>Displaying data visually</a:t>
             </a:r>
             <a:endParaRPr lang="en-US" sz="1600" dirty="0"/>
           </a:p>
@@ -1331,36 +1583,14 @@
       </p:sp>
       <p:sp>
         <p:nvSpPr>
-          <p:cNvPr id="5" name="Shape 3"/>
-          <p:cNvSpPr/>
-          <p:nvPr/>
-        </p:nvSpPr>
-        <p:spPr>
-          <a:xfrm>
-            <a:off x="731520" y="3474720"/>
-            <a:ext cx="2011680" cy="411480"/>
-          </a:xfrm>
-          <a:prstGeom prst="roundRect">
-            <a:avLst>
-              <a:gd name="adj" fmla="val 17778"/>
-            </a:avLst>
-          </a:prstGeom>
-          <a:solidFill>
-            <a:srgbClr val="2A9D8F"/>
-          </a:solidFill>
-          <a:ln/>
-        </p:spPr>
-      </p:sp>
-      <p:sp>
-        <p:nvSpPr>
-          <p:cNvPr id="6" name="Text 4"/>
-          <p:cNvSpPr/>
-          <p:nvPr/>
-        </p:nvSpPr>
-        <p:spPr>
-          <a:xfrm>
-            <a:off x="731520" y="3474720"/>
-            <a:ext cx="2011680" cy="411480"/>
+          <p:cNvPr id="8" name="Text 6"/>
+          <p:cNvSpPr/>
+          <p:nvPr/>
+        </p:nvSpPr>
+        <p:spPr>
+          <a:xfrm>
+            <a:off x="731520" y="4297680"/>
+            <a:ext cx="2743200" cy="365760"/>
           </a:xfrm>
           <a:prstGeom prst="rect">
             <a:avLst/>
@@ -1372,21 +1602,21 @@
           <a:bodyPr wrap="square" rtlCol="0" anchor="ctr"/>
           <a:lstStyle/>
           <a:p>
-            <a:pPr algn="ctr" indent="0" marL="0">
+            <a:pPr indent="0" marL="0">
               <a:buNone/>
             </a:pPr>
             <a:r>
-              <a:rPr lang="en-US" sz="1200" b="1" dirty="0">
+              <a:rPr lang="en-US" sz="1100" dirty="0">
                 <a:solidFill>
-                  <a:srgbClr val="FFFFFF"/>
+                  <a:srgbClr val="9B9690"/>
                 </a:solidFill>
                 <a:latin typeface="Calibri" pitchFamily="34" charset="0"/>
                 <a:ea typeface="Calibri" pitchFamily="34" charset="-122"/>
                 <a:cs typeface="Calibri" pitchFamily="34" charset="-120"/>
               </a:rPr>
-              <a:t>Term 5 · Probability &amp; Statistics</a:t>
-            </a:r>
-            <a:endParaRPr lang="en-US" sz="1200" dirty="0"/>
+              <a:t>mrzocchi.com</a:t>
+            </a:r>
+            <a:endParaRPr lang="en-US" sz="1100" dirty="0"/>
           </a:p>
         </p:txBody>
       </p:sp>
@@ -1431,7 +1661,47 @@
         <p:spPr>
           <a:xfrm>
             <a:off x="0" y="0"/>
-            <a:ext cx="9144000" cy="54864"/>
+            <a:ext cx="9144000" cy="822960"/>
+          </a:xfrm>
+          <a:prstGeom prst="rect">
+            <a:avLst/>
+          </a:prstGeom>
+          <a:solidFill>
+            <a:srgbClr val="FFFFFF"/>
+          </a:solidFill>
+          <a:ln/>
+        </p:spPr>
+      </p:sp>
+      <p:sp>
+        <p:nvSpPr>
+          <p:cNvPr id="3" name="Shape 1"/>
+          <p:cNvSpPr/>
+          <p:nvPr/>
+        </p:nvSpPr>
+        <p:spPr>
+          <a:xfrm>
+            <a:off x="0" y="804672"/>
+            <a:ext cx="9144000" cy="27432"/>
+          </a:xfrm>
+          <a:prstGeom prst="rect">
+            <a:avLst/>
+          </a:prstGeom>
+          <a:solidFill>
+            <a:srgbClr val="E5E2DC"/>
+          </a:solidFill>
+          <a:ln/>
+        </p:spPr>
+      </p:sp>
+      <p:sp>
+        <p:nvSpPr>
+          <p:cNvPr id="4" name="Shape 2"/>
+          <p:cNvSpPr/>
+          <p:nvPr/>
+        </p:nvSpPr>
+        <p:spPr>
+          <a:xfrm>
+            <a:off x="548640" y="201168"/>
+            <a:ext cx="54864" cy="420624"/>
           </a:xfrm>
           <a:prstGeom prst="rect">
             <a:avLst/>
@@ -1444,14 +1714,14 @@
       </p:sp>
       <p:sp>
         <p:nvSpPr>
-          <p:cNvPr id="3" name="Text 1"/>
-          <p:cNvSpPr/>
-          <p:nvPr/>
-        </p:nvSpPr>
-        <p:spPr>
-          <a:xfrm>
-            <a:off x="7772400" y="4709160"/>
-            <a:ext cx="1097280" cy="320040"/>
+          <p:cNvPr id="5" name="Text 3"/>
+          <p:cNvSpPr/>
+          <p:nvPr/>
+        </p:nvSpPr>
+        <p:spPr>
+          <a:xfrm>
+            <a:off x="777240" y="137160"/>
+            <a:ext cx="7772400" cy="548640"/>
           </a:xfrm>
           <a:prstGeom prst="rect">
             <a:avLst/>
@@ -1460,14 +1730,139 @@
           <a:ln/>
         </p:spPr>
         <p:txBody>
-          <a:bodyPr wrap="square" rtlCol="0" anchor="ctr"/>
+          <a:bodyPr wrap="square" lIns="0" tIns="0" rIns="0" bIns="0" rtlCol="0" anchor="ctr"/>
           <a:lstStyle/>
           <a:p>
-            <a:pPr algn="r" indent="0" marL="0">
+            <a:pPr indent="0" marL="0">
               <a:buNone/>
             </a:pPr>
             <a:r>
-              <a:rPr lang="en-US" sz="900" dirty="0">
+              <a:rPr lang="en-US" sz="2000" b="1" dirty="0">
+                <a:solidFill>
+                  <a:srgbClr val="1B2A4A"/>
+                </a:solidFill>
+                <a:latin typeface="Georgia" pitchFamily="34" charset="0"/>
+                <a:ea typeface="Georgia" pitchFamily="34" charset="-122"/>
+                <a:cs typeface="Georgia" pitchFamily="34" charset="-120"/>
+              </a:rPr>
+              <a:t>Key Vocabulary</a:t>
+            </a:r>
+            <a:endParaRPr lang="en-US" sz="2000" dirty="0"/>
+          </a:p>
+        </p:txBody>
+      </p:sp>
+      <p:sp>
+        <p:nvSpPr>
+          <p:cNvPr id="6" name="Shape 4"/>
+          <p:cNvSpPr/>
+          <p:nvPr/>
+        </p:nvSpPr>
+        <p:spPr>
+          <a:xfrm>
+            <a:off x="731520" y="1051560"/>
+            <a:ext cx="3657600" cy="658368"/>
+          </a:xfrm>
+          <a:prstGeom prst="rect">
+            <a:avLst/>
+          </a:prstGeom>
+          <a:solidFill>
+            <a:srgbClr val="FFFFFF"/>
+          </a:solidFill>
+          <a:ln/>
+          <a:effectLst>
+            <a:outerShdw sx="100000" sy="100000" kx="0" ky="0" algn="bl" rotWithShape="0" blurRad="50800" dist="25400" dir="8100000">
+              <a:srgbClr val="000000">
+                <a:alpha val="10000"/>
+              </a:srgbClr>
+            </a:outerShdw>
+          </a:effectLst>
+        </p:spPr>
+      </p:sp>
+      <p:sp>
+        <p:nvSpPr>
+          <p:cNvPr id="7" name="Shape 5"/>
+          <p:cNvSpPr/>
+          <p:nvPr/>
+        </p:nvSpPr>
+        <p:spPr>
+          <a:xfrm>
+            <a:off x="731520" y="1051560"/>
+            <a:ext cx="54864" cy="658368"/>
+          </a:xfrm>
+          <a:prstGeom prst="rect">
+            <a:avLst/>
+          </a:prstGeom>
+          <a:solidFill>
+            <a:srgbClr val="2A9D8F"/>
+          </a:solidFill>
+          <a:ln/>
+        </p:spPr>
+      </p:sp>
+      <p:sp>
+        <p:nvSpPr>
+          <p:cNvPr id="8" name="Text 6"/>
+          <p:cNvSpPr/>
+          <p:nvPr/>
+        </p:nvSpPr>
+        <p:spPr>
+          <a:xfrm>
+            <a:off x="914400" y="1051560"/>
+            <a:ext cx="1463040" cy="658368"/>
+          </a:xfrm>
+          <a:prstGeom prst="rect">
+            <a:avLst/>
+          </a:prstGeom>
+          <a:noFill/>
+          <a:ln/>
+        </p:spPr>
+        <p:txBody>
+          <a:bodyPr wrap="square" lIns="0" tIns="0" rIns="0" bIns="0" rtlCol="0" anchor="ctr"/>
+          <a:lstStyle/>
+          <a:p>
+            <a:pPr indent="0" marL="0">
+              <a:buNone/>
+            </a:pPr>
+            <a:r>
+              <a:rPr lang="en-US" sz="1300" b="1" dirty="0">
+                <a:solidFill>
+                  <a:srgbClr val="1B2A4A"/>
+                </a:solidFill>
+                <a:latin typeface="Georgia" pitchFamily="34" charset="0"/>
+                <a:ea typeface="Georgia" pitchFamily="34" charset="-122"/>
+                <a:cs typeface="Georgia" pitchFamily="34" charset="-120"/>
+              </a:rPr>
+              <a:t>Bar chart</a:t>
+            </a:r>
+            <a:endParaRPr lang="en-US" sz="1300" dirty="0"/>
+          </a:p>
+        </p:txBody>
+      </p:sp>
+      <p:sp>
+        <p:nvSpPr>
+          <p:cNvPr id="9" name="Text 7"/>
+          <p:cNvSpPr/>
+          <p:nvPr/>
+        </p:nvSpPr>
+        <p:spPr>
+          <a:xfrm>
+            <a:off x="2377440" y="1051560"/>
+            <a:ext cx="1920240" cy="658368"/>
+          </a:xfrm>
+          <a:prstGeom prst="rect">
+            <a:avLst/>
+          </a:prstGeom>
+          <a:noFill/>
+          <a:ln/>
+        </p:spPr>
+        <p:txBody>
+          <a:bodyPr wrap="square" lIns="0" tIns="0" rIns="0" bIns="0" rtlCol="0" anchor="ctr"/>
+          <a:lstStyle/>
+          <a:p>
+            <a:pPr indent="0" marL="0">
+              <a:buNone/>
+            </a:pPr>
+            <a:r>
+              <a:rPr lang="en-US" sz="1100" dirty="0">
                 <a:solidFill>
                   <a:srgbClr val="6B6660"/>
                 </a:solidFill>
@@ -1475,22 +1870,22 @@
                 <a:ea typeface="Calibri" pitchFamily="34" charset="-122"/>
                 <a:cs typeface="Calibri" pitchFamily="34" charset="-120"/>
               </a:rPr>
-              <a:t>2 / 5</a:t>
-            </a:r>
-            <a:endParaRPr lang="en-US" sz="900" dirty="0"/>
+              <a:t>Bars for categorical data (gaps between)</a:t>
+            </a:r>
+            <a:endParaRPr lang="en-US" sz="1100" dirty="0"/>
           </a:p>
         </p:txBody>
       </p:sp>
       <p:sp>
         <p:nvSpPr>
-          <p:cNvPr id="4" name="Shape 2"/>
-          <p:cNvSpPr/>
-          <p:nvPr/>
-        </p:nvSpPr>
-        <p:spPr>
-          <a:xfrm>
-            <a:off x="1371600" y="914400"/>
-            <a:ext cx="6400800" cy="3200400"/>
+          <p:cNvPr id="10" name="Shape 8"/>
+          <p:cNvSpPr/>
+          <p:nvPr/>
+        </p:nvSpPr>
+        <p:spPr>
+          <a:xfrm>
+            <a:off x="4754880" y="1051560"/>
+            <a:ext cx="3657600" cy="658368"/>
           </a:xfrm>
           <a:prstGeom prst="rect">
             <a:avLst/>
@@ -1498,12 +1893,7 @@
           <a:solidFill>
             <a:srgbClr val="FFFFFF"/>
           </a:solidFill>
-          <a:ln w="12700">
-            <a:solidFill>
-              <a:srgbClr val="E5E2DC"/>
-            </a:solidFill>
-            <a:prstDash val="solid"/>
-          </a:ln>
+          <a:ln/>
           <a:effectLst>
             <a:outerShdw sx="100000" sy="100000" kx="0" ky="0" algn="bl" rotWithShape="0" blurRad="50800" dist="25400" dir="8100000">
               <a:srgbClr val="000000">
@@ -1515,14 +1905,14 @@
       </p:sp>
       <p:sp>
         <p:nvSpPr>
-          <p:cNvPr id="5" name="Shape 3"/>
-          <p:cNvSpPr/>
-          <p:nvPr/>
-        </p:nvSpPr>
-        <p:spPr>
-          <a:xfrm>
-            <a:off x="1371600" y="914400"/>
-            <a:ext cx="91440" cy="3200400"/>
+          <p:cNvPr id="11" name="Shape 9"/>
+          <p:cNvSpPr/>
+          <p:nvPr/>
+        </p:nvSpPr>
+        <p:spPr>
+          <a:xfrm>
+            <a:off x="4754880" y="1051560"/>
+            <a:ext cx="54864" cy="658368"/>
           </a:xfrm>
           <a:prstGeom prst="rect">
             <a:avLst/>
@@ -1535,14 +1925,14 @@
       </p:sp>
       <p:sp>
         <p:nvSpPr>
-          <p:cNvPr id="6" name="Text 4"/>
-          <p:cNvSpPr/>
-          <p:nvPr/>
-        </p:nvSpPr>
-        <p:spPr>
-          <a:xfrm>
-            <a:off x="1828800" y="1097280"/>
-            <a:ext cx="5669280" cy="640080"/>
+          <p:cNvPr id="12" name="Text 10"/>
+          <p:cNvSpPr/>
+          <p:nvPr/>
+        </p:nvSpPr>
+        <p:spPr>
+          <a:xfrm>
+            <a:off x="4937760" y="1051560"/>
+            <a:ext cx="1463040" cy="658368"/>
           </a:xfrm>
           <a:prstGeom prst="rect">
             <a:avLst/>
@@ -1551,14 +1941,14 @@
           <a:ln/>
         </p:spPr>
         <p:txBody>
-          <a:bodyPr wrap="square" rtlCol="0" anchor="ctr"/>
+          <a:bodyPr wrap="square" lIns="0" tIns="0" rIns="0" bIns="0" rtlCol="0" anchor="ctr"/>
           <a:lstStyle/>
           <a:p>
             <a:pPr indent="0" marL="0">
               <a:buNone/>
             </a:pPr>
             <a:r>
-              <a:rPr lang="en-US" sz="2400" b="1" dirty="0">
+              <a:rPr lang="en-US" sz="1300" b="1" dirty="0">
                 <a:solidFill>
                   <a:srgbClr val="1B2A4A"/>
                 </a:solidFill>
@@ -1566,22 +1956,22 @@
                 <a:ea typeface="Georgia" pitchFamily="34" charset="-122"/>
                 <a:cs typeface="Georgia" pitchFamily="34" charset="-120"/>
               </a:rPr>
-              <a:t>Displaying Data Visually</a:t>
-            </a:r>
-            <a:endParaRPr lang="en-US" sz="2400" dirty="0"/>
+              <a:t>Pie chart</a:t>
+            </a:r>
+            <a:endParaRPr lang="en-US" sz="1300" dirty="0"/>
           </a:p>
         </p:txBody>
       </p:sp>
       <p:sp>
         <p:nvSpPr>
-          <p:cNvPr id="7" name="Text 5"/>
-          <p:cNvSpPr/>
-          <p:nvPr/>
-        </p:nvSpPr>
-        <p:spPr>
-          <a:xfrm>
-            <a:off x="1828800" y="1828800"/>
-            <a:ext cx="5669280" cy="2011680"/>
+          <p:cNvPr id="13" name="Text 11"/>
+          <p:cNvSpPr/>
+          <p:nvPr/>
+        </p:nvSpPr>
+        <p:spPr>
+          <a:xfrm>
+            <a:off x="6400800" y="1051560"/>
+            <a:ext cx="1920240" cy="658368"/>
           </a:xfrm>
           <a:prstGeom prst="rect">
             <a:avLst/>
@@ -1590,27 +1980,524 @@
           <a:ln/>
         </p:spPr>
         <p:txBody>
-          <a:bodyPr wrap="square" rtlCol="0" anchor="t"/>
+          <a:bodyPr wrap="square" lIns="0" tIns="0" rIns="0" bIns="0" rtlCol="0" anchor="ctr"/>
           <a:lstStyle/>
           <a:p>
             <a:pPr indent="0" marL="0">
-              <a:lnSpc>
-                <a:spcPct val="130000"/>
-              </a:lnSpc>
               <a:buNone/>
             </a:pPr>
             <a:r>
-              <a:rPr lang="en-US" sz="1500" dirty="0">
+              <a:rPr lang="en-US" sz="1100" dirty="0">
                 <a:solidFill>
-                  <a:srgbClr val="3D3A36"/>
+                  <a:srgbClr val="6B6660"/>
                 </a:solidFill>
                 <a:latin typeface="Calibri" pitchFamily="34" charset="0"/>
                 <a:ea typeface="Calibri" pitchFamily="34" charset="-122"/>
                 <a:cs typeface="Calibri" pitchFamily="34" charset="-120"/>
               </a:rPr>
-              <a:t>Charts and graphs make data easier to understand. The type of chart you choose depends on what data you have and what you want to show. A good chart has a title, labelled axes, and an appropriate scale.</a:t>
-            </a:r>
-            <a:endParaRPr lang="en-US" sz="1500" dirty="0"/>
+              <a:t>Circle divided into sectors</a:t>
+            </a:r>
+            <a:endParaRPr lang="en-US" sz="1100" dirty="0"/>
+          </a:p>
+        </p:txBody>
+      </p:sp>
+      <p:sp>
+        <p:nvSpPr>
+          <p:cNvPr id="14" name="Shape 12"/>
+          <p:cNvSpPr/>
+          <p:nvPr/>
+        </p:nvSpPr>
+        <p:spPr>
+          <a:xfrm>
+            <a:off x="731520" y="1819656"/>
+            <a:ext cx="3657600" cy="658368"/>
+          </a:xfrm>
+          <a:prstGeom prst="rect">
+            <a:avLst/>
+          </a:prstGeom>
+          <a:solidFill>
+            <a:srgbClr val="FFFFFF"/>
+          </a:solidFill>
+          <a:ln/>
+          <a:effectLst>
+            <a:outerShdw sx="100000" sy="100000" kx="0" ky="0" algn="bl" rotWithShape="0" blurRad="50800" dist="25400" dir="8100000">
+              <a:srgbClr val="000000">
+                <a:alpha val="10000"/>
+              </a:srgbClr>
+            </a:outerShdw>
+          </a:effectLst>
+        </p:spPr>
+      </p:sp>
+      <p:sp>
+        <p:nvSpPr>
+          <p:cNvPr id="15" name="Shape 13"/>
+          <p:cNvSpPr/>
+          <p:nvPr/>
+        </p:nvSpPr>
+        <p:spPr>
+          <a:xfrm>
+            <a:off x="731520" y="1819656"/>
+            <a:ext cx="54864" cy="658368"/>
+          </a:xfrm>
+          <a:prstGeom prst="rect">
+            <a:avLst/>
+          </a:prstGeom>
+          <a:solidFill>
+            <a:srgbClr val="2A9D8F"/>
+          </a:solidFill>
+          <a:ln/>
+        </p:spPr>
+      </p:sp>
+      <p:sp>
+        <p:nvSpPr>
+          <p:cNvPr id="16" name="Text 14"/>
+          <p:cNvSpPr/>
+          <p:nvPr/>
+        </p:nvSpPr>
+        <p:spPr>
+          <a:xfrm>
+            <a:off x="914400" y="1819656"/>
+            <a:ext cx="1463040" cy="658368"/>
+          </a:xfrm>
+          <a:prstGeom prst="rect">
+            <a:avLst/>
+          </a:prstGeom>
+          <a:noFill/>
+          <a:ln/>
+        </p:spPr>
+        <p:txBody>
+          <a:bodyPr wrap="square" lIns="0" tIns="0" rIns="0" bIns="0" rtlCol="0" anchor="ctr"/>
+          <a:lstStyle/>
+          <a:p>
+            <a:pPr indent="0" marL="0">
+              <a:buNone/>
+            </a:pPr>
+            <a:r>
+              <a:rPr lang="en-US" sz="1300" b="1" dirty="0">
+                <a:solidFill>
+                  <a:srgbClr val="1B2A4A"/>
+                </a:solidFill>
+                <a:latin typeface="Georgia" pitchFamily="34" charset="0"/>
+                <a:ea typeface="Georgia" pitchFamily="34" charset="-122"/>
+                <a:cs typeface="Georgia" pitchFamily="34" charset="-120"/>
+              </a:rPr>
+              <a:t>Pictogram</a:t>
+            </a:r>
+            <a:endParaRPr lang="en-US" sz="1300" dirty="0"/>
+          </a:p>
+        </p:txBody>
+      </p:sp>
+      <p:sp>
+        <p:nvSpPr>
+          <p:cNvPr id="17" name="Text 15"/>
+          <p:cNvSpPr/>
+          <p:nvPr/>
+        </p:nvSpPr>
+        <p:spPr>
+          <a:xfrm>
+            <a:off x="2377440" y="1819656"/>
+            <a:ext cx="1920240" cy="658368"/>
+          </a:xfrm>
+          <a:prstGeom prst="rect">
+            <a:avLst/>
+          </a:prstGeom>
+          <a:noFill/>
+          <a:ln/>
+        </p:spPr>
+        <p:txBody>
+          <a:bodyPr wrap="square" lIns="0" tIns="0" rIns="0" bIns="0" rtlCol="0" anchor="ctr"/>
+          <a:lstStyle/>
+          <a:p>
+            <a:pPr indent="0" marL="0">
+              <a:buNone/>
+            </a:pPr>
+            <a:r>
+              <a:rPr lang="en-US" sz="1100" dirty="0">
+                <a:solidFill>
+                  <a:srgbClr val="6B6660"/>
+                </a:solidFill>
+                <a:latin typeface="Calibri" pitchFamily="34" charset="0"/>
+                <a:ea typeface="Calibri" pitchFamily="34" charset="-122"/>
+                <a:cs typeface="Calibri" pitchFamily="34" charset="-120"/>
+              </a:rPr>
+              <a:t>Pictures represent data values</a:t>
+            </a:r>
+            <a:endParaRPr lang="en-US" sz="1100" dirty="0"/>
+          </a:p>
+        </p:txBody>
+      </p:sp>
+      <p:sp>
+        <p:nvSpPr>
+          <p:cNvPr id="18" name="Shape 16"/>
+          <p:cNvSpPr/>
+          <p:nvPr/>
+        </p:nvSpPr>
+        <p:spPr>
+          <a:xfrm>
+            <a:off x="4754880" y="1819656"/>
+            <a:ext cx="3657600" cy="658368"/>
+          </a:xfrm>
+          <a:prstGeom prst="rect">
+            <a:avLst/>
+          </a:prstGeom>
+          <a:solidFill>
+            <a:srgbClr val="FFFFFF"/>
+          </a:solidFill>
+          <a:ln/>
+          <a:effectLst>
+            <a:outerShdw sx="100000" sy="100000" kx="0" ky="0" algn="bl" rotWithShape="0" blurRad="50800" dist="25400" dir="8100000">
+              <a:srgbClr val="000000">
+                <a:alpha val="10000"/>
+              </a:srgbClr>
+            </a:outerShdw>
+          </a:effectLst>
+        </p:spPr>
+      </p:sp>
+      <p:sp>
+        <p:nvSpPr>
+          <p:cNvPr id="19" name="Shape 17"/>
+          <p:cNvSpPr/>
+          <p:nvPr/>
+        </p:nvSpPr>
+        <p:spPr>
+          <a:xfrm>
+            <a:off x="4754880" y="1819656"/>
+            <a:ext cx="54864" cy="658368"/>
+          </a:xfrm>
+          <a:prstGeom prst="rect">
+            <a:avLst/>
+          </a:prstGeom>
+          <a:solidFill>
+            <a:srgbClr val="2A9D8F"/>
+          </a:solidFill>
+          <a:ln/>
+        </p:spPr>
+      </p:sp>
+      <p:sp>
+        <p:nvSpPr>
+          <p:cNvPr id="20" name="Text 18"/>
+          <p:cNvSpPr/>
+          <p:nvPr/>
+        </p:nvSpPr>
+        <p:spPr>
+          <a:xfrm>
+            <a:off x="4937760" y="1819656"/>
+            <a:ext cx="1463040" cy="658368"/>
+          </a:xfrm>
+          <a:prstGeom prst="rect">
+            <a:avLst/>
+          </a:prstGeom>
+          <a:noFill/>
+          <a:ln/>
+        </p:spPr>
+        <p:txBody>
+          <a:bodyPr wrap="square" lIns="0" tIns="0" rIns="0" bIns="0" rtlCol="0" anchor="ctr"/>
+          <a:lstStyle/>
+          <a:p>
+            <a:pPr indent="0" marL="0">
+              <a:buNone/>
+            </a:pPr>
+            <a:r>
+              <a:rPr lang="en-US" sz="1300" b="1" dirty="0">
+                <a:solidFill>
+                  <a:srgbClr val="1B2A4A"/>
+                </a:solidFill>
+                <a:latin typeface="Georgia" pitchFamily="34" charset="0"/>
+                <a:ea typeface="Georgia" pitchFamily="34" charset="-122"/>
+                <a:cs typeface="Georgia" pitchFamily="34" charset="-120"/>
+              </a:rPr>
+              <a:t>Line graph</a:t>
+            </a:r>
+            <a:endParaRPr lang="en-US" sz="1300" dirty="0"/>
+          </a:p>
+        </p:txBody>
+      </p:sp>
+      <p:sp>
+        <p:nvSpPr>
+          <p:cNvPr id="21" name="Text 19"/>
+          <p:cNvSpPr/>
+          <p:nvPr/>
+        </p:nvSpPr>
+        <p:spPr>
+          <a:xfrm>
+            <a:off x="6400800" y="1819656"/>
+            <a:ext cx="1920240" cy="658368"/>
+          </a:xfrm>
+          <a:prstGeom prst="rect">
+            <a:avLst/>
+          </a:prstGeom>
+          <a:noFill/>
+          <a:ln/>
+        </p:spPr>
+        <p:txBody>
+          <a:bodyPr wrap="square" lIns="0" tIns="0" rIns="0" bIns="0" rtlCol="0" anchor="ctr"/>
+          <a:lstStyle/>
+          <a:p>
+            <a:pPr indent="0" marL="0">
+              <a:buNone/>
+            </a:pPr>
+            <a:r>
+              <a:rPr lang="en-US" sz="1100" dirty="0">
+                <a:solidFill>
+                  <a:srgbClr val="6B6660"/>
+                </a:solidFill>
+                <a:latin typeface="Calibri" pitchFamily="34" charset="0"/>
+                <a:ea typeface="Calibri" pitchFamily="34" charset="-122"/>
+                <a:cs typeface="Calibri" pitchFamily="34" charset="-120"/>
+              </a:rPr>
+              <a:t>Points connected — for continuous data</a:t>
+            </a:r>
+            <a:endParaRPr lang="en-US" sz="1100" dirty="0"/>
+          </a:p>
+        </p:txBody>
+      </p:sp>
+      <p:sp>
+        <p:nvSpPr>
+          <p:cNvPr id="22" name="Shape 20"/>
+          <p:cNvSpPr/>
+          <p:nvPr/>
+        </p:nvSpPr>
+        <p:spPr>
+          <a:xfrm>
+            <a:off x="731520" y="2587752"/>
+            <a:ext cx="3657600" cy="658368"/>
+          </a:xfrm>
+          <a:prstGeom prst="rect">
+            <a:avLst/>
+          </a:prstGeom>
+          <a:solidFill>
+            <a:srgbClr val="FFFFFF"/>
+          </a:solidFill>
+          <a:ln/>
+          <a:effectLst>
+            <a:outerShdw sx="100000" sy="100000" kx="0" ky="0" algn="bl" rotWithShape="0" blurRad="50800" dist="25400" dir="8100000">
+              <a:srgbClr val="000000">
+                <a:alpha val="10000"/>
+              </a:srgbClr>
+            </a:outerShdw>
+          </a:effectLst>
+        </p:spPr>
+      </p:sp>
+      <p:sp>
+        <p:nvSpPr>
+          <p:cNvPr id="23" name="Shape 21"/>
+          <p:cNvSpPr/>
+          <p:nvPr/>
+        </p:nvSpPr>
+        <p:spPr>
+          <a:xfrm>
+            <a:off x="731520" y="2587752"/>
+            <a:ext cx="54864" cy="658368"/>
+          </a:xfrm>
+          <a:prstGeom prst="rect">
+            <a:avLst/>
+          </a:prstGeom>
+          <a:solidFill>
+            <a:srgbClr val="2A9D8F"/>
+          </a:solidFill>
+          <a:ln/>
+        </p:spPr>
+      </p:sp>
+      <p:sp>
+        <p:nvSpPr>
+          <p:cNvPr id="24" name="Text 22"/>
+          <p:cNvSpPr/>
+          <p:nvPr/>
+        </p:nvSpPr>
+        <p:spPr>
+          <a:xfrm>
+            <a:off x="914400" y="2587752"/>
+            <a:ext cx="1463040" cy="658368"/>
+          </a:xfrm>
+          <a:prstGeom prst="rect">
+            <a:avLst/>
+          </a:prstGeom>
+          <a:noFill/>
+          <a:ln/>
+        </p:spPr>
+        <p:txBody>
+          <a:bodyPr wrap="square" lIns="0" tIns="0" rIns="0" bIns="0" rtlCol="0" anchor="ctr"/>
+          <a:lstStyle/>
+          <a:p>
+            <a:pPr indent="0" marL="0">
+              <a:buNone/>
+            </a:pPr>
+            <a:r>
+              <a:rPr lang="en-US" sz="1300" b="1" dirty="0">
+                <a:solidFill>
+                  <a:srgbClr val="1B2A4A"/>
+                </a:solidFill>
+                <a:latin typeface="Georgia" pitchFamily="34" charset="0"/>
+                <a:ea typeface="Georgia" pitchFamily="34" charset="-122"/>
+                <a:cs typeface="Georgia" pitchFamily="34" charset="-120"/>
+              </a:rPr>
+              <a:t>Axis</a:t>
+            </a:r>
+            <a:endParaRPr lang="en-US" sz="1300" dirty="0"/>
+          </a:p>
+        </p:txBody>
+      </p:sp>
+      <p:sp>
+        <p:nvSpPr>
+          <p:cNvPr id="25" name="Text 23"/>
+          <p:cNvSpPr/>
+          <p:nvPr/>
+        </p:nvSpPr>
+        <p:spPr>
+          <a:xfrm>
+            <a:off x="2377440" y="2587752"/>
+            <a:ext cx="1920240" cy="658368"/>
+          </a:xfrm>
+          <a:prstGeom prst="rect">
+            <a:avLst/>
+          </a:prstGeom>
+          <a:noFill/>
+          <a:ln/>
+        </p:spPr>
+        <p:txBody>
+          <a:bodyPr wrap="square" lIns="0" tIns="0" rIns="0" bIns="0" rtlCol="0" anchor="ctr"/>
+          <a:lstStyle/>
+          <a:p>
+            <a:pPr indent="0" marL="0">
+              <a:buNone/>
+            </a:pPr>
+            <a:r>
+              <a:rPr lang="en-US" sz="1100" dirty="0">
+                <a:solidFill>
+                  <a:srgbClr val="6B6660"/>
+                </a:solidFill>
+                <a:latin typeface="Calibri" pitchFamily="34" charset="0"/>
+                <a:ea typeface="Calibri" pitchFamily="34" charset="-122"/>
+                <a:cs typeface="Calibri" pitchFamily="34" charset="-120"/>
+              </a:rPr>
+              <a:t>Horizontal (x) or vertical (y) line</a:t>
+            </a:r>
+            <a:endParaRPr lang="en-US" sz="1100" dirty="0"/>
+          </a:p>
+        </p:txBody>
+      </p:sp>
+      <p:sp>
+        <p:nvSpPr>
+          <p:cNvPr id="26" name="Shape 24"/>
+          <p:cNvSpPr/>
+          <p:nvPr/>
+        </p:nvSpPr>
+        <p:spPr>
+          <a:xfrm>
+            <a:off x="4754880" y="2587752"/>
+            <a:ext cx="3657600" cy="658368"/>
+          </a:xfrm>
+          <a:prstGeom prst="rect">
+            <a:avLst/>
+          </a:prstGeom>
+          <a:solidFill>
+            <a:srgbClr val="FFFFFF"/>
+          </a:solidFill>
+          <a:ln/>
+          <a:effectLst>
+            <a:outerShdw sx="100000" sy="100000" kx="0" ky="0" algn="bl" rotWithShape="0" blurRad="50800" dist="25400" dir="8100000">
+              <a:srgbClr val="000000">
+                <a:alpha val="10000"/>
+              </a:srgbClr>
+            </a:outerShdw>
+          </a:effectLst>
+        </p:spPr>
+      </p:sp>
+      <p:sp>
+        <p:nvSpPr>
+          <p:cNvPr id="27" name="Shape 25"/>
+          <p:cNvSpPr/>
+          <p:nvPr/>
+        </p:nvSpPr>
+        <p:spPr>
+          <a:xfrm>
+            <a:off x="4754880" y="2587752"/>
+            <a:ext cx="54864" cy="658368"/>
+          </a:xfrm>
+          <a:prstGeom prst="rect">
+            <a:avLst/>
+          </a:prstGeom>
+          <a:solidFill>
+            <a:srgbClr val="2A9D8F"/>
+          </a:solidFill>
+          <a:ln/>
+        </p:spPr>
+      </p:sp>
+      <p:sp>
+        <p:nvSpPr>
+          <p:cNvPr id="28" name="Text 26"/>
+          <p:cNvSpPr/>
+          <p:nvPr/>
+        </p:nvSpPr>
+        <p:spPr>
+          <a:xfrm>
+            <a:off x="4937760" y="2587752"/>
+            <a:ext cx="1463040" cy="658368"/>
+          </a:xfrm>
+          <a:prstGeom prst="rect">
+            <a:avLst/>
+          </a:prstGeom>
+          <a:noFill/>
+          <a:ln/>
+        </p:spPr>
+        <p:txBody>
+          <a:bodyPr wrap="square" lIns="0" tIns="0" rIns="0" bIns="0" rtlCol="0" anchor="ctr"/>
+          <a:lstStyle/>
+          <a:p>
+            <a:pPr indent="0" marL="0">
+              <a:buNone/>
+            </a:pPr>
+            <a:r>
+              <a:rPr lang="en-US" sz="1300" b="1" dirty="0">
+                <a:solidFill>
+                  <a:srgbClr val="1B2A4A"/>
+                </a:solidFill>
+                <a:latin typeface="Georgia" pitchFamily="34" charset="0"/>
+                <a:ea typeface="Georgia" pitchFamily="34" charset="-122"/>
+                <a:cs typeface="Georgia" pitchFamily="34" charset="-120"/>
+              </a:rPr>
+              <a:t>Scale</a:t>
+            </a:r>
+            <a:endParaRPr lang="en-US" sz="1300" dirty="0"/>
+          </a:p>
+        </p:txBody>
+      </p:sp>
+      <p:sp>
+        <p:nvSpPr>
+          <p:cNvPr id="29" name="Text 27"/>
+          <p:cNvSpPr/>
+          <p:nvPr/>
+        </p:nvSpPr>
+        <p:spPr>
+          <a:xfrm>
+            <a:off x="6400800" y="2587752"/>
+            <a:ext cx="1920240" cy="658368"/>
+          </a:xfrm>
+          <a:prstGeom prst="rect">
+            <a:avLst/>
+          </a:prstGeom>
+          <a:noFill/>
+          <a:ln/>
+        </p:spPr>
+        <p:txBody>
+          <a:bodyPr wrap="square" lIns="0" tIns="0" rIns="0" bIns="0" rtlCol="0" anchor="ctr"/>
+          <a:lstStyle/>
+          <a:p>
+            <a:pPr indent="0" marL="0">
+              <a:buNone/>
+            </a:pPr>
+            <a:r>
+              <a:rPr lang="en-US" sz="1100" dirty="0">
+                <a:solidFill>
+                  <a:srgbClr val="6B6660"/>
+                </a:solidFill>
+                <a:latin typeface="Calibri" pitchFamily="34" charset="0"/>
+                <a:ea typeface="Calibri" pitchFamily="34" charset="-122"/>
+                <a:cs typeface="Calibri" pitchFamily="34" charset="-120"/>
+              </a:rPr>
+              <a:t>The values marked on the axis</a:t>
+            </a:r>
+            <a:endParaRPr lang="en-US" sz="1100" dirty="0"/>
           </a:p>
         </p:txBody>
       </p:sp>
@@ -1655,7 +2542,47 @@
         <p:spPr>
           <a:xfrm>
             <a:off x="0" y="0"/>
-            <a:ext cx="9144000" cy="54864"/>
+            <a:ext cx="9144000" cy="822960"/>
+          </a:xfrm>
+          <a:prstGeom prst="rect">
+            <a:avLst/>
+          </a:prstGeom>
+          <a:solidFill>
+            <a:srgbClr val="FFFFFF"/>
+          </a:solidFill>
+          <a:ln/>
+        </p:spPr>
+      </p:sp>
+      <p:sp>
+        <p:nvSpPr>
+          <p:cNvPr id="3" name="Shape 1"/>
+          <p:cNvSpPr/>
+          <p:nvPr/>
+        </p:nvSpPr>
+        <p:spPr>
+          <a:xfrm>
+            <a:off x="0" y="804672"/>
+            <a:ext cx="9144000" cy="27432"/>
+          </a:xfrm>
+          <a:prstGeom prst="rect">
+            <a:avLst/>
+          </a:prstGeom>
+          <a:solidFill>
+            <a:srgbClr val="E5E2DC"/>
+          </a:solidFill>
+          <a:ln/>
+        </p:spPr>
+      </p:sp>
+      <p:sp>
+        <p:nvSpPr>
+          <p:cNvPr id="4" name="Shape 2"/>
+          <p:cNvSpPr/>
+          <p:nvPr/>
+        </p:nvSpPr>
+        <p:spPr>
+          <a:xfrm>
+            <a:off x="548640" y="201168"/>
+            <a:ext cx="54864" cy="420624"/>
           </a:xfrm>
           <a:prstGeom prst="rect">
             <a:avLst/>
@@ -1668,14 +2595,14 @@
       </p:sp>
       <p:sp>
         <p:nvSpPr>
-          <p:cNvPr id="3" name="Text 1"/>
-          <p:cNvSpPr/>
-          <p:nvPr/>
-        </p:nvSpPr>
-        <p:spPr>
-          <a:xfrm>
-            <a:off x="7772400" y="4709160"/>
-            <a:ext cx="1097280" cy="320040"/>
+          <p:cNvPr id="5" name="Text 3"/>
+          <p:cNvSpPr/>
+          <p:nvPr/>
+        </p:nvSpPr>
+        <p:spPr>
+          <a:xfrm>
+            <a:off x="777240" y="137160"/>
+            <a:ext cx="7772400" cy="548640"/>
           </a:xfrm>
           <a:prstGeom prst="rect">
             <a:avLst/>
@@ -1684,53 +2611,14 @@
           <a:ln/>
         </p:spPr>
         <p:txBody>
-          <a:bodyPr wrap="square" rtlCol="0" anchor="ctr"/>
-          <a:lstStyle/>
-          <a:p>
-            <a:pPr algn="r" indent="0" marL="0">
-              <a:buNone/>
-            </a:pPr>
-            <a:r>
-              <a:rPr lang="en-US" sz="900" dirty="0">
-                <a:solidFill>
-                  <a:srgbClr val="6B6660"/>
-                </a:solidFill>
-                <a:latin typeface="Calibri" pitchFamily="34" charset="0"/>
-                <a:ea typeface="Calibri" pitchFamily="34" charset="-122"/>
-                <a:cs typeface="Calibri" pitchFamily="34" charset="-120"/>
-              </a:rPr>
-              <a:t>3 / 5</a:t>
-            </a:r>
-            <a:endParaRPr lang="en-US" sz="900" dirty="0"/>
-          </a:p>
-        </p:txBody>
-      </p:sp>
-      <p:sp>
-        <p:nvSpPr>
-          <p:cNvPr id="4" name="Text 2"/>
-          <p:cNvSpPr/>
-          <p:nvPr/>
-        </p:nvSpPr>
-        <p:spPr>
-          <a:xfrm>
-            <a:off x="457200" y="274320"/>
-            <a:ext cx="8229600" cy="640080"/>
-          </a:xfrm>
-          <a:prstGeom prst="rect">
-            <a:avLst/>
-          </a:prstGeom>
-          <a:noFill/>
-          <a:ln/>
-        </p:spPr>
-        <p:txBody>
-          <a:bodyPr wrap="square" rtlCol="0" anchor="ctr"/>
+          <a:bodyPr wrap="square" lIns="0" tIns="0" rIns="0" bIns="0" rtlCol="0" anchor="ctr"/>
           <a:lstStyle/>
           <a:p>
             <a:pPr indent="0" marL="0">
               <a:buNone/>
             </a:pPr>
             <a:r>
-              <a:rPr lang="en-US" sz="2600" b="1" dirty="0">
+              <a:rPr lang="en-US" sz="2000" b="1" dirty="0">
                 <a:solidFill>
                   <a:srgbClr val="1B2A4A"/>
                 </a:solidFill>
@@ -1738,402 +2626,1279 @@
                 <a:ea typeface="Georgia" pitchFamily="34" charset="-122"/>
                 <a:cs typeface="Georgia" pitchFamily="34" charset="-120"/>
               </a:rPr>
-              <a:t>Types of Charts</a:t>
-            </a:r>
-            <a:endParaRPr lang="en-US" sz="2600" dirty="0"/>
+              <a:t>Choosing the Right Chart</a:t>
+            </a:r>
+            <a:endParaRPr lang="en-US" sz="2000" dirty="0"/>
           </a:p>
         </p:txBody>
       </p:sp>
-      <p:sp>
-        <p:nvSpPr>
-          <p:cNvPr id="5" name="Shape 3"/>
-          <p:cNvSpPr/>
-          <p:nvPr/>
-        </p:nvSpPr>
-        <p:spPr>
-          <a:xfrm>
-            <a:off x="457200" y="1188720"/>
-            <a:ext cx="2560320" cy="1828800"/>
-          </a:xfrm>
-          <a:prstGeom prst="rect">
-            <a:avLst/>
-          </a:prstGeom>
-          <a:solidFill>
-            <a:srgbClr val="FFFFFF"/>
-          </a:solidFill>
-          <a:ln w="12700">
-            <a:solidFill>
-              <a:srgbClr val="E5E2DC"/>
-            </a:solidFill>
-            <a:prstDash val="solid"/>
-          </a:ln>
-          <a:effectLst>
-            <a:outerShdw sx="100000" sy="100000" kx="0" ky="0" algn="bl" rotWithShape="0" blurRad="50800" dist="25400" dir="8100000">
-              <a:srgbClr val="000000">
-                <a:alpha val="10000"/>
-              </a:srgbClr>
-            </a:outerShdw>
-          </a:effectLst>
-        </p:spPr>
-      </p:sp>
-      <p:sp>
-        <p:nvSpPr>
-          <p:cNvPr id="6" name="Shape 4"/>
-          <p:cNvSpPr/>
-          <p:nvPr/>
-        </p:nvSpPr>
-        <p:spPr>
-          <a:xfrm>
-            <a:off x="457200" y="1188720"/>
-            <a:ext cx="2560320" cy="54864"/>
-          </a:xfrm>
-          <a:prstGeom prst="rect">
-            <a:avLst/>
-          </a:prstGeom>
-          <a:solidFill>
-            <a:srgbClr val="2A9D8F"/>
-          </a:solidFill>
-          <a:ln/>
-        </p:spPr>
-      </p:sp>
-      <p:sp>
-        <p:nvSpPr>
-          <p:cNvPr id="7" name="Text 5"/>
-          <p:cNvSpPr/>
-          <p:nvPr/>
-        </p:nvSpPr>
-        <p:spPr>
-          <a:xfrm>
-            <a:off x="594360" y="1325880"/>
-            <a:ext cx="2286000" cy="365760"/>
-          </a:xfrm>
-          <a:prstGeom prst="rect">
-            <a:avLst/>
-          </a:prstGeom>
-          <a:noFill/>
-          <a:ln/>
-        </p:spPr>
-        <p:txBody>
-          <a:bodyPr wrap="square" rtlCol="0" anchor="ctr"/>
-          <a:lstStyle/>
-          <a:p>
-            <a:pPr indent="0" marL="0">
-              <a:buNone/>
-            </a:pPr>
-            <a:r>
-              <a:rPr lang="en-US" sz="1400" b="1" dirty="0">
-                <a:solidFill>
-                  <a:srgbClr val="1B2A4A"/>
-                </a:solidFill>
-                <a:latin typeface="Calibri" pitchFamily="34" charset="0"/>
-                <a:ea typeface="Calibri" pitchFamily="34" charset="-122"/>
-                <a:cs typeface="Calibri" pitchFamily="34" charset="-120"/>
-              </a:rPr>
-              <a:t>Bar Chart</a:t>
-            </a:r>
-            <a:endParaRPr lang="en-US" sz="1400" dirty="0"/>
-          </a:p>
-        </p:txBody>
-      </p:sp>
-      <p:sp>
-        <p:nvSpPr>
-          <p:cNvPr id="8" name="Text 6"/>
-          <p:cNvSpPr/>
-          <p:nvPr/>
-        </p:nvSpPr>
-        <p:spPr>
-          <a:xfrm>
-            <a:off x="594360" y="1737360"/>
-            <a:ext cx="2286000" cy="1097280"/>
-          </a:xfrm>
-          <a:prstGeom prst="rect">
-            <a:avLst/>
-          </a:prstGeom>
-          <a:noFill/>
-          <a:ln/>
-        </p:spPr>
-        <p:txBody>
-          <a:bodyPr wrap="square" rtlCol="0" anchor="t"/>
-          <a:lstStyle/>
-          <a:p>
-            <a:pPr indent="0" marL="0">
-              <a:buNone/>
-            </a:pPr>
-            <a:r>
-              <a:rPr lang="en-US" sz="1100" dirty="0">
-                <a:solidFill>
-                  <a:srgbClr val="3D3A36"/>
-                </a:solidFill>
-                <a:latin typeface="Calibri" pitchFamily="34" charset="0"/>
-                <a:ea typeface="Calibri" pitchFamily="34" charset="-122"/>
-                <a:cs typeface="Calibri" pitchFamily="34" charset="-120"/>
-              </a:rPr>
-              <a:t>Categoric data. Bars DON'T touch. Equal width. Frequency on y-axis. Example: favourite colours in a class.</a:t>
-            </a:r>
-            <a:endParaRPr lang="en-US" sz="1100" dirty="0"/>
-          </a:p>
-        </p:txBody>
-      </p:sp>
-      <p:sp>
-        <p:nvSpPr>
-          <p:cNvPr id="9" name="Shape 7"/>
-          <p:cNvSpPr/>
-          <p:nvPr/>
-        </p:nvSpPr>
-        <p:spPr>
-          <a:xfrm>
-            <a:off x="3291840" y="1188720"/>
-            <a:ext cx="2560320" cy="1828800"/>
-          </a:xfrm>
-          <a:prstGeom prst="rect">
-            <a:avLst/>
-          </a:prstGeom>
-          <a:solidFill>
-            <a:srgbClr val="FFFFFF"/>
-          </a:solidFill>
-          <a:ln w="12700">
-            <a:solidFill>
-              <a:srgbClr val="E5E2DC"/>
-            </a:solidFill>
-            <a:prstDash val="solid"/>
-          </a:ln>
-          <a:effectLst>
-            <a:outerShdw sx="100000" sy="100000" kx="0" ky="0" algn="bl" rotWithShape="0" blurRad="50800" dist="25400" dir="8100000">
-              <a:srgbClr val="000000">
-                <a:alpha val="10000"/>
-              </a:srgbClr>
-            </a:outerShdw>
-          </a:effectLst>
-        </p:spPr>
-      </p:sp>
-      <p:sp>
-        <p:nvSpPr>
-          <p:cNvPr id="10" name="Shape 8"/>
-          <p:cNvSpPr/>
-          <p:nvPr/>
-        </p:nvSpPr>
-        <p:spPr>
-          <a:xfrm>
-            <a:off x="3291840" y="1188720"/>
-            <a:ext cx="2560320" cy="54864"/>
-          </a:xfrm>
-          <a:prstGeom prst="rect">
-            <a:avLst/>
-          </a:prstGeom>
-          <a:solidFill>
-            <a:srgbClr val="2A9D8F"/>
-          </a:solidFill>
-          <a:ln/>
-        </p:spPr>
-      </p:sp>
-      <p:sp>
-        <p:nvSpPr>
-          <p:cNvPr id="11" name="Text 9"/>
-          <p:cNvSpPr/>
-          <p:nvPr/>
-        </p:nvSpPr>
-        <p:spPr>
-          <a:xfrm>
-            <a:off x="3429000" y="1325880"/>
-            <a:ext cx="2286000" cy="365760"/>
-          </a:xfrm>
-          <a:prstGeom prst="rect">
-            <a:avLst/>
-          </a:prstGeom>
-          <a:noFill/>
-          <a:ln/>
-        </p:spPr>
-        <p:txBody>
-          <a:bodyPr wrap="square" rtlCol="0" anchor="ctr"/>
-          <a:lstStyle/>
-          <a:p>
-            <a:pPr indent="0" marL="0">
-              <a:buNone/>
-            </a:pPr>
-            <a:r>
-              <a:rPr lang="en-US" sz="1400" b="1" dirty="0">
-                <a:solidFill>
-                  <a:srgbClr val="1B2A4A"/>
-                </a:solidFill>
-                <a:latin typeface="Calibri" pitchFamily="34" charset="0"/>
-                <a:ea typeface="Calibri" pitchFamily="34" charset="-122"/>
-                <a:cs typeface="Calibri" pitchFamily="34" charset="-120"/>
-              </a:rPr>
-              <a:t>Pie Chart</a:t>
-            </a:r>
-            <a:endParaRPr lang="en-US" sz="1400" dirty="0"/>
-          </a:p>
-        </p:txBody>
-      </p:sp>
-      <p:sp>
-        <p:nvSpPr>
-          <p:cNvPr id="12" name="Text 10"/>
-          <p:cNvSpPr/>
-          <p:nvPr/>
-        </p:nvSpPr>
-        <p:spPr>
-          <a:xfrm>
-            <a:off x="3429000" y="1737360"/>
-            <a:ext cx="2286000" cy="1097280"/>
-          </a:xfrm>
-          <a:prstGeom prst="rect">
-            <a:avLst/>
-          </a:prstGeom>
-          <a:noFill/>
-          <a:ln/>
-        </p:spPr>
-        <p:txBody>
-          <a:bodyPr wrap="square" rtlCol="0" anchor="t"/>
-          <a:lstStyle/>
-          <a:p>
-            <a:pPr indent="0" marL="0">
-              <a:buNone/>
-            </a:pPr>
-            <a:r>
-              <a:rPr lang="en-US" sz="1100" dirty="0">
-                <a:solidFill>
-                  <a:srgbClr val="3D3A36"/>
-                </a:solidFill>
-                <a:latin typeface="Calibri" pitchFamily="34" charset="0"/>
-                <a:ea typeface="Calibri" pitchFamily="34" charset="-122"/>
-                <a:cs typeface="Calibri" pitchFamily="34" charset="-120"/>
-              </a:rPr>
-              <a:t>Shows proportions. All sections = 100% (360°). Fraction × 360 = angle. Best for 3–6 categories.</a:t>
-            </a:r>
-            <a:endParaRPr lang="en-US" sz="1100" dirty="0"/>
-          </a:p>
-        </p:txBody>
-      </p:sp>
-      <p:sp>
-        <p:nvSpPr>
-          <p:cNvPr id="13" name="Shape 11"/>
-          <p:cNvSpPr/>
-          <p:nvPr/>
-        </p:nvSpPr>
-        <p:spPr>
-          <a:xfrm>
-            <a:off x="6126480" y="1188720"/>
-            <a:ext cx="2560320" cy="1828800"/>
-          </a:xfrm>
-          <a:prstGeom prst="rect">
-            <a:avLst/>
-          </a:prstGeom>
-          <a:solidFill>
-            <a:srgbClr val="FFFFFF"/>
-          </a:solidFill>
-          <a:ln w="12700">
-            <a:solidFill>
-              <a:srgbClr val="E5E2DC"/>
-            </a:solidFill>
-            <a:prstDash val="solid"/>
-          </a:ln>
-          <a:effectLst>
-            <a:outerShdw sx="100000" sy="100000" kx="0" ky="0" algn="bl" rotWithShape="0" blurRad="50800" dist="25400" dir="8100000">
-              <a:srgbClr val="000000">
-                <a:alpha val="10000"/>
-              </a:srgbClr>
-            </a:outerShdw>
-          </a:effectLst>
-        </p:spPr>
-      </p:sp>
-      <p:sp>
-        <p:nvSpPr>
-          <p:cNvPr id="14" name="Shape 12"/>
-          <p:cNvSpPr/>
-          <p:nvPr/>
-        </p:nvSpPr>
-        <p:spPr>
-          <a:xfrm>
-            <a:off x="6126480" y="1188720"/>
-            <a:ext cx="2560320" cy="54864"/>
-          </a:xfrm>
-          <a:prstGeom prst="rect">
-            <a:avLst/>
-          </a:prstGeom>
-          <a:solidFill>
-            <a:srgbClr val="2A9D8F"/>
-          </a:solidFill>
-          <a:ln/>
-        </p:spPr>
-      </p:sp>
-      <p:sp>
-        <p:nvSpPr>
-          <p:cNvPr id="15" name="Text 13"/>
-          <p:cNvSpPr/>
-          <p:nvPr/>
-        </p:nvSpPr>
-        <p:spPr>
-          <a:xfrm>
-            <a:off x="6263640" y="1325880"/>
-            <a:ext cx="2286000" cy="365760"/>
-          </a:xfrm>
-          <a:prstGeom prst="rect">
-            <a:avLst/>
-          </a:prstGeom>
-          <a:noFill/>
-          <a:ln/>
-        </p:spPr>
-        <p:txBody>
-          <a:bodyPr wrap="square" rtlCol="0" anchor="ctr"/>
-          <a:lstStyle/>
-          <a:p>
-            <a:pPr indent="0" marL="0">
-              <a:buNone/>
-            </a:pPr>
-            <a:r>
-              <a:rPr lang="en-US" sz="1400" b="1" dirty="0">
-                <a:solidFill>
-                  <a:srgbClr val="1B2A4A"/>
-                </a:solidFill>
-                <a:latin typeface="Calibri" pitchFamily="34" charset="0"/>
-                <a:ea typeface="Calibri" pitchFamily="34" charset="-122"/>
-                <a:cs typeface="Calibri" pitchFamily="34" charset="-120"/>
-              </a:rPr>
-              <a:t>Line Graph</a:t>
-            </a:r>
-            <a:endParaRPr lang="en-US" sz="1400" dirty="0"/>
-          </a:p>
-        </p:txBody>
-      </p:sp>
-      <p:sp>
-        <p:nvSpPr>
-          <p:cNvPr id="16" name="Text 14"/>
-          <p:cNvSpPr/>
-          <p:nvPr/>
-        </p:nvSpPr>
-        <p:spPr>
-          <a:xfrm>
-            <a:off x="6263640" y="1737360"/>
-            <a:ext cx="2286000" cy="1097280"/>
-          </a:xfrm>
-          <a:prstGeom prst="rect">
-            <a:avLst/>
-          </a:prstGeom>
-          <a:noFill/>
-          <a:ln/>
-        </p:spPr>
-        <p:txBody>
-          <a:bodyPr wrap="square" rtlCol="0" anchor="t"/>
-          <a:lstStyle/>
-          <a:p>
-            <a:pPr indent="0" marL="0">
-              <a:buNone/>
-            </a:pPr>
-            <a:r>
-              <a:rPr lang="en-US" sz="1100" dirty="0">
-                <a:solidFill>
-                  <a:srgbClr val="3D3A36"/>
-                </a:solidFill>
-                <a:latin typeface="Calibri" pitchFamily="34" charset="0"/>
-                <a:ea typeface="Calibri" pitchFamily="34" charset="-122"/>
-                <a:cs typeface="Calibri" pitchFamily="34" charset="-120"/>
-              </a:rPr>
-              <a:t>Continuous data over time. Points connected with lines. Shows trends. Example: temperature over 24 hours.</a:t>
-            </a:r>
-            <a:endParaRPr lang="en-US" sz="1100" dirty="0"/>
-          </a:p>
-        </p:txBody>
-      </p:sp>
+      <p:graphicFrame>
+        <p:nvGraphicFramePr>
+          <p:cNvPr id="4" name="Table 0"/>
+          <p:cNvGraphicFramePr>
+            <a:graphicFrameLocks noGrp="1"/>
+          </p:cNvGraphicFramePr>
+          <p:nvPr>
+            <p:extLst>
+              <p:ext uri="{D42A27DB-BD31-4B8C-83A1-F6EECF244321}">
+                <p14:modId xmlns:p14="http://schemas.microsoft.com/office/powerpoint/2010/main" val="1579011935"/>
+              </p:ext>
+            </p:extLst>
+          </p:nvPr>
+        </p:nvGraphicFramePr>
+        <p:xfrm>
+          <a:off x="640080" y="1051560"/>
+          <a:ext cx="7863840" cy="914400"/>
+        </p:xfrm>
+        <a:graphic>
+          <a:graphicData uri="http://schemas.openxmlformats.org/drawingml/2006/table">
+            <a:tbl>
+              <a:tblPr/>
+              <a:tblGrid>
+                <a:gridCol w="2621280"/>
+                <a:gridCol w="2621280"/>
+                <a:gridCol w="2621280"/>
+              </a:tblGrid>
+              <a:tr h="502920">
+                <a:tc>
+                  <a:txBody>
+                    <a:bodyPr/>
+                    <a:lstStyle/>
+                    <a:p>
+                      <a:pPr indent="0" marL="0">
+                        <a:buNone/>
+                      </a:pPr>
+                      <a:r>
+                        <a:rPr lang="en-US" sz="1200" b="1" dirty="0">
+                          <a:solidFill>
+                            <a:srgbClr val="FFFFFF"/>
+                          </a:solidFill>
+                          <a:latin typeface="Calibri" pitchFamily="34" charset="0"/>
+                          <a:ea typeface="Calibri" pitchFamily="34" charset="-122"/>
+                          <a:cs typeface="Calibri" pitchFamily="34" charset="-120"/>
+                        </a:rPr>
+                        <a:t>Chart Type</a:t>
+                      </a:r>
+                      <a:endParaRPr lang="en-US" sz="1200" dirty="0">
+                        <a:latin typeface="Calibri" charset="0"/>
+                        <a:ea typeface="Calibri" charset="0"/>
+                        <a:cs typeface="Calibri" charset="0"/>
+                      </a:endParaRPr>
+                    </a:p>
+                  </a:txBody>
+                  <a:tcPr marL="91440" marR="91440" marT="45720" marB="45720">
+                    <a:lnL w="6350" cap="flat" cmpd="sng" algn="ctr">
+                      <a:solidFill>
+                        <a:srgbClr val="E5E2DC"/>
+                      </a:solidFill>
+                      <a:prstDash val="solid"/>
+                      <a:round/>
+                      <a:headEnd type="none" w="med" len="med"/>
+                      <a:tailEnd type="none" w="med" len="med"/>
+                    </a:lnL>
+                    <a:lnR w="6350" cap="flat" cmpd="sng" algn="ctr">
+                      <a:solidFill>
+                        <a:srgbClr val="E5E2DC"/>
+                      </a:solidFill>
+                      <a:prstDash val="solid"/>
+                      <a:round/>
+                      <a:headEnd type="none" w="med" len="med"/>
+                      <a:tailEnd type="none" w="med" len="med"/>
+                    </a:lnR>
+                    <a:lnT w="6350" cap="flat" cmpd="sng" algn="ctr">
+                      <a:solidFill>
+                        <a:srgbClr val="E5E2DC"/>
+                      </a:solidFill>
+                      <a:prstDash val="solid"/>
+                      <a:round/>
+                      <a:headEnd type="none" w="med" len="med"/>
+                      <a:tailEnd type="none" w="med" len="med"/>
+                    </a:lnT>
+                    <a:lnB w="6350" cap="flat" cmpd="sng" algn="ctr">
+                      <a:solidFill>
+                        <a:srgbClr val="E5E2DC"/>
+                      </a:solidFill>
+                      <a:prstDash val="solid"/>
+                      <a:round/>
+                      <a:headEnd type="none" w="med" len="med"/>
+                      <a:tailEnd type="none" w="med" len="med"/>
+                    </a:lnB>
+                    <a:solidFill>
+                      <a:srgbClr val="2A9D8F"/>
+                    </a:solidFill>
+                  </a:tcPr>
+                </a:tc>
+                <a:tc>
+                  <a:txBody>
+                    <a:bodyPr/>
+                    <a:lstStyle/>
+                    <a:p>
+                      <a:pPr indent="0" marL="0">
+                        <a:buNone/>
+                      </a:pPr>
+                      <a:r>
+                        <a:rPr lang="en-US" sz="1200" b="1" dirty="0">
+                          <a:solidFill>
+                            <a:srgbClr val="FFFFFF"/>
+                          </a:solidFill>
+                          <a:latin typeface="Calibri" pitchFamily="34" charset="0"/>
+                          <a:ea typeface="Calibri" pitchFamily="34" charset="-122"/>
+                          <a:cs typeface="Calibri" pitchFamily="34" charset="-120"/>
+                        </a:rPr>
+                        <a:t>Best For</a:t>
+                      </a:r>
+                      <a:endParaRPr lang="en-US" sz="1200" dirty="0">
+                        <a:latin typeface="Calibri" charset="0"/>
+                        <a:ea typeface="Calibri" charset="0"/>
+                        <a:cs typeface="Calibri" charset="0"/>
+                      </a:endParaRPr>
+                    </a:p>
+                  </a:txBody>
+                  <a:tcPr marL="91440" marR="91440" marT="45720" marB="45720">
+                    <a:lnL w="6350" cap="flat" cmpd="sng" algn="ctr">
+                      <a:solidFill>
+                        <a:srgbClr val="E5E2DC"/>
+                      </a:solidFill>
+                      <a:prstDash val="solid"/>
+                      <a:round/>
+                      <a:headEnd type="none" w="med" len="med"/>
+                      <a:tailEnd type="none" w="med" len="med"/>
+                    </a:lnL>
+                    <a:lnR w="6350" cap="flat" cmpd="sng" algn="ctr">
+                      <a:solidFill>
+                        <a:srgbClr val="E5E2DC"/>
+                      </a:solidFill>
+                      <a:prstDash val="solid"/>
+                      <a:round/>
+                      <a:headEnd type="none" w="med" len="med"/>
+                      <a:tailEnd type="none" w="med" len="med"/>
+                    </a:lnR>
+                    <a:lnT w="6350" cap="flat" cmpd="sng" algn="ctr">
+                      <a:solidFill>
+                        <a:srgbClr val="E5E2DC"/>
+                      </a:solidFill>
+                      <a:prstDash val="solid"/>
+                      <a:round/>
+                      <a:headEnd type="none" w="med" len="med"/>
+                      <a:tailEnd type="none" w="med" len="med"/>
+                    </a:lnT>
+                    <a:lnB w="6350" cap="flat" cmpd="sng" algn="ctr">
+                      <a:solidFill>
+                        <a:srgbClr val="E5E2DC"/>
+                      </a:solidFill>
+                      <a:prstDash val="solid"/>
+                      <a:round/>
+                      <a:headEnd type="none" w="med" len="med"/>
+                      <a:tailEnd type="none" w="med" len="med"/>
+                    </a:lnB>
+                    <a:solidFill>
+                      <a:srgbClr val="2A9D8F"/>
+                    </a:solidFill>
+                  </a:tcPr>
+                </a:tc>
+                <a:tc>
+                  <a:txBody>
+                    <a:bodyPr/>
+                    <a:lstStyle/>
+                    <a:p>
+                      <a:pPr indent="0" marL="0">
+                        <a:buNone/>
+                      </a:pPr>
+                      <a:r>
+                        <a:rPr lang="en-US" sz="1200" b="1" dirty="0">
+                          <a:solidFill>
+                            <a:srgbClr val="FFFFFF"/>
+                          </a:solidFill>
+                          <a:latin typeface="Calibri" pitchFamily="34" charset="0"/>
+                          <a:ea typeface="Calibri" pitchFamily="34" charset="-122"/>
+                          <a:cs typeface="Calibri" pitchFamily="34" charset="-120"/>
+                        </a:rPr>
+                        <a:t>Key Feature</a:t>
+                      </a:r>
+                      <a:endParaRPr lang="en-US" sz="1200" dirty="0">
+                        <a:latin typeface="Calibri" charset="0"/>
+                        <a:ea typeface="Calibri" charset="0"/>
+                        <a:cs typeface="Calibri" charset="0"/>
+                      </a:endParaRPr>
+                    </a:p>
+                  </a:txBody>
+                  <a:tcPr marL="91440" marR="91440" marT="45720" marB="45720">
+                    <a:lnL w="6350" cap="flat" cmpd="sng" algn="ctr">
+                      <a:solidFill>
+                        <a:srgbClr val="E5E2DC"/>
+                      </a:solidFill>
+                      <a:prstDash val="solid"/>
+                      <a:round/>
+                      <a:headEnd type="none" w="med" len="med"/>
+                      <a:tailEnd type="none" w="med" len="med"/>
+                    </a:lnL>
+                    <a:lnR w="6350" cap="flat" cmpd="sng" algn="ctr">
+                      <a:solidFill>
+                        <a:srgbClr val="E5E2DC"/>
+                      </a:solidFill>
+                      <a:prstDash val="solid"/>
+                      <a:round/>
+                      <a:headEnd type="none" w="med" len="med"/>
+                      <a:tailEnd type="none" w="med" len="med"/>
+                    </a:lnR>
+                    <a:lnT w="6350" cap="flat" cmpd="sng" algn="ctr">
+                      <a:solidFill>
+                        <a:srgbClr val="E5E2DC"/>
+                      </a:solidFill>
+                      <a:prstDash val="solid"/>
+                      <a:round/>
+                      <a:headEnd type="none" w="med" len="med"/>
+                      <a:tailEnd type="none" w="med" len="med"/>
+                    </a:lnT>
+                    <a:lnB w="6350" cap="flat" cmpd="sng" algn="ctr">
+                      <a:solidFill>
+                        <a:srgbClr val="E5E2DC"/>
+                      </a:solidFill>
+                      <a:prstDash val="solid"/>
+                      <a:round/>
+                      <a:headEnd type="none" w="med" len="med"/>
+                      <a:tailEnd type="none" w="med" len="med"/>
+                    </a:lnB>
+                    <a:solidFill>
+                      <a:srgbClr val="2A9D8F"/>
+                    </a:solidFill>
+                  </a:tcPr>
+                </a:tc>
+              </a:tr>
+              <a:tr h="502920">
+                <a:tc>
+                  <a:txBody>
+                    <a:bodyPr/>
+                    <a:lstStyle/>
+                    <a:p>
+                      <a:pPr indent="0" marL="0">
+                        <a:buNone/>
+                      </a:pPr>
+                      <a:r>
+                        <a:rPr lang="en-US" sz="1200" dirty="0">
+                          <a:solidFill>
+                            <a:srgbClr val="3D3A36"/>
+                          </a:solidFill>
+                          <a:latin typeface="Calibri" pitchFamily="34" charset="0"/>
+                          <a:ea typeface="Calibri" pitchFamily="34" charset="-122"/>
+                          <a:cs typeface="Calibri" pitchFamily="34" charset="-120"/>
+                        </a:rPr>
+                        <a:t>Bar chart</a:t>
+                      </a:r>
+                      <a:endParaRPr lang="en-US" sz="1200" dirty="0">
+                        <a:latin typeface="Calibri" charset="0"/>
+                        <a:ea typeface="Calibri" charset="0"/>
+                        <a:cs typeface="Calibri" charset="0"/>
+                      </a:endParaRPr>
+                    </a:p>
+                  </a:txBody>
+                  <a:tcPr marL="91440" marR="91440" marT="45720" marB="45720">
+                    <a:lnL w="6350" cap="flat" cmpd="sng" algn="ctr">
+                      <a:solidFill>
+                        <a:srgbClr val="E5E2DC"/>
+                      </a:solidFill>
+                      <a:prstDash val="solid"/>
+                      <a:round/>
+                      <a:headEnd type="none" w="med" len="med"/>
+                      <a:tailEnd type="none" w="med" len="med"/>
+                    </a:lnL>
+                    <a:lnR w="6350" cap="flat" cmpd="sng" algn="ctr">
+                      <a:solidFill>
+                        <a:srgbClr val="E5E2DC"/>
+                      </a:solidFill>
+                      <a:prstDash val="solid"/>
+                      <a:round/>
+                      <a:headEnd type="none" w="med" len="med"/>
+                      <a:tailEnd type="none" w="med" len="med"/>
+                    </a:lnR>
+                    <a:lnT w="6350" cap="flat" cmpd="sng" algn="ctr">
+                      <a:solidFill>
+                        <a:srgbClr val="E5E2DC"/>
+                      </a:solidFill>
+                      <a:prstDash val="solid"/>
+                      <a:round/>
+                      <a:headEnd type="none" w="med" len="med"/>
+                      <a:tailEnd type="none" w="med" len="med"/>
+                    </a:lnT>
+                    <a:lnB w="6350" cap="flat" cmpd="sng" algn="ctr">
+                      <a:solidFill>
+                        <a:srgbClr val="E5E2DC"/>
+                      </a:solidFill>
+                      <a:prstDash val="solid"/>
+                      <a:round/>
+                      <a:headEnd type="none" w="med" len="med"/>
+                      <a:tailEnd type="none" w="med" len="med"/>
+                    </a:lnB>
+                    <a:solidFill>
+                      <a:srgbClr val="FFFFFF"/>
+                    </a:solidFill>
+                  </a:tcPr>
+                </a:tc>
+                <a:tc>
+                  <a:txBody>
+                    <a:bodyPr/>
+                    <a:lstStyle/>
+                    <a:p>
+                      <a:pPr indent="0" marL="0">
+                        <a:buNone/>
+                      </a:pPr>
+                      <a:r>
+                        <a:rPr lang="en-US" sz="1200" dirty="0">
+                          <a:solidFill>
+                            <a:srgbClr val="3D3A36"/>
+                          </a:solidFill>
+                          <a:latin typeface="Calibri" pitchFamily="34" charset="0"/>
+                          <a:ea typeface="Calibri" pitchFamily="34" charset="-122"/>
+                          <a:cs typeface="Calibri" pitchFamily="34" charset="-120"/>
+                        </a:rPr>
+                        <a:t>Comparing categories</a:t>
+                      </a:r>
+                      <a:endParaRPr lang="en-US" sz="1200" dirty="0">
+                        <a:latin typeface="Calibri" charset="0"/>
+                        <a:ea typeface="Calibri" charset="0"/>
+                        <a:cs typeface="Calibri" charset="0"/>
+                      </a:endParaRPr>
+                    </a:p>
+                  </a:txBody>
+                  <a:tcPr marL="91440" marR="91440" marT="45720" marB="45720">
+                    <a:lnL w="6350" cap="flat" cmpd="sng" algn="ctr">
+                      <a:solidFill>
+                        <a:srgbClr val="E5E2DC"/>
+                      </a:solidFill>
+                      <a:prstDash val="solid"/>
+                      <a:round/>
+                      <a:headEnd type="none" w="med" len="med"/>
+                      <a:tailEnd type="none" w="med" len="med"/>
+                    </a:lnL>
+                    <a:lnR w="6350" cap="flat" cmpd="sng" algn="ctr">
+                      <a:solidFill>
+                        <a:srgbClr val="E5E2DC"/>
+                      </a:solidFill>
+                      <a:prstDash val="solid"/>
+                      <a:round/>
+                      <a:headEnd type="none" w="med" len="med"/>
+                      <a:tailEnd type="none" w="med" len="med"/>
+                    </a:lnR>
+                    <a:lnT w="6350" cap="flat" cmpd="sng" algn="ctr">
+                      <a:solidFill>
+                        <a:srgbClr val="E5E2DC"/>
+                      </a:solidFill>
+                      <a:prstDash val="solid"/>
+                      <a:round/>
+                      <a:headEnd type="none" w="med" len="med"/>
+                      <a:tailEnd type="none" w="med" len="med"/>
+                    </a:lnT>
+                    <a:lnB w="6350" cap="flat" cmpd="sng" algn="ctr">
+                      <a:solidFill>
+                        <a:srgbClr val="E5E2DC"/>
+                      </a:solidFill>
+                      <a:prstDash val="solid"/>
+                      <a:round/>
+                      <a:headEnd type="none" w="med" len="med"/>
+                      <a:tailEnd type="none" w="med" len="med"/>
+                    </a:lnB>
+                    <a:solidFill>
+                      <a:srgbClr val="FFFFFF"/>
+                    </a:solidFill>
+                  </a:tcPr>
+                </a:tc>
+                <a:tc>
+                  <a:txBody>
+                    <a:bodyPr/>
+                    <a:lstStyle/>
+                    <a:p>
+                      <a:pPr indent="0" marL="0">
+                        <a:buNone/>
+                      </a:pPr>
+                      <a:r>
+                        <a:rPr lang="en-US" sz="1200" dirty="0">
+                          <a:solidFill>
+                            <a:srgbClr val="3D3A36"/>
+                          </a:solidFill>
+                          <a:latin typeface="Calibri" pitchFamily="34" charset="0"/>
+                          <a:ea typeface="Calibri" pitchFamily="34" charset="-122"/>
+                          <a:cs typeface="Calibri" pitchFamily="34" charset="-120"/>
+                        </a:rPr>
+                        <a:t>Bars don't touch, equal width</a:t>
+                      </a:r>
+                      <a:endParaRPr lang="en-US" sz="1200" dirty="0">
+                        <a:latin typeface="Calibri" charset="0"/>
+                        <a:ea typeface="Calibri" charset="0"/>
+                        <a:cs typeface="Calibri" charset="0"/>
+                      </a:endParaRPr>
+                    </a:p>
+                  </a:txBody>
+                  <a:tcPr marL="91440" marR="91440" marT="45720" marB="45720">
+                    <a:lnL w="6350" cap="flat" cmpd="sng" algn="ctr">
+                      <a:solidFill>
+                        <a:srgbClr val="E5E2DC"/>
+                      </a:solidFill>
+                      <a:prstDash val="solid"/>
+                      <a:round/>
+                      <a:headEnd type="none" w="med" len="med"/>
+                      <a:tailEnd type="none" w="med" len="med"/>
+                    </a:lnL>
+                    <a:lnR w="6350" cap="flat" cmpd="sng" algn="ctr">
+                      <a:solidFill>
+                        <a:srgbClr val="E5E2DC"/>
+                      </a:solidFill>
+                      <a:prstDash val="solid"/>
+                      <a:round/>
+                      <a:headEnd type="none" w="med" len="med"/>
+                      <a:tailEnd type="none" w="med" len="med"/>
+                    </a:lnR>
+                    <a:lnT w="6350" cap="flat" cmpd="sng" algn="ctr">
+                      <a:solidFill>
+                        <a:srgbClr val="E5E2DC"/>
+                      </a:solidFill>
+                      <a:prstDash val="solid"/>
+                      <a:round/>
+                      <a:headEnd type="none" w="med" len="med"/>
+                      <a:tailEnd type="none" w="med" len="med"/>
+                    </a:lnT>
+                    <a:lnB w="6350" cap="flat" cmpd="sng" algn="ctr">
+                      <a:solidFill>
+                        <a:srgbClr val="E5E2DC"/>
+                      </a:solidFill>
+                      <a:prstDash val="solid"/>
+                      <a:round/>
+                      <a:headEnd type="none" w="med" len="med"/>
+                      <a:tailEnd type="none" w="med" len="med"/>
+                    </a:lnB>
+                    <a:solidFill>
+                      <a:srgbClr val="FFFFFF"/>
+                    </a:solidFill>
+                  </a:tcPr>
+                </a:tc>
+              </a:tr>
+              <a:tr h="502920">
+                <a:tc>
+                  <a:txBody>
+                    <a:bodyPr/>
+                    <a:lstStyle/>
+                    <a:p>
+                      <a:pPr indent="0" marL="0">
+                        <a:buNone/>
+                      </a:pPr>
+                      <a:r>
+                        <a:rPr lang="en-US" sz="1200" dirty="0">
+                          <a:solidFill>
+                            <a:srgbClr val="3D3A36"/>
+                          </a:solidFill>
+                          <a:latin typeface="Calibri" pitchFamily="34" charset="0"/>
+                          <a:ea typeface="Calibri" pitchFamily="34" charset="-122"/>
+                          <a:cs typeface="Calibri" pitchFamily="34" charset="-120"/>
+                        </a:rPr>
+                        <a:t>Pie chart</a:t>
+                      </a:r>
+                      <a:endParaRPr lang="en-US" sz="1200" dirty="0">
+                        <a:latin typeface="Calibri" charset="0"/>
+                        <a:ea typeface="Calibri" charset="0"/>
+                        <a:cs typeface="Calibri" charset="0"/>
+                      </a:endParaRPr>
+                    </a:p>
+                  </a:txBody>
+                  <a:tcPr marL="91440" marR="91440" marT="45720" marB="45720">
+                    <a:lnL w="6350" cap="flat" cmpd="sng" algn="ctr">
+                      <a:solidFill>
+                        <a:srgbClr val="E5E2DC"/>
+                      </a:solidFill>
+                      <a:prstDash val="solid"/>
+                      <a:round/>
+                      <a:headEnd type="none" w="med" len="med"/>
+                      <a:tailEnd type="none" w="med" len="med"/>
+                    </a:lnL>
+                    <a:lnR w="6350" cap="flat" cmpd="sng" algn="ctr">
+                      <a:solidFill>
+                        <a:srgbClr val="E5E2DC"/>
+                      </a:solidFill>
+                      <a:prstDash val="solid"/>
+                      <a:round/>
+                      <a:headEnd type="none" w="med" len="med"/>
+                      <a:tailEnd type="none" w="med" len="med"/>
+                    </a:lnR>
+                    <a:lnT w="6350" cap="flat" cmpd="sng" algn="ctr">
+                      <a:solidFill>
+                        <a:srgbClr val="E5E2DC"/>
+                      </a:solidFill>
+                      <a:prstDash val="solid"/>
+                      <a:round/>
+                      <a:headEnd type="none" w="med" len="med"/>
+                      <a:tailEnd type="none" w="med" len="med"/>
+                    </a:lnT>
+                    <a:lnB w="6350" cap="flat" cmpd="sng" algn="ctr">
+                      <a:solidFill>
+                        <a:srgbClr val="E5E2DC"/>
+                      </a:solidFill>
+                      <a:prstDash val="solid"/>
+                      <a:round/>
+                      <a:headEnd type="none" w="med" len="med"/>
+                      <a:tailEnd type="none" w="med" len="med"/>
+                    </a:lnB>
+                    <a:solidFill>
+                      <a:srgbClr val="F8F6F3"/>
+                    </a:solidFill>
+                  </a:tcPr>
+                </a:tc>
+                <a:tc>
+                  <a:txBody>
+                    <a:bodyPr/>
+                    <a:lstStyle/>
+                    <a:p>
+                      <a:pPr indent="0" marL="0">
+                        <a:buNone/>
+                      </a:pPr>
+                      <a:r>
+                        <a:rPr lang="en-US" sz="1200" dirty="0">
+                          <a:solidFill>
+                            <a:srgbClr val="3D3A36"/>
+                          </a:solidFill>
+                          <a:latin typeface="Calibri" pitchFamily="34" charset="0"/>
+                          <a:ea typeface="Calibri" pitchFamily="34" charset="-122"/>
+                          <a:cs typeface="Calibri" pitchFamily="34" charset="-120"/>
+                        </a:rPr>
+                        <a:t>Showing proportions</a:t>
+                      </a:r>
+                      <a:endParaRPr lang="en-US" sz="1200" dirty="0">
+                        <a:latin typeface="Calibri" charset="0"/>
+                        <a:ea typeface="Calibri" charset="0"/>
+                        <a:cs typeface="Calibri" charset="0"/>
+                      </a:endParaRPr>
+                    </a:p>
+                  </a:txBody>
+                  <a:tcPr marL="91440" marR="91440" marT="45720" marB="45720">
+                    <a:lnL w="6350" cap="flat" cmpd="sng" algn="ctr">
+                      <a:solidFill>
+                        <a:srgbClr val="E5E2DC"/>
+                      </a:solidFill>
+                      <a:prstDash val="solid"/>
+                      <a:round/>
+                      <a:headEnd type="none" w="med" len="med"/>
+                      <a:tailEnd type="none" w="med" len="med"/>
+                    </a:lnL>
+                    <a:lnR w="6350" cap="flat" cmpd="sng" algn="ctr">
+                      <a:solidFill>
+                        <a:srgbClr val="E5E2DC"/>
+                      </a:solidFill>
+                      <a:prstDash val="solid"/>
+                      <a:round/>
+                      <a:headEnd type="none" w="med" len="med"/>
+                      <a:tailEnd type="none" w="med" len="med"/>
+                    </a:lnR>
+                    <a:lnT w="6350" cap="flat" cmpd="sng" algn="ctr">
+                      <a:solidFill>
+                        <a:srgbClr val="E5E2DC"/>
+                      </a:solidFill>
+                      <a:prstDash val="solid"/>
+                      <a:round/>
+                      <a:headEnd type="none" w="med" len="med"/>
+                      <a:tailEnd type="none" w="med" len="med"/>
+                    </a:lnT>
+                    <a:lnB w="6350" cap="flat" cmpd="sng" algn="ctr">
+                      <a:solidFill>
+                        <a:srgbClr val="E5E2DC"/>
+                      </a:solidFill>
+                      <a:prstDash val="solid"/>
+                      <a:round/>
+                      <a:headEnd type="none" w="med" len="med"/>
+                      <a:tailEnd type="none" w="med" len="med"/>
+                    </a:lnB>
+                    <a:solidFill>
+                      <a:srgbClr val="F8F6F3"/>
+                    </a:solidFill>
+                  </a:tcPr>
+                </a:tc>
+                <a:tc>
+                  <a:txBody>
+                    <a:bodyPr/>
+                    <a:lstStyle/>
+                    <a:p>
+                      <a:pPr indent="0" marL="0">
+                        <a:buNone/>
+                      </a:pPr>
+                      <a:r>
+                        <a:rPr lang="en-US" sz="1200" dirty="0">
+                          <a:solidFill>
+                            <a:srgbClr val="3D3A36"/>
+                          </a:solidFill>
+                          <a:latin typeface="Calibri" pitchFamily="34" charset="0"/>
+                          <a:ea typeface="Calibri" pitchFamily="34" charset="-122"/>
+                          <a:cs typeface="Calibri" pitchFamily="34" charset="-120"/>
+                        </a:rPr>
+                        <a:t>Sectors add up to 360°</a:t>
+                      </a:r>
+                      <a:endParaRPr lang="en-US" sz="1200" dirty="0">
+                        <a:latin typeface="Calibri" charset="0"/>
+                        <a:ea typeface="Calibri" charset="0"/>
+                        <a:cs typeface="Calibri" charset="0"/>
+                      </a:endParaRPr>
+                    </a:p>
+                  </a:txBody>
+                  <a:tcPr marL="91440" marR="91440" marT="45720" marB="45720">
+                    <a:lnL w="6350" cap="flat" cmpd="sng" algn="ctr">
+                      <a:solidFill>
+                        <a:srgbClr val="E5E2DC"/>
+                      </a:solidFill>
+                      <a:prstDash val="solid"/>
+                      <a:round/>
+                      <a:headEnd type="none" w="med" len="med"/>
+                      <a:tailEnd type="none" w="med" len="med"/>
+                    </a:lnL>
+                    <a:lnR w="6350" cap="flat" cmpd="sng" algn="ctr">
+                      <a:solidFill>
+                        <a:srgbClr val="E5E2DC"/>
+                      </a:solidFill>
+                      <a:prstDash val="solid"/>
+                      <a:round/>
+                      <a:headEnd type="none" w="med" len="med"/>
+                      <a:tailEnd type="none" w="med" len="med"/>
+                    </a:lnR>
+                    <a:lnT w="6350" cap="flat" cmpd="sng" algn="ctr">
+                      <a:solidFill>
+                        <a:srgbClr val="E5E2DC"/>
+                      </a:solidFill>
+                      <a:prstDash val="solid"/>
+                      <a:round/>
+                      <a:headEnd type="none" w="med" len="med"/>
+                      <a:tailEnd type="none" w="med" len="med"/>
+                    </a:lnT>
+                    <a:lnB w="6350" cap="flat" cmpd="sng" algn="ctr">
+                      <a:solidFill>
+                        <a:srgbClr val="E5E2DC"/>
+                      </a:solidFill>
+                      <a:prstDash val="solid"/>
+                      <a:round/>
+                      <a:headEnd type="none" w="med" len="med"/>
+                      <a:tailEnd type="none" w="med" len="med"/>
+                    </a:lnB>
+                    <a:solidFill>
+                      <a:srgbClr val="F8F6F3"/>
+                    </a:solidFill>
+                  </a:tcPr>
+                </a:tc>
+              </a:tr>
+              <a:tr h="502920">
+                <a:tc>
+                  <a:txBody>
+                    <a:bodyPr/>
+                    <a:lstStyle/>
+                    <a:p>
+                      <a:pPr indent="0" marL="0">
+                        <a:buNone/>
+                      </a:pPr>
+                      <a:r>
+                        <a:rPr lang="en-US" sz="1200" dirty="0">
+                          <a:solidFill>
+                            <a:srgbClr val="3D3A36"/>
+                          </a:solidFill>
+                          <a:latin typeface="Calibri" pitchFamily="34" charset="0"/>
+                          <a:ea typeface="Calibri" pitchFamily="34" charset="-122"/>
+                          <a:cs typeface="Calibri" pitchFamily="34" charset="-120"/>
+                        </a:rPr>
+                        <a:t>Pictogram</a:t>
+                      </a:r>
+                      <a:endParaRPr lang="en-US" sz="1200" dirty="0">
+                        <a:latin typeface="Calibri" charset="0"/>
+                        <a:ea typeface="Calibri" charset="0"/>
+                        <a:cs typeface="Calibri" charset="0"/>
+                      </a:endParaRPr>
+                    </a:p>
+                  </a:txBody>
+                  <a:tcPr marL="91440" marR="91440" marT="45720" marB="45720">
+                    <a:lnL w="6350" cap="flat" cmpd="sng" algn="ctr">
+                      <a:solidFill>
+                        <a:srgbClr val="E5E2DC"/>
+                      </a:solidFill>
+                      <a:prstDash val="solid"/>
+                      <a:round/>
+                      <a:headEnd type="none" w="med" len="med"/>
+                      <a:tailEnd type="none" w="med" len="med"/>
+                    </a:lnL>
+                    <a:lnR w="6350" cap="flat" cmpd="sng" algn="ctr">
+                      <a:solidFill>
+                        <a:srgbClr val="E5E2DC"/>
+                      </a:solidFill>
+                      <a:prstDash val="solid"/>
+                      <a:round/>
+                      <a:headEnd type="none" w="med" len="med"/>
+                      <a:tailEnd type="none" w="med" len="med"/>
+                    </a:lnR>
+                    <a:lnT w="6350" cap="flat" cmpd="sng" algn="ctr">
+                      <a:solidFill>
+                        <a:srgbClr val="E5E2DC"/>
+                      </a:solidFill>
+                      <a:prstDash val="solid"/>
+                      <a:round/>
+                      <a:headEnd type="none" w="med" len="med"/>
+                      <a:tailEnd type="none" w="med" len="med"/>
+                    </a:lnT>
+                    <a:lnB w="6350" cap="flat" cmpd="sng" algn="ctr">
+                      <a:solidFill>
+                        <a:srgbClr val="E5E2DC"/>
+                      </a:solidFill>
+                      <a:prstDash val="solid"/>
+                      <a:round/>
+                      <a:headEnd type="none" w="med" len="med"/>
+                      <a:tailEnd type="none" w="med" len="med"/>
+                    </a:lnB>
+                    <a:solidFill>
+                      <a:srgbClr val="FFFFFF"/>
+                    </a:solidFill>
+                  </a:tcPr>
+                </a:tc>
+                <a:tc>
+                  <a:txBody>
+                    <a:bodyPr/>
+                    <a:lstStyle/>
+                    <a:p>
+                      <a:pPr indent="0" marL="0">
+                        <a:buNone/>
+                      </a:pPr>
+                      <a:r>
+                        <a:rPr lang="en-US" sz="1200" dirty="0">
+                          <a:solidFill>
+                            <a:srgbClr val="3D3A36"/>
+                          </a:solidFill>
+                          <a:latin typeface="Calibri" pitchFamily="34" charset="0"/>
+                          <a:ea typeface="Calibri" pitchFamily="34" charset="-122"/>
+                          <a:cs typeface="Calibri" pitchFamily="34" charset="-120"/>
+                        </a:rPr>
+                        <a:t>Simple comparisons</a:t>
+                      </a:r>
+                      <a:endParaRPr lang="en-US" sz="1200" dirty="0">
+                        <a:latin typeface="Calibri" charset="0"/>
+                        <a:ea typeface="Calibri" charset="0"/>
+                        <a:cs typeface="Calibri" charset="0"/>
+                      </a:endParaRPr>
+                    </a:p>
+                  </a:txBody>
+                  <a:tcPr marL="91440" marR="91440" marT="45720" marB="45720">
+                    <a:lnL w="6350" cap="flat" cmpd="sng" algn="ctr">
+                      <a:solidFill>
+                        <a:srgbClr val="E5E2DC"/>
+                      </a:solidFill>
+                      <a:prstDash val="solid"/>
+                      <a:round/>
+                      <a:headEnd type="none" w="med" len="med"/>
+                      <a:tailEnd type="none" w="med" len="med"/>
+                    </a:lnL>
+                    <a:lnR w="6350" cap="flat" cmpd="sng" algn="ctr">
+                      <a:solidFill>
+                        <a:srgbClr val="E5E2DC"/>
+                      </a:solidFill>
+                      <a:prstDash val="solid"/>
+                      <a:round/>
+                      <a:headEnd type="none" w="med" len="med"/>
+                      <a:tailEnd type="none" w="med" len="med"/>
+                    </a:lnR>
+                    <a:lnT w="6350" cap="flat" cmpd="sng" algn="ctr">
+                      <a:solidFill>
+                        <a:srgbClr val="E5E2DC"/>
+                      </a:solidFill>
+                      <a:prstDash val="solid"/>
+                      <a:round/>
+                      <a:headEnd type="none" w="med" len="med"/>
+                      <a:tailEnd type="none" w="med" len="med"/>
+                    </a:lnT>
+                    <a:lnB w="6350" cap="flat" cmpd="sng" algn="ctr">
+                      <a:solidFill>
+                        <a:srgbClr val="E5E2DC"/>
+                      </a:solidFill>
+                      <a:prstDash val="solid"/>
+                      <a:round/>
+                      <a:headEnd type="none" w="med" len="med"/>
+                      <a:tailEnd type="none" w="med" len="med"/>
+                    </a:lnB>
+                    <a:solidFill>
+                      <a:srgbClr val="FFFFFF"/>
+                    </a:solidFill>
+                  </a:tcPr>
+                </a:tc>
+                <a:tc>
+                  <a:txBody>
+                    <a:bodyPr/>
+                    <a:lstStyle/>
+                    <a:p>
+                      <a:pPr indent="0" marL="0">
+                        <a:buNone/>
+                      </a:pPr>
+                      <a:r>
+                        <a:rPr lang="en-US" sz="1200" dirty="0">
+                          <a:solidFill>
+                            <a:srgbClr val="3D3A36"/>
+                          </a:solidFill>
+                          <a:latin typeface="Calibri" pitchFamily="34" charset="0"/>
+                          <a:ea typeface="Calibri" pitchFamily="34" charset="-122"/>
+                          <a:cs typeface="Calibri" pitchFamily="34" charset="-120"/>
+                        </a:rPr>
+                        <a:t>Each symbol = a set number</a:t>
+                      </a:r>
+                      <a:endParaRPr lang="en-US" sz="1200" dirty="0">
+                        <a:latin typeface="Calibri" charset="0"/>
+                        <a:ea typeface="Calibri" charset="0"/>
+                        <a:cs typeface="Calibri" charset="0"/>
+                      </a:endParaRPr>
+                    </a:p>
+                  </a:txBody>
+                  <a:tcPr marL="91440" marR="91440" marT="45720" marB="45720">
+                    <a:lnL w="6350" cap="flat" cmpd="sng" algn="ctr">
+                      <a:solidFill>
+                        <a:srgbClr val="E5E2DC"/>
+                      </a:solidFill>
+                      <a:prstDash val="solid"/>
+                      <a:round/>
+                      <a:headEnd type="none" w="med" len="med"/>
+                      <a:tailEnd type="none" w="med" len="med"/>
+                    </a:lnL>
+                    <a:lnR w="6350" cap="flat" cmpd="sng" algn="ctr">
+                      <a:solidFill>
+                        <a:srgbClr val="E5E2DC"/>
+                      </a:solidFill>
+                      <a:prstDash val="solid"/>
+                      <a:round/>
+                      <a:headEnd type="none" w="med" len="med"/>
+                      <a:tailEnd type="none" w="med" len="med"/>
+                    </a:lnR>
+                    <a:lnT w="6350" cap="flat" cmpd="sng" algn="ctr">
+                      <a:solidFill>
+                        <a:srgbClr val="E5E2DC"/>
+                      </a:solidFill>
+                      <a:prstDash val="solid"/>
+                      <a:round/>
+                      <a:headEnd type="none" w="med" len="med"/>
+                      <a:tailEnd type="none" w="med" len="med"/>
+                    </a:lnT>
+                    <a:lnB w="6350" cap="flat" cmpd="sng" algn="ctr">
+                      <a:solidFill>
+                        <a:srgbClr val="E5E2DC"/>
+                      </a:solidFill>
+                      <a:prstDash val="solid"/>
+                      <a:round/>
+                      <a:headEnd type="none" w="med" len="med"/>
+                      <a:tailEnd type="none" w="med" len="med"/>
+                    </a:lnB>
+                    <a:solidFill>
+                      <a:srgbClr val="FFFFFF"/>
+                    </a:solidFill>
+                  </a:tcPr>
+                </a:tc>
+              </a:tr>
+              <a:tr h="502920">
+                <a:tc>
+                  <a:txBody>
+                    <a:bodyPr/>
+                    <a:lstStyle/>
+                    <a:p>
+                      <a:pPr indent="0" marL="0">
+                        <a:buNone/>
+                      </a:pPr>
+                      <a:r>
+                        <a:rPr lang="en-US" sz="1200" dirty="0">
+                          <a:solidFill>
+                            <a:srgbClr val="3D3A36"/>
+                          </a:solidFill>
+                          <a:latin typeface="Calibri" pitchFamily="34" charset="0"/>
+                          <a:ea typeface="Calibri" pitchFamily="34" charset="-122"/>
+                          <a:cs typeface="Calibri" pitchFamily="34" charset="-120"/>
+                        </a:rPr>
+                        <a:t>Line graph</a:t>
+                      </a:r>
+                      <a:endParaRPr lang="en-US" sz="1200" dirty="0">
+                        <a:latin typeface="Calibri" charset="0"/>
+                        <a:ea typeface="Calibri" charset="0"/>
+                        <a:cs typeface="Calibri" charset="0"/>
+                      </a:endParaRPr>
+                    </a:p>
+                  </a:txBody>
+                  <a:tcPr marL="91440" marR="91440" marT="45720" marB="45720">
+                    <a:lnL w="6350" cap="flat" cmpd="sng" algn="ctr">
+                      <a:solidFill>
+                        <a:srgbClr val="E5E2DC"/>
+                      </a:solidFill>
+                      <a:prstDash val="solid"/>
+                      <a:round/>
+                      <a:headEnd type="none" w="med" len="med"/>
+                      <a:tailEnd type="none" w="med" len="med"/>
+                    </a:lnL>
+                    <a:lnR w="6350" cap="flat" cmpd="sng" algn="ctr">
+                      <a:solidFill>
+                        <a:srgbClr val="E5E2DC"/>
+                      </a:solidFill>
+                      <a:prstDash val="solid"/>
+                      <a:round/>
+                      <a:headEnd type="none" w="med" len="med"/>
+                      <a:tailEnd type="none" w="med" len="med"/>
+                    </a:lnR>
+                    <a:lnT w="6350" cap="flat" cmpd="sng" algn="ctr">
+                      <a:solidFill>
+                        <a:srgbClr val="E5E2DC"/>
+                      </a:solidFill>
+                      <a:prstDash val="solid"/>
+                      <a:round/>
+                      <a:headEnd type="none" w="med" len="med"/>
+                      <a:tailEnd type="none" w="med" len="med"/>
+                    </a:lnT>
+                    <a:lnB w="6350" cap="flat" cmpd="sng" algn="ctr">
+                      <a:solidFill>
+                        <a:srgbClr val="E5E2DC"/>
+                      </a:solidFill>
+                      <a:prstDash val="solid"/>
+                      <a:round/>
+                      <a:headEnd type="none" w="med" len="med"/>
+                      <a:tailEnd type="none" w="med" len="med"/>
+                    </a:lnB>
+                    <a:solidFill>
+                      <a:srgbClr val="F8F6F3"/>
+                    </a:solidFill>
+                  </a:tcPr>
+                </a:tc>
+                <a:tc>
+                  <a:txBody>
+                    <a:bodyPr/>
+                    <a:lstStyle/>
+                    <a:p>
+                      <a:pPr indent="0" marL="0">
+                        <a:buNone/>
+                      </a:pPr>
+                      <a:r>
+                        <a:rPr lang="en-US" sz="1200" dirty="0">
+                          <a:solidFill>
+                            <a:srgbClr val="3D3A36"/>
+                          </a:solidFill>
+                          <a:latin typeface="Calibri" pitchFamily="34" charset="0"/>
+                          <a:ea typeface="Calibri" pitchFamily="34" charset="-122"/>
+                          <a:cs typeface="Calibri" pitchFamily="34" charset="-120"/>
+                        </a:rPr>
+                        <a:t>Changes over time</a:t>
+                      </a:r>
+                      <a:endParaRPr lang="en-US" sz="1200" dirty="0">
+                        <a:latin typeface="Calibri" charset="0"/>
+                        <a:ea typeface="Calibri" charset="0"/>
+                        <a:cs typeface="Calibri" charset="0"/>
+                      </a:endParaRPr>
+                    </a:p>
+                  </a:txBody>
+                  <a:tcPr marL="91440" marR="91440" marT="45720" marB="45720">
+                    <a:lnL w="6350" cap="flat" cmpd="sng" algn="ctr">
+                      <a:solidFill>
+                        <a:srgbClr val="E5E2DC"/>
+                      </a:solidFill>
+                      <a:prstDash val="solid"/>
+                      <a:round/>
+                      <a:headEnd type="none" w="med" len="med"/>
+                      <a:tailEnd type="none" w="med" len="med"/>
+                    </a:lnL>
+                    <a:lnR w="6350" cap="flat" cmpd="sng" algn="ctr">
+                      <a:solidFill>
+                        <a:srgbClr val="E5E2DC"/>
+                      </a:solidFill>
+                      <a:prstDash val="solid"/>
+                      <a:round/>
+                      <a:headEnd type="none" w="med" len="med"/>
+                      <a:tailEnd type="none" w="med" len="med"/>
+                    </a:lnR>
+                    <a:lnT w="6350" cap="flat" cmpd="sng" algn="ctr">
+                      <a:solidFill>
+                        <a:srgbClr val="E5E2DC"/>
+                      </a:solidFill>
+                      <a:prstDash val="solid"/>
+                      <a:round/>
+                      <a:headEnd type="none" w="med" len="med"/>
+                      <a:tailEnd type="none" w="med" len="med"/>
+                    </a:lnT>
+                    <a:lnB w="6350" cap="flat" cmpd="sng" algn="ctr">
+                      <a:solidFill>
+                        <a:srgbClr val="E5E2DC"/>
+                      </a:solidFill>
+                      <a:prstDash val="solid"/>
+                      <a:round/>
+                      <a:headEnd type="none" w="med" len="med"/>
+                      <a:tailEnd type="none" w="med" len="med"/>
+                    </a:lnB>
+                    <a:solidFill>
+                      <a:srgbClr val="F8F6F3"/>
+                    </a:solidFill>
+                  </a:tcPr>
+                </a:tc>
+                <a:tc>
+                  <a:txBody>
+                    <a:bodyPr/>
+                    <a:lstStyle/>
+                    <a:p>
+                      <a:pPr indent="0" marL="0">
+                        <a:buNone/>
+                      </a:pPr>
+                      <a:r>
+                        <a:rPr lang="en-US" sz="1200" dirty="0">
+                          <a:solidFill>
+                            <a:srgbClr val="3D3A36"/>
+                          </a:solidFill>
+                          <a:latin typeface="Calibri" pitchFamily="34" charset="0"/>
+                          <a:ea typeface="Calibri" pitchFamily="34" charset="-122"/>
+                          <a:cs typeface="Calibri" pitchFamily="34" charset="-120"/>
+                        </a:rPr>
+                        <a:t>Points connected by lines</a:t>
+                      </a:r>
+                      <a:endParaRPr lang="en-US" sz="1200" dirty="0">
+                        <a:latin typeface="Calibri" charset="0"/>
+                        <a:ea typeface="Calibri" charset="0"/>
+                        <a:cs typeface="Calibri" charset="0"/>
+                      </a:endParaRPr>
+                    </a:p>
+                  </a:txBody>
+                  <a:tcPr marL="91440" marR="91440" marT="45720" marB="45720">
+                    <a:lnL w="6350" cap="flat" cmpd="sng" algn="ctr">
+                      <a:solidFill>
+                        <a:srgbClr val="E5E2DC"/>
+                      </a:solidFill>
+                      <a:prstDash val="solid"/>
+                      <a:round/>
+                      <a:headEnd type="none" w="med" len="med"/>
+                      <a:tailEnd type="none" w="med" len="med"/>
+                    </a:lnL>
+                    <a:lnR w="6350" cap="flat" cmpd="sng" algn="ctr">
+                      <a:solidFill>
+                        <a:srgbClr val="E5E2DC"/>
+                      </a:solidFill>
+                      <a:prstDash val="solid"/>
+                      <a:round/>
+                      <a:headEnd type="none" w="med" len="med"/>
+                      <a:tailEnd type="none" w="med" len="med"/>
+                    </a:lnR>
+                    <a:lnT w="6350" cap="flat" cmpd="sng" algn="ctr">
+                      <a:solidFill>
+                        <a:srgbClr val="E5E2DC"/>
+                      </a:solidFill>
+                      <a:prstDash val="solid"/>
+                      <a:round/>
+                      <a:headEnd type="none" w="med" len="med"/>
+                      <a:tailEnd type="none" w="med" len="med"/>
+                    </a:lnT>
+                    <a:lnB w="6350" cap="flat" cmpd="sng" algn="ctr">
+                      <a:solidFill>
+                        <a:srgbClr val="E5E2DC"/>
+                      </a:solidFill>
+                      <a:prstDash val="solid"/>
+                      <a:round/>
+                      <a:headEnd type="none" w="med" len="med"/>
+                      <a:tailEnd type="none" w="med" len="med"/>
+                    </a:lnB>
+                    <a:solidFill>
+                      <a:srgbClr val="F8F6F3"/>
+                    </a:solidFill>
+                  </a:tcPr>
+                </a:tc>
+              </a:tr>
+              <a:tr h="502920">
+                <a:tc>
+                  <a:txBody>
+                    <a:bodyPr/>
+                    <a:lstStyle/>
+                    <a:p>
+                      <a:pPr indent="0" marL="0">
+                        <a:buNone/>
+                      </a:pPr>
+                      <a:r>
+                        <a:rPr lang="en-US" sz="1200" dirty="0">
+                          <a:solidFill>
+                            <a:srgbClr val="3D3A36"/>
+                          </a:solidFill>
+                          <a:latin typeface="Calibri" pitchFamily="34" charset="0"/>
+                          <a:ea typeface="Calibri" pitchFamily="34" charset="-122"/>
+                          <a:cs typeface="Calibri" pitchFamily="34" charset="-120"/>
+                        </a:rPr>
+                        <a:t>Scatter graph</a:t>
+                      </a:r>
+                      <a:endParaRPr lang="en-US" sz="1200" dirty="0">
+                        <a:latin typeface="Calibri" charset="0"/>
+                        <a:ea typeface="Calibri" charset="0"/>
+                        <a:cs typeface="Calibri" charset="0"/>
+                      </a:endParaRPr>
+                    </a:p>
+                  </a:txBody>
+                  <a:tcPr marL="91440" marR="91440" marT="45720" marB="45720">
+                    <a:lnL w="6350" cap="flat" cmpd="sng" algn="ctr">
+                      <a:solidFill>
+                        <a:srgbClr val="E5E2DC"/>
+                      </a:solidFill>
+                      <a:prstDash val="solid"/>
+                      <a:round/>
+                      <a:headEnd type="none" w="med" len="med"/>
+                      <a:tailEnd type="none" w="med" len="med"/>
+                    </a:lnL>
+                    <a:lnR w="6350" cap="flat" cmpd="sng" algn="ctr">
+                      <a:solidFill>
+                        <a:srgbClr val="E5E2DC"/>
+                      </a:solidFill>
+                      <a:prstDash val="solid"/>
+                      <a:round/>
+                      <a:headEnd type="none" w="med" len="med"/>
+                      <a:tailEnd type="none" w="med" len="med"/>
+                    </a:lnR>
+                    <a:lnT w="6350" cap="flat" cmpd="sng" algn="ctr">
+                      <a:solidFill>
+                        <a:srgbClr val="E5E2DC"/>
+                      </a:solidFill>
+                      <a:prstDash val="solid"/>
+                      <a:round/>
+                      <a:headEnd type="none" w="med" len="med"/>
+                      <a:tailEnd type="none" w="med" len="med"/>
+                    </a:lnT>
+                    <a:lnB w="6350" cap="flat" cmpd="sng" algn="ctr">
+                      <a:solidFill>
+                        <a:srgbClr val="E5E2DC"/>
+                      </a:solidFill>
+                      <a:prstDash val="solid"/>
+                      <a:round/>
+                      <a:headEnd type="none" w="med" len="med"/>
+                      <a:tailEnd type="none" w="med" len="med"/>
+                    </a:lnB>
+                    <a:solidFill>
+                      <a:srgbClr val="FFFFFF"/>
+                    </a:solidFill>
+                  </a:tcPr>
+                </a:tc>
+                <a:tc>
+                  <a:txBody>
+                    <a:bodyPr/>
+                    <a:lstStyle/>
+                    <a:p>
+                      <a:pPr indent="0" marL="0">
+                        <a:buNone/>
+                      </a:pPr>
+                      <a:r>
+                        <a:rPr lang="en-US" sz="1200" dirty="0">
+                          <a:solidFill>
+                            <a:srgbClr val="3D3A36"/>
+                          </a:solidFill>
+                          <a:latin typeface="Calibri" pitchFamily="34" charset="0"/>
+                          <a:ea typeface="Calibri" pitchFamily="34" charset="-122"/>
+                          <a:cs typeface="Calibri" pitchFamily="34" charset="-120"/>
+                        </a:rPr>
+                        <a:t>Showing relationships</a:t>
+                      </a:r>
+                      <a:endParaRPr lang="en-US" sz="1200" dirty="0">
+                        <a:latin typeface="Calibri" charset="0"/>
+                        <a:ea typeface="Calibri" charset="0"/>
+                        <a:cs typeface="Calibri" charset="0"/>
+                      </a:endParaRPr>
+                    </a:p>
+                  </a:txBody>
+                  <a:tcPr marL="91440" marR="91440" marT="45720" marB="45720">
+                    <a:lnL w="6350" cap="flat" cmpd="sng" algn="ctr">
+                      <a:solidFill>
+                        <a:srgbClr val="E5E2DC"/>
+                      </a:solidFill>
+                      <a:prstDash val="solid"/>
+                      <a:round/>
+                      <a:headEnd type="none" w="med" len="med"/>
+                      <a:tailEnd type="none" w="med" len="med"/>
+                    </a:lnL>
+                    <a:lnR w="6350" cap="flat" cmpd="sng" algn="ctr">
+                      <a:solidFill>
+                        <a:srgbClr val="E5E2DC"/>
+                      </a:solidFill>
+                      <a:prstDash val="solid"/>
+                      <a:round/>
+                      <a:headEnd type="none" w="med" len="med"/>
+                      <a:tailEnd type="none" w="med" len="med"/>
+                    </a:lnR>
+                    <a:lnT w="6350" cap="flat" cmpd="sng" algn="ctr">
+                      <a:solidFill>
+                        <a:srgbClr val="E5E2DC"/>
+                      </a:solidFill>
+                      <a:prstDash val="solid"/>
+                      <a:round/>
+                      <a:headEnd type="none" w="med" len="med"/>
+                      <a:tailEnd type="none" w="med" len="med"/>
+                    </a:lnT>
+                    <a:lnB w="6350" cap="flat" cmpd="sng" algn="ctr">
+                      <a:solidFill>
+                        <a:srgbClr val="E5E2DC"/>
+                      </a:solidFill>
+                      <a:prstDash val="solid"/>
+                      <a:round/>
+                      <a:headEnd type="none" w="med" len="med"/>
+                      <a:tailEnd type="none" w="med" len="med"/>
+                    </a:lnB>
+                    <a:solidFill>
+                      <a:srgbClr val="FFFFFF"/>
+                    </a:solidFill>
+                  </a:tcPr>
+                </a:tc>
+                <a:tc>
+                  <a:txBody>
+                    <a:bodyPr/>
+                    <a:lstStyle/>
+                    <a:p>
+                      <a:pPr indent="0" marL="0">
+                        <a:buNone/>
+                      </a:pPr>
+                      <a:r>
+                        <a:rPr lang="en-US" sz="1200" dirty="0">
+                          <a:solidFill>
+                            <a:srgbClr val="3D3A36"/>
+                          </a:solidFill>
+                          <a:latin typeface="Calibri" pitchFamily="34" charset="0"/>
+                          <a:ea typeface="Calibri" pitchFamily="34" charset="-122"/>
+                          <a:cs typeface="Calibri" pitchFamily="34" charset="-120"/>
+                        </a:rPr>
+                        <a:t>Looking for correlation</a:t>
+                      </a:r>
+                      <a:endParaRPr lang="en-US" sz="1200" dirty="0">
+                        <a:latin typeface="Calibri" charset="0"/>
+                        <a:ea typeface="Calibri" charset="0"/>
+                        <a:cs typeface="Calibri" charset="0"/>
+                      </a:endParaRPr>
+                    </a:p>
+                  </a:txBody>
+                  <a:tcPr marL="91440" marR="91440" marT="45720" marB="45720">
+                    <a:lnL w="6350" cap="flat" cmpd="sng" algn="ctr">
+                      <a:solidFill>
+                        <a:srgbClr val="E5E2DC"/>
+                      </a:solidFill>
+                      <a:prstDash val="solid"/>
+                      <a:round/>
+                      <a:headEnd type="none" w="med" len="med"/>
+                      <a:tailEnd type="none" w="med" len="med"/>
+                    </a:lnL>
+                    <a:lnR w="6350" cap="flat" cmpd="sng" algn="ctr">
+                      <a:solidFill>
+                        <a:srgbClr val="E5E2DC"/>
+                      </a:solidFill>
+                      <a:prstDash val="solid"/>
+                      <a:round/>
+                      <a:headEnd type="none" w="med" len="med"/>
+                      <a:tailEnd type="none" w="med" len="med"/>
+                    </a:lnR>
+                    <a:lnT w="6350" cap="flat" cmpd="sng" algn="ctr">
+                      <a:solidFill>
+                        <a:srgbClr val="E5E2DC"/>
+                      </a:solidFill>
+                      <a:prstDash val="solid"/>
+                      <a:round/>
+                      <a:headEnd type="none" w="med" len="med"/>
+                      <a:tailEnd type="none" w="med" len="med"/>
+                    </a:lnT>
+                    <a:lnB w="6350" cap="flat" cmpd="sng" algn="ctr">
+                      <a:solidFill>
+                        <a:srgbClr val="E5E2DC"/>
+                      </a:solidFill>
+                      <a:prstDash val="solid"/>
+                      <a:round/>
+                      <a:headEnd type="none" w="med" len="med"/>
+                      <a:tailEnd type="none" w="med" len="med"/>
+                    </a:lnB>
+                    <a:solidFill>
+                      <a:srgbClr val="FFFFFF"/>
+                    </a:solidFill>
+                  </a:tcPr>
+                </a:tc>
+              </a:tr>
+            </a:tbl>
+          </a:graphicData>
+        </a:graphic>
+      </p:graphicFrame>
     </p:spTree>
   </p:cSld>
   <p:clrMapOvr>
@@ -2175,7 +3940,47 @@
         <p:spPr>
           <a:xfrm>
             <a:off x="0" y="0"/>
-            <a:ext cx="9144000" cy="54864"/>
+            <a:ext cx="9144000" cy="822960"/>
+          </a:xfrm>
+          <a:prstGeom prst="rect">
+            <a:avLst/>
+          </a:prstGeom>
+          <a:solidFill>
+            <a:srgbClr val="FFFFFF"/>
+          </a:solidFill>
+          <a:ln/>
+        </p:spPr>
+      </p:sp>
+      <p:sp>
+        <p:nvSpPr>
+          <p:cNvPr id="3" name="Shape 1"/>
+          <p:cNvSpPr/>
+          <p:nvPr/>
+        </p:nvSpPr>
+        <p:spPr>
+          <a:xfrm>
+            <a:off x="0" y="804672"/>
+            <a:ext cx="9144000" cy="27432"/>
+          </a:xfrm>
+          <a:prstGeom prst="rect">
+            <a:avLst/>
+          </a:prstGeom>
+          <a:solidFill>
+            <a:srgbClr val="E5E2DC"/>
+          </a:solidFill>
+          <a:ln/>
+        </p:spPr>
+      </p:sp>
+      <p:sp>
+        <p:nvSpPr>
+          <p:cNvPr id="4" name="Shape 2"/>
+          <p:cNvSpPr/>
+          <p:nvPr/>
+        </p:nvSpPr>
+        <p:spPr>
+          <a:xfrm>
+            <a:off x="548640" y="201168"/>
+            <a:ext cx="54864" cy="420624"/>
           </a:xfrm>
           <a:prstGeom prst="rect">
             <a:avLst/>
@@ -2188,14 +3993,14 @@
       </p:sp>
       <p:sp>
         <p:nvSpPr>
-          <p:cNvPr id="3" name="Text 1"/>
-          <p:cNvSpPr/>
-          <p:nvPr/>
-        </p:nvSpPr>
-        <p:spPr>
-          <a:xfrm>
-            <a:off x="7772400" y="4709160"/>
-            <a:ext cx="1097280" cy="320040"/>
+          <p:cNvPr id="5" name="Text 3"/>
+          <p:cNvSpPr/>
+          <p:nvPr/>
+        </p:nvSpPr>
+        <p:spPr>
+          <a:xfrm>
+            <a:off x="777240" y="137160"/>
+            <a:ext cx="7772400" cy="548640"/>
           </a:xfrm>
           <a:prstGeom prst="rect">
             <a:avLst/>
@@ -2204,53 +4009,14 @@
           <a:ln/>
         </p:spPr>
         <p:txBody>
-          <a:bodyPr wrap="square" rtlCol="0" anchor="ctr"/>
-          <a:lstStyle/>
-          <a:p>
-            <a:pPr algn="r" indent="0" marL="0">
-              <a:buNone/>
-            </a:pPr>
-            <a:r>
-              <a:rPr lang="en-US" sz="900" dirty="0">
-                <a:solidFill>
-                  <a:srgbClr val="6B6660"/>
-                </a:solidFill>
-                <a:latin typeface="Calibri" pitchFamily="34" charset="0"/>
-                <a:ea typeface="Calibri" pitchFamily="34" charset="-122"/>
-                <a:cs typeface="Calibri" pitchFamily="34" charset="-120"/>
-              </a:rPr>
-              <a:t>4 / 5</a:t>
-            </a:r>
-            <a:endParaRPr lang="en-US" sz="900" dirty="0"/>
-          </a:p>
-        </p:txBody>
-      </p:sp>
-      <p:sp>
-        <p:nvSpPr>
-          <p:cNvPr id="4" name="Text 2"/>
-          <p:cNvSpPr/>
-          <p:nvPr/>
-        </p:nvSpPr>
-        <p:spPr>
-          <a:xfrm>
-            <a:off x="457200" y="274320"/>
-            <a:ext cx="8229600" cy="640080"/>
-          </a:xfrm>
-          <a:prstGeom prst="rect">
-            <a:avLst/>
-          </a:prstGeom>
-          <a:noFill/>
-          <a:ln/>
-        </p:spPr>
-        <p:txBody>
-          <a:bodyPr wrap="square" rtlCol="0" anchor="ctr"/>
+          <a:bodyPr wrap="square" lIns="0" tIns="0" rIns="0" bIns="0" rtlCol="0" anchor="ctr"/>
           <a:lstStyle/>
           <a:p>
             <a:pPr indent="0" marL="0">
               <a:buNone/>
             </a:pPr>
             <a:r>
-              <a:rPr lang="en-US" sz="2600" b="1" dirty="0">
+              <a:rPr lang="en-US" sz="2000" b="1" dirty="0">
                 <a:solidFill>
                   <a:srgbClr val="1B2A4A"/>
                 </a:solidFill>
@@ -2258,22 +4024,22 @@
                 <a:ea typeface="Georgia" pitchFamily="34" charset="-122"/>
                 <a:cs typeface="Georgia" pitchFamily="34" charset="-120"/>
               </a:rPr>
-              <a:t>Drawing Charts Well</a:t>
-            </a:r>
-            <a:endParaRPr lang="en-US" sz="2600" dirty="0"/>
+              <a:t>Drawing Charts — Golden Rules</a:t>
+            </a:r>
+            <a:endParaRPr lang="en-US" sz="2000" dirty="0"/>
           </a:p>
         </p:txBody>
       </p:sp>
       <p:sp>
         <p:nvSpPr>
-          <p:cNvPr id="5" name="Text 3"/>
-          <p:cNvSpPr/>
-          <p:nvPr/>
-        </p:nvSpPr>
-        <p:spPr>
-          <a:xfrm>
-            <a:off x="457200" y="1188720"/>
-            <a:ext cx="3840480" cy="3474720"/>
+          <p:cNvPr id="6" name="Text 4"/>
+          <p:cNvSpPr/>
+          <p:nvPr/>
+        </p:nvSpPr>
+        <p:spPr>
+          <a:xfrm>
+            <a:off x="731520" y="1051560"/>
+            <a:ext cx="7680960" cy="3108960"/>
           </a:xfrm>
           <a:prstGeom prst="rect">
             <a:avLst/>
@@ -2287,13 +4053,13 @@
           <a:p>
             <a:pPr marL="342900" indent="-342900">
               <a:spcAft>
-                <a:spcPts val="600"/>
+                <a:spcPts val="800"/>
               </a:spcAft>
               <a:buSzPct val="100000"/>
               <a:buChar char="•"/>
             </a:pPr>
             <a:r>
-              <a:rPr lang="en-US" sz="1400" dirty="0">
+              <a:rPr lang="en-US" sz="1500" dirty="0">
                 <a:solidFill>
                   <a:srgbClr val="3D3A36"/>
                 </a:solidFill>
@@ -2301,20 +4067,20 @@
                 <a:ea typeface="Calibri" pitchFamily="34" charset="-122"/>
                 <a:cs typeface="Calibri" pitchFamily="34" charset="-120"/>
               </a:rPr>
-              <a:t>Title: describes what the chart shows</a:t>
-            </a:r>
-            <a:endParaRPr lang="en-US" sz="1400" dirty="0"/>
+              <a:t>Always give your chart a clear TITLE.</a:t>
+            </a:r>
+            <a:endParaRPr lang="en-US" sz="1500" dirty="0"/>
           </a:p>
           <a:p>
             <a:pPr marL="342900" indent="-342900">
               <a:spcAft>
-                <a:spcPts val="600"/>
+                <a:spcPts val="800"/>
               </a:spcAft>
               <a:buSzPct val="100000"/>
               <a:buChar char="•"/>
             </a:pPr>
             <a:r>
-              <a:rPr lang="en-US" sz="1400" dirty="0">
+              <a:rPr lang="en-US" sz="1500" dirty="0">
                 <a:solidFill>
                   <a:srgbClr val="3D3A36"/>
                 </a:solidFill>
@@ -2322,20 +4088,20 @@
                 <a:ea typeface="Calibri" pitchFamily="34" charset="-122"/>
                 <a:cs typeface="Calibri" pitchFamily="34" charset="-120"/>
               </a:rPr>
-              <a:t>Axes: labelled with variable name AND unit</a:t>
-            </a:r>
-            <a:endParaRPr lang="en-US" sz="1400" dirty="0"/>
+              <a:t>Label both axes with the variable name AND unit.</a:t>
+            </a:r>
+            <a:endParaRPr lang="en-US" sz="1500" dirty="0"/>
           </a:p>
           <a:p>
             <a:pPr marL="342900" indent="-342900">
               <a:spcAft>
-                <a:spcPts val="600"/>
+                <a:spcPts val="800"/>
               </a:spcAft>
               <a:buSzPct val="100000"/>
               <a:buChar char="•"/>
             </a:pPr>
             <a:r>
-              <a:rPr lang="en-US" sz="1400" dirty="0">
+              <a:rPr lang="en-US" sz="1500" dirty="0">
                 <a:solidFill>
                   <a:srgbClr val="3D3A36"/>
                 </a:solidFill>
@@ -2343,20 +4109,20 @@
                 <a:ea typeface="Calibri" pitchFamily="34" charset="-122"/>
                 <a:cs typeface="Calibri" pitchFamily="34" charset="-120"/>
               </a:rPr>
-              <a:t>Scale: even intervals, uses most of the space</a:t>
-            </a:r>
-            <a:endParaRPr lang="en-US" sz="1400" dirty="0"/>
+              <a:t>Choose a sensible SCALE — use even numbers, fill the space.</a:t>
+            </a:r>
+            <a:endParaRPr lang="en-US" sz="1500" dirty="0"/>
           </a:p>
           <a:p>
             <a:pPr marL="342900" indent="-342900">
               <a:spcAft>
-                <a:spcPts val="600"/>
+                <a:spcPts val="800"/>
               </a:spcAft>
               <a:buSzPct val="100000"/>
               <a:buChar char="•"/>
             </a:pPr>
             <a:r>
-              <a:rPr lang="en-US" sz="1400" dirty="0">
+              <a:rPr lang="en-US" sz="1500" dirty="0">
                 <a:solidFill>
                   <a:srgbClr val="3D3A36"/>
                 </a:solidFill>
@@ -2364,20 +4130,20 @@
                 <a:ea typeface="Calibri" pitchFamily="34" charset="-122"/>
                 <a:cs typeface="Calibri" pitchFamily="34" charset="-120"/>
               </a:rPr>
-              <a:t>Bars: equal width, equal gaps, don't touch</a:t>
-            </a:r>
-            <a:endParaRPr lang="en-US" sz="1400" dirty="0"/>
+              <a:t>Bar charts: bars should be equal width with equal gaps.</a:t>
+            </a:r>
+            <a:endParaRPr lang="en-US" sz="1500" dirty="0"/>
           </a:p>
           <a:p>
             <a:pPr marL="342900" indent="-342900">
               <a:spcAft>
-                <a:spcPts val="600"/>
+                <a:spcPts val="800"/>
               </a:spcAft>
               <a:buSzPct val="100000"/>
               <a:buChar char="•"/>
             </a:pPr>
             <a:r>
-              <a:rPr lang="en-US" sz="1400" dirty="0">
+              <a:rPr lang="en-US" sz="1500" dirty="0">
                 <a:solidFill>
                   <a:srgbClr val="3D3A36"/>
                 </a:solidFill>
@@ -2385,20 +4151,20 @@
                 <a:ea typeface="Calibri" pitchFamily="34" charset="-122"/>
                 <a:cs typeface="Calibri" pitchFamily="34" charset="-120"/>
               </a:rPr>
-              <a:t>Pie: calculate angles (fraction × 360°)</a:t>
-            </a:r>
-            <a:endParaRPr lang="en-US" sz="1400" dirty="0"/>
+              <a:t>Pie charts: angles must add up to 360°. Use a protractor.</a:t>
+            </a:r>
+            <a:endParaRPr lang="en-US" sz="1500" dirty="0"/>
           </a:p>
           <a:p>
             <a:pPr marL="342900" indent="-342900">
               <a:spcAft>
-                <a:spcPts val="600"/>
+                <a:spcPts val="800"/>
               </a:spcAft>
               <a:buSzPct val="100000"/>
               <a:buChar char="•"/>
             </a:pPr>
             <a:r>
-              <a:rPr lang="en-US" sz="1400" dirty="0">
+              <a:rPr lang="en-US" sz="1500" dirty="0">
                 <a:solidFill>
                   <a:srgbClr val="3D3A36"/>
                 </a:solidFill>
@@ -2406,35 +4172,30 @@
                 <a:ea typeface="Calibri" pitchFamily="34" charset="-122"/>
                 <a:cs typeface="Calibri" pitchFamily="34" charset="-120"/>
               </a:rPr>
-              <a:t>Line: plot points carefully, connect with straight lines</a:t>
-            </a:r>
-            <a:endParaRPr lang="en-US" sz="1400" dirty="0"/>
+              <a:t>Plot points carefully — use a sharp pencil and small crosses (×).</a:t>
+            </a:r>
+            <a:endParaRPr lang="en-US" sz="1500" dirty="0"/>
           </a:p>
         </p:txBody>
       </p:sp>
       <p:sp>
         <p:nvSpPr>
-          <p:cNvPr id="6" name="Shape 4"/>
-          <p:cNvSpPr/>
-          <p:nvPr/>
-        </p:nvSpPr>
-        <p:spPr>
-          <a:xfrm>
-            <a:off x="4846320" y="1188720"/>
-            <a:ext cx="3840480" cy="3474720"/>
-          </a:xfrm>
-          <a:prstGeom prst="rect">
-            <a:avLst/>
-          </a:prstGeom>
-          <a:solidFill>
-            <a:srgbClr val="FFFFFF"/>
-          </a:solidFill>
-          <a:ln w="12700">
-            <a:solidFill>
-              <a:srgbClr val="E5E2DC"/>
-            </a:solidFill>
-            <a:prstDash val="solid"/>
-          </a:ln>
+          <p:cNvPr id="7" name="Shape 5"/>
+          <p:cNvSpPr/>
+          <p:nvPr/>
+        </p:nvSpPr>
+        <p:spPr>
+          <a:xfrm>
+            <a:off x="731520" y="4206240"/>
+            <a:ext cx="7680960" cy="640080"/>
+          </a:xfrm>
+          <a:prstGeom prst="rect">
+            <a:avLst/>
+          </a:prstGeom>
+          <a:solidFill>
+            <a:srgbClr val="E8F5F3"/>
+          </a:solidFill>
+          <a:ln/>
           <a:effectLst>
             <a:outerShdw sx="100000" sy="100000" kx="0" ky="0" algn="bl" rotWithShape="0" blurRad="50800" dist="25400" dir="8100000">
               <a:srgbClr val="000000">
@@ -2446,34 +4207,14 @@
       </p:sp>
       <p:sp>
         <p:nvSpPr>
-          <p:cNvPr id="7" name="Shape 5"/>
-          <p:cNvSpPr/>
-          <p:nvPr/>
-        </p:nvSpPr>
-        <p:spPr>
-          <a:xfrm>
-            <a:off x="4846320" y="1188720"/>
-            <a:ext cx="3840480" cy="54864"/>
-          </a:xfrm>
-          <a:prstGeom prst="rect">
-            <a:avLst/>
-          </a:prstGeom>
-          <a:solidFill>
-            <a:srgbClr val="2A9D8F"/>
-          </a:solidFill>
-          <a:ln/>
-        </p:spPr>
-      </p:sp>
-      <p:sp>
-        <p:nvSpPr>
           <p:cNvPr id="8" name="Text 6"/>
           <p:cNvSpPr/>
           <p:nvPr/>
         </p:nvSpPr>
         <p:spPr>
           <a:xfrm>
-            <a:off x="5120640" y="1371600"/>
-            <a:ext cx="3291840" cy="3108960"/>
+            <a:off x="914400" y="4251960"/>
+            <a:ext cx="7315200" cy="548640"/>
           </a:xfrm>
           <a:prstGeom prst="rect">
             <a:avLst/>
@@ -2482,46 +4223,28 @@
           <a:ln/>
         </p:spPr>
         <p:txBody>
-          <a:bodyPr wrap="square" rtlCol="0" anchor="t"/>
+          <a:bodyPr wrap="square" rtlCol="0" anchor="ctr"/>
           <a:lstStyle/>
           <a:p>
             <a:pPr indent="0" marL="0">
-              <a:spcAft>
-                <a:spcPts val="400"/>
-              </a:spcAft>
               <a:buNone/>
             </a:pPr>
             <a:r>
-              <a:rPr lang="en-US" sz="1600" b="1" dirty="0">
+              <a:rPr lang="en-US" sz="1200" b="1" dirty="0">
                 <a:solidFill>
-                  <a:srgbClr val="1B2A4A"/>
+                  <a:srgbClr val="2A9D8F"/>
                 </a:solidFill>
                 <a:latin typeface="Calibri" pitchFamily="34" charset="0"/>
                 <a:ea typeface="Calibri" pitchFamily="34" charset="-122"/>
                 <a:cs typeface="Calibri" pitchFamily="34" charset="-120"/>
               </a:rPr>
-              <a:t>Reading and Interpreting</a:t>
-            </a:r>
-            <a:endParaRPr lang="en-US" sz="1600" dirty="0"/>
-          </a:p>
-          <a:p>
+              <a:t>Key Idea: </a:t>
+            </a:r>
             <a:pPr indent="0" marL="0">
-              <a:spcAft>
-                <a:spcPts val="400"/>
-              </a:spcAft>
               <a:buNone/>
             </a:pPr>
-            <a:endParaRPr lang="en-US" sz="1600" dirty="0"/>
-          </a:p>
-          <a:p>
-            <a:pPr indent="0" marL="0">
-              <a:spcAft>
-                <a:spcPts val="400"/>
-              </a:spcAft>
-              <a:buNone/>
-            </a:pPr>
-            <a:r>
-              <a:rPr lang="en-US" sz="1300" dirty="0">
+            <a:r>
+              <a:rPr lang="en-US" sz="1200" i="1" dirty="0">
                 <a:solidFill>
                   <a:srgbClr val="3D3A36"/>
                 </a:solidFill>
@@ -2529,109 +4252,9 @@
                 <a:ea typeface="Calibri" pitchFamily="34" charset="-122"/>
                 <a:cs typeface="Calibri" pitchFamily="34" charset="-120"/>
               </a:rPr>
-              <a:t>Describe the overall pattern or trend</a:t>
-            </a:r>
-            <a:endParaRPr lang="en-US" sz="1600" dirty="0"/>
-          </a:p>
-          <a:p>
-            <a:pPr indent="0" marL="0">
-              <a:spcAft>
-                <a:spcPts val="400"/>
-              </a:spcAft>
-              <a:buNone/>
-            </a:pPr>
-            <a:r>
-              <a:rPr lang="en-US" sz="1300" dirty="0">
-                <a:solidFill>
-                  <a:srgbClr val="3D3A36"/>
-                </a:solidFill>
-                <a:latin typeface="Calibri" pitchFamily="34" charset="0"/>
-                <a:ea typeface="Calibri" pitchFamily="34" charset="-122"/>
-                <a:cs typeface="Calibri" pitchFamily="34" charset="-120"/>
-              </a:rPr>
-              <a:t>Compare specific values using the data</a:t>
-            </a:r>
-            <a:endParaRPr lang="en-US" sz="1600" dirty="0"/>
-          </a:p>
-          <a:p>
-            <a:pPr indent="0" marL="0">
-              <a:spcAft>
-                <a:spcPts val="400"/>
-              </a:spcAft>
-              <a:buNone/>
-            </a:pPr>
-            <a:r>
-              <a:rPr lang="en-US" sz="1300" dirty="0">
-                <a:solidFill>
-                  <a:srgbClr val="3D3A36"/>
-                </a:solidFill>
-                <a:latin typeface="Calibri" pitchFamily="34" charset="0"/>
-                <a:ea typeface="Calibri" pitchFamily="34" charset="-122"/>
-                <a:cs typeface="Calibri" pitchFamily="34" charset="-120"/>
-              </a:rPr>
-              <a:t>Identify the highest/lowest values</a:t>
-            </a:r>
-            <a:endParaRPr lang="en-US" sz="1600" dirty="0"/>
-          </a:p>
-          <a:p>
-            <a:pPr indent="0" marL="0">
-              <a:spcAft>
-                <a:spcPts val="400"/>
-              </a:spcAft>
-              <a:buNone/>
-            </a:pPr>
-            <a:r>
-              <a:rPr lang="en-US" sz="1300" dirty="0">
-                <a:solidFill>
-                  <a:srgbClr val="3D3A36"/>
-                </a:solidFill>
-                <a:latin typeface="Calibri" pitchFamily="34" charset="0"/>
-                <a:ea typeface="Calibri" pitchFamily="34" charset="-122"/>
-                <a:cs typeface="Calibri" pitchFamily="34" charset="-120"/>
-              </a:rPr>
-              <a:t>Look for anomalies or unexpected results</a:t>
-            </a:r>
-            <a:endParaRPr lang="en-US" sz="1600" dirty="0"/>
-          </a:p>
-          <a:p>
-            <a:pPr indent="0" marL="0">
-              <a:spcAft>
-                <a:spcPts val="400"/>
-              </a:spcAft>
-              <a:buNone/>
-            </a:pPr>
-            <a:r>
-              <a:rPr lang="en-US" sz="1300" dirty="0">
-                <a:solidFill>
-                  <a:srgbClr val="3D3A36"/>
-                </a:solidFill>
-                <a:latin typeface="Calibri" pitchFamily="34" charset="0"/>
-                <a:ea typeface="Calibri" pitchFamily="34" charset="-122"/>
-                <a:cs typeface="Calibri" pitchFamily="34" charset="-120"/>
-              </a:rPr>
-              <a:t>Use data to answer the original question</a:t>
-            </a:r>
-            <a:endParaRPr lang="en-US" sz="1600" dirty="0"/>
-          </a:p>
-          <a:p>
-            <a:pPr indent="0" marL="0">
-              <a:spcAft>
-                <a:spcPts val="400"/>
-              </a:spcAft>
-              <a:buNone/>
-            </a:pPr>
-            <a:r>
-              <a:rPr lang="en-US" sz="1300" dirty="0">
-                <a:solidFill>
-                  <a:srgbClr val="3D3A36"/>
-                </a:solidFill>
-                <a:latin typeface="Calibri" pitchFamily="34" charset="0"/>
-                <a:ea typeface="Calibri" pitchFamily="34" charset="-122"/>
-                <a:cs typeface="Calibri" pitchFamily="34" charset="-120"/>
-              </a:rPr>
-              <a:t>'The most popular colour was blue with 12 votes'</a:t>
-            </a:r>
-            <a:endParaRPr lang="en-US" sz="1600" dirty="0"/>
+              <a:t>A graph without labels is like a map without names — it tells you nothing.</a:t>
+            </a:r>
+            <a:endParaRPr lang="en-US" sz="1200" dirty="0"/>
           </a:p>
         </p:txBody>
       </p:sp>
@@ -2649,7 +4272,7 @@
     <p:bg>
       <p:bgPr>
         <a:solidFill>
-          <a:srgbClr val="1B2A4A"/>
+          <a:srgbClr val="FAF8F5"/>
         </a:solidFill>
       </p:bgPr>
     </p:bg>
@@ -2676,27 +4299,384 @@
         <p:spPr>
           <a:xfrm>
             <a:off x="0" y="0"/>
-            <a:ext cx="109728" cy="5143500"/>
-          </a:xfrm>
-          <a:prstGeom prst="rect">
-            <a:avLst/>
-          </a:prstGeom>
-          <a:solidFill>
-            <a:srgbClr val="E9C46A"/>
-          </a:solidFill>
-          <a:ln/>
-        </p:spPr>
-      </p:sp>
-      <p:sp>
-        <p:nvSpPr>
-          <p:cNvPr id="3" name="Text 1"/>
-          <p:cNvSpPr/>
-          <p:nvPr/>
-        </p:nvSpPr>
-        <p:spPr>
-          <a:xfrm>
-            <a:off x="731520" y="457200"/>
-            <a:ext cx="7772400" cy="731520"/>
+            <a:ext cx="9144000" cy="822960"/>
+          </a:xfrm>
+          <a:prstGeom prst="rect">
+            <a:avLst/>
+          </a:prstGeom>
+          <a:solidFill>
+            <a:srgbClr val="FFFFFF"/>
+          </a:solidFill>
+          <a:ln/>
+        </p:spPr>
+      </p:sp>
+      <p:sp>
+        <p:nvSpPr>
+          <p:cNvPr id="3" name="Shape 1"/>
+          <p:cNvSpPr/>
+          <p:nvPr/>
+        </p:nvSpPr>
+        <p:spPr>
+          <a:xfrm>
+            <a:off x="0" y="804672"/>
+            <a:ext cx="9144000" cy="27432"/>
+          </a:xfrm>
+          <a:prstGeom prst="rect">
+            <a:avLst/>
+          </a:prstGeom>
+          <a:solidFill>
+            <a:srgbClr val="E5E2DC"/>
+          </a:solidFill>
+          <a:ln/>
+        </p:spPr>
+      </p:sp>
+      <p:sp>
+        <p:nvSpPr>
+          <p:cNvPr id="4" name="Shape 2"/>
+          <p:cNvSpPr/>
+          <p:nvPr/>
+        </p:nvSpPr>
+        <p:spPr>
+          <a:xfrm>
+            <a:off x="548640" y="201168"/>
+            <a:ext cx="54864" cy="420624"/>
+          </a:xfrm>
+          <a:prstGeom prst="rect">
+            <a:avLst/>
+          </a:prstGeom>
+          <a:solidFill>
+            <a:srgbClr val="2A9D8F"/>
+          </a:solidFill>
+          <a:ln/>
+        </p:spPr>
+      </p:sp>
+      <p:sp>
+        <p:nvSpPr>
+          <p:cNvPr id="5" name="Text 3"/>
+          <p:cNvSpPr/>
+          <p:nvPr/>
+        </p:nvSpPr>
+        <p:spPr>
+          <a:xfrm>
+            <a:off x="777240" y="137160"/>
+            <a:ext cx="7772400" cy="548640"/>
+          </a:xfrm>
+          <a:prstGeom prst="rect">
+            <a:avLst/>
+          </a:prstGeom>
+          <a:noFill/>
+          <a:ln/>
+        </p:spPr>
+        <p:txBody>
+          <a:bodyPr wrap="square" lIns="0" tIns="0" rIns="0" bIns="0" rtlCol="0" anchor="ctr"/>
+          <a:lstStyle/>
+          <a:p>
+            <a:pPr indent="0" marL="0">
+              <a:buNone/>
+            </a:pPr>
+            <a:r>
+              <a:rPr lang="en-US" sz="2000" b="1" dirty="0">
+                <a:solidFill>
+                  <a:srgbClr val="1B2A4A"/>
+                </a:solidFill>
+                <a:latin typeface="Georgia" pitchFamily="34" charset="0"/>
+                <a:ea typeface="Georgia" pitchFamily="34" charset="-122"/>
+                <a:cs typeface="Georgia" pitchFamily="34" charset="-120"/>
+              </a:rPr>
+              <a:t>Reading &amp; Interpreting Charts</a:t>
+            </a:r>
+            <a:endParaRPr lang="en-US" sz="2000" dirty="0"/>
+          </a:p>
+        </p:txBody>
+      </p:sp>
+      <p:sp>
+        <p:nvSpPr>
+          <p:cNvPr id="6" name="Text 4"/>
+          <p:cNvSpPr/>
+          <p:nvPr/>
+        </p:nvSpPr>
+        <p:spPr>
+          <a:xfrm>
+            <a:off x="731520" y="1051560"/>
+            <a:ext cx="7680960" cy="3108960"/>
+          </a:xfrm>
+          <a:prstGeom prst="rect">
+            <a:avLst/>
+          </a:prstGeom>
+          <a:noFill/>
+          <a:ln/>
+        </p:spPr>
+        <p:txBody>
+          <a:bodyPr wrap="square" rtlCol="0" anchor="t"/>
+          <a:lstStyle/>
+          <a:p>
+            <a:pPr marL="342900" indent="-342900">
+              <a:spcAft>
+                <a:spcPts val="800"/>
+              </a:spcAft>
+              <a:buSzPct val="100000"/>
+              <a:buChar char="•"/>
+            </a:pPr>
+            <a:r>
+              <a:rPr lang="en-US" sz="1500" dirty="0">
+                <a:solidFill>
+                  <a:srgbClr val="3D3A36"/>
+                </a:solidFill>
+                <a:latin typeface="Calibri" pitchFamily="34" charset="0"/>
+                <a:ea typeface="Calibri" pitchFamily="34" charset="-122"/>
+                <a:cs typeface="Calibri" pitchFamily="34" charset="-120"/>
+              </a:rPr>
+              <a:t>Read the title, axis labels, and scale BEFORE trying to answer questions.</a:t>
+            </a:r>
+            <a:endParaRPr lang="en-US" sz="1500" dirty="0"/>
+          </a:p>
+          <a:p>
+            <a:pPr marL="342900" indent="-342900">
+              <a:spcAft>
+                <a:spcPts val="800"/>
+              </a:spcAft>
+              <a:buSzPct val="100000"/>
+              <a:buChar char="•"/>
+            </a:pPr>
+            <a:r>
+              <a:rPr lang="en-US" sz="1500" dirty="0">
+                <a:solidFill>
+                  <a:srgbClr val="3D3A36"/>
+                </a:solidFill>
+                <a:latin typeface="Calibri" pitchFamily="34" charset="0"/>
+                <a:ea typeface="Calibri" pitchFamily="34" charset="-122"/>
+                <a:cs typeface="Calibri" pitchFamily="34" charset="-120"/>
+              </a:rPr>
+              <a:t>For bar charts: read the HEIGHT of each bar against the y-axis.</a:t>
+            </a:r>
+            <a:endParaRPr lang="en-US" sz="1500" dirty="0"/>
+          </a:p>
+          <a:p>
+            <a:pPr marL="342900" indent="-342900">
+              <a:spcAft>
+                <a:spcPts val="800"/>
+              </a:spcAft>
+              <a:buSzPct val="100000"/>
+              <a:buChar char="•"/>
+            </a:pPr>
+            <a:r>
+              <a:rPr lang="en-US" sz="1500" dirty="0">
+                <a:solidFill>
+                  <a:srgbClr val="3D3A36"/>
+                </a:solidFill>
+                <a:latin typeface="Calibri" pitchFamily="34" charset="0"/>
+                <a:ea typeface="Calibri" pitchFamily="34" charset="-122"/>
+                <a:cs typeface="Calibri" pitchFamily="34" charset="-120"/>
+              </a:rPr>
+              <a:t>For pie charts: bigger sector = bigger proportion.</a:t>
+            </a:r>
+            <a:endParaRPr lang="en-US" sz="1500" dirty="0"/>
+          </a:p>
+          <a:p>
+            <a:pPr marL="342900" indent="-342900">
+              <a:spcAft>
+                <a:spcPts val="800"/>
+              </a:spcAft>
+              <a:buSzPct val="100000"/>
+              <a:buChar char="•"/>
+            </a:pPr>
+            <a:r>
+              <a:rPr lang="en-US" sz="1500" dirty="0">
+                <a:solidFill>
+                  <a:srgbClr val="3D3A36"/>
+                </a:solidFill>
+                <a:latin typeface="Calibri" pitchFamily="34" charset="0"/>
+                <a:ea typeface="Calibri" pitchFamily="34" charset="-122"/>
+                <a:cs typeface="Calibri" pitchFamily="34" charset="-120"/>
+              </a:rPr>
+              <a:t>For line graphs: describe the TREND (increasing, decreasing, steady).</a:t>
+            </a:r>
+            <a:endParaRPr lang="en-US" sz="1500" dirty="0"/>
+          </a:p>
+          <a:p>
+            <a:pPr marL="342900" indent="-342900">
+              <a:spcAft>
+                <a:spcPts val="800"/>
+              </a:spcAft>
+              <a:buSzPct val="100000"/>
+              <a:buChar char="•"/>
+            </a:pPr>
+            <a:r>
+              <a:rPr lang="en-US" sz="1500" dirty="0">
+                <a:solidFill>
+                  <a:srgbClr val="3D3A36"/>
+                </a:solidFill>
+                <a:latin typeface="Calibri" pitchFamily="34" charset="0"/>
+                <a:ea typeface="Calibri" pitchFamily="34" charset="-122"/>
+                <a:cs typeface="Calibri" pitchFamily="34" charset="-120"/>
+              </a:rPr>
+              <a:t>Always use DATA from the chart to support your answers.</a:t>
+            </a:r>
+            <a:endParaRPr lang="en-US" sz="1500" dirty="0"/>
+          </a:p>
+        </p:txBody>
+      </p:sp>
+    </p:spTree>
+  </p:cSld>
+  <p:clrMapOvr>
+    <a:masterClrMapping/>
+  </p:clrMapOvr>
+</p:sld>
+</file>
+
+<file path=ppt/slides/slide6.xml><?xml version="1.0" encoding="utf-8"?>
+<p:sld xmlns:a="http://schemas.openxmlformats.org/drawingml/2006/main" xmlns:r="http://schemas.openxmlformats.org/officeDocument/2006/relationships" xmlns:p="http://schemas.openxmlformats.org/presentationml/2006/main">
+  <p:cSld name="Slide 6">
+    <p:bg>
+      <p:bgPr>
+        <a:solidFill>
+          <a:srgbClr val="FAF8F5"/>
+        </a:solidFill>
+      </p:bgPr>
+    </p:bg>
+    <p:spTree>
+      <p:nvGrpSpPr>
+        <p:cNvPr id="1" name=""/>
+        <p:cNvGrpSpPr/>
+        <p:nvPr/>
+      </p:nvGrpSpPr>
+      <p:grpSpPr>
+        <a:xfrm>
+          <a:off x="0" y="0"/>
+          <a:ext cx="0" cy="0"/>
+          <a:chOff x="0" y="0"/>
+          <a:chExt cx="0" cy="0"/>
+        </a:xfrm>
+      </p:grpSpPr>
+      <p:sp>
+        <p:nvSpPr>
+          <p:cNvPr id="2" name="Shape 0"/>
+          <p:cNvSpPr/>
+          <p:nvPr/>
+        </p:nvSpPr>
+        <p:spPr>
+          <a:xfrm>
+            <a:off x="0" y="0"/>
+            <a:ext cx="9144000" cy="822960"/>
+          </a:xfrm>
+          <a:prstGeom prst="rect">
+            <a:avLst/>
+          </a:prstGeom>
+          <a:solidFill>
+            <a:srgbClr val="FFFFFF"/>
+          </a:solidFill>
+          <a:ln/>
+        </p:spPr>
+      </p:sp>
+      <p:sp>
+        <p:nvSpPr>
+          <p:cNvPr id="3" name="Shape 1"/>
+          <p:cNvSpPr/>
+          <p:nvPr/>
+        </p:nvSpPr>
+        <p:spPr>
+          <a:xfrm>
+            <a:off x="0" y="804672"/>
+            <a:ext cx="9144000" cy="27432"/>
+          </a:xfrm>
+          <a:prstGeom prst="rect">
+            <a:avLst/>
+          </a:prstGeom>
+          <a:solidFill>
+            <a:srgbClr val="E5E2DC"/>
+          </a:solidFill>
+          <a:ln/>
+        </p:spPr>
+      </p:sp>
+      <p:sp>
+        <p:nvSpPr>
+          <p:cNvPr id="4" name="Shape 2"/>
+          <p:cNvSpPr/>
+          <p:nvPr/>
+        </p:nvSpPr>
+        <p:spPr>
+          <a:xfrm>
+            <a:off x="548640" y="201168"/>
+            <a:ext cx="54864" cy="420624"/>
+          </a:xfrm>
+          <a:prstGeom prst="rect">
+            <a:avLst/>
+          </a:prstGeom>
+          <a:solidFill>
+            <a:srgbClr val="2A9D8F"/>
+          </a:solidFill>
+          <a:ln/>
+        </p:spPr>
+      </p:sp>
+      <p:sp>
+        <p:nvSpPr>
+          <p:cNvPr id="5" name="Text 3"/>
+          <p:cNvSpPr/>
+          <p:nvPr/>
+        </p:nvSpPr>
+        <p:spPr>
+          <a:xfrm>
+            <a:off x="777240" y="137160"/>
+            <a:ext cx="7772400" cy="548640"/>
+          </a:xfrm>
+          <a:prstGeom prst="rect">
+            <a:avLst/>
+          </a:prstGeom>
+          <a:noFill/>
+          <a:ln/>
+        </p:spPr>
+        <p:txBody>
+          <a:bodyPr wrap="square" lIns="0" tIns="0" rIns="0" bIns="0" rtlCol="0" anchor="ctr"/>
+          <a:lstStyle/>
+          <a:p>
+            <a:pPr indent="0" marL="0">
+              <a:buNone/>
+            </a:pPr>
+            <a:r>
+              <a:rPr lang="en-US" sz="2000" b="1" dirty="0">
+                <a:solidFill>
+                  <a:srgbClr val="1B2A4A"/>
+                </a:solidFill>
+                <a:latin typeface="Georgia" pitchFamily="34" charset="0"/>
+                <a:ea typeface="Georgia" pitchFamily="34" charset="-122"/>
+                <a:cs typeface="Georgia" pitchFamily="34" charset="-120"/>
+              </a:rPr>
+              <a:t>Check Your Understanding</a:t>
+            </a:r>
+            <a:endParaRPr lang="en-US" sz="2000" dirty="0"/>
+          </a:p>
+        </p:txBody>
+      </p:sp>
+      <p:sp>
+        <p:nvSpPr>
+          <p:cNvPr id="6" name="Shape 4"/>
+          <p:cNvSpPr/>
+          <p:nvPr/>
+        </p:nvSpPr>
+        <p:spPr>
+          <a:xfrm>
+            <a:off x="731520" y="1051560"/>
+            <a:ext cx="7680960" cy="438912"/>
+          </a:xfrm>
+          <a:prstGeom prst="rect">
+            <a:avLst/>
+          </a:prstGeom>
+          <a:solidFill>
+            <a:srgbClr val="FFFFFF"/>
+          </a:solidFill>
+          <a:ln/>
+        </p:spPr>
+      </p:sp>
+      <p:sp>
+        <p:nvSpPr>
+          <p:cNvPr id="7" name="Text 5"/>
+          <p:cNvSpPr/>
+          <p:nvPr/>
+        </p:nvSpPr>
+        <p:spPr>
+          <a:xfrm>
+            <a:off x="868680" y="1051560"/>
+            <a:ext cx="320040" cy="438912"/>
           </a:xfrm>
           <a:prstGeom prst="rect">
             <a:avLst/>
@@ -2712,7 +4692,629 @@
               <a:buNone/>
             </a:pPr>
             <a:r>
-              <a:rPr lang="en-US" sz="3200" b="1" dirty="0">
+              <a:rPr lang="en-US" sz="1400" dirty="0">
+                <a:solidFill>
+                  <a:srgbClr val="2A9D8F"/>
+                </a:solidFill>
+              </a:rPr>
+              <a:t>☐</a:t>
+            </a:r>
+            <a:endParaRPr lang="en-US" sz="1400" dirty="0"/>
+          </a:p>
+        </p:txBody>
+      </p:sp>
+      <p:sp>
+        <p:nvSpPr>
+          <p:cNvPr id="8" name="Text 6"/>
+          <p:cNvSpPr/>
+          <p:nvPr/>
+        </p:nvSpPr>
+        <p:spPr>
+          <a:xfrm>
+            <a:off x="1234440" y="1051560"/>
+            <a:ext cx="6949440" cy="438912"/>
+          </a:xfrm>
+          <a:prstGeom prst="rect">
+            <a:avLst/>
+          </a:prstGeom>
+          <a:noFill/>
+          <a:ln/>
+        </p:spPr>
+        <p:txBody>
+          <a:bodyPr wrap="square" rtlCol="0" anchor="ctr"/>
+          <a:lstStyle/>
+          <a:p>
+            <a:pPr indent="0" marL="0">
+              <a:buNone/>
+            </a:pPr>
+            <a:r>
+              <a:rPr lang="en-US" sz="1300" dirty="0">
+                <a:solidFill>
+                  <a:srgbClr val="3D3A36"/>
+                </a:solidFill>
+                <a:latin typeface="Calibri" pitchFamily="34" charset="0"/>
+                <a:ea typeface="Calibri" pitchFamily="34" charset="-122"/>
+                <a:cs typeface="Calibri" pitchFamily="34" charset="-120"/>
+              </a:rPr>
+              <a:t>I can choose the right chart type for my data</a:t>
+            </a:r>
+            <a:endParaRPr lang="en-US" sz="1300" dirty="0"/>
+          </a:p>
+        </p:txBody>
+      </p:sp>
+      <p:sp>
+        <p:nvSpPr>
+          <p:cNvPr id="9" name="Shape 7"/>
+          <p:cNvSpPr/>
+          <p:nvPr/>
+        </p:nvSpPr>
+        <p:spPr>
+          <a:xfrm>
+            <a:off x="731520" y="1554480"/>
+            <a:ext cx="7680960" cy="438912"/>
+          </a:xfrm>
+          <a:prstGeom prst="rect">
+            <a:avLst/>
+          </a:prstGeom>
+          <a:solidFill>
+            <a:srgbClr val="F8F6F3"/>
+          </a:solidFill>
+          <a:ln/>
+        </p:spPr>
+      </p:sp>
+      <p:sp>
+        <p:nvSpPr>
+          <p:cNvPr id="10" name="Text 8"/>
+          <p:cNvSpPr/>
+          <p:nvPr/>
+        </p:nvSpPr>
+        <p:spPr>
+          <a:xfrm>
+            <a:off x="868680" y="1554480"/>
+            <a:ext cx="320040" cy="438912"/>
+          </a:xfrm>
+          <a:prstGeom prst="rect">
+            <a:avLst/>
+          </a:prstGeom>
+          <a:noFill/>
+          <a:ln/>
+        </p:spPr>
+        <p:txBody>
+          <a:bodyPr wrap="square" rtlCol="0" anchor="ctr"/>
+          <a:lstStyle/>
+          <a:p>
+            <a:pPr indent="0" marL="0">
+              <a:buNone/>
+            </a:pPr>
+            <a:r>
+              <a:rPr lang="en-US" sz="1400" dirty="0">
+                <a:solidFill>
+                  <a:srgbClr val="2A9D8F"/>
+                </a:solidFill>
+              </a:rPr>
+              <a:t>☐</a:t>
+            </a:r>
+            <a:endParaRPr lang="en-US" sz="1400" dirty="0"/>
+          </a:p>
+        </p:txBody>
+      </p:sp>
+      <p:sp>
+        <p:nvSpPr>
+          <p:cNvPr id="11" name="Text 9"/>
+          <p:cNvSpPr/>
+          <p:nvPr/>
+        </p:nvSpPr>
+        <p:spPr>
+          <a:xfrm>
+            <a:off x="1234440" y="1554480"/>
+            <a:ext cx="6949440" cy="438912"/>
+          </a:xfrm>
+          <a:prstGeom prst="rect">
+            <a:avLst/>
+          </a:prstGeom>
+          <a:noFill/>
+          <a:ln/>
+        </p:spPr>
+        <p:txBody>
+          <a:bodyPr wrap="square" rtlCol="0" anchor="ctr"/>
+          <a:lstStyle/>
+          <a:p>
+            <a:pPr indent="0" marL="0">
+              <a:buNone/>
+            </a:pPr>
+            <a:r>
+              <a:rPr lang="en-US" sz="1300" dirty="0">
+                <a:solidFill>
+                  <a:srgbClr val="3D3A36"/>
+                </a:solidFill>
+                <a:latin typeface="Calibri" pitchFamily="34" charset="0"/>
+                <a:ea typeface="Calibri" pitchFamily="34" charset="-122"/>
+                <a:cs typeface="Calibri" pitchFamily="34" charset="-120"/>
+              </a:rPr>
+              <a:t>I can draw bar charts, pie charts, and line graphs correctly</a:t>
+            </a:r>
+            <a:endParaRPr lang="en-US" sz="1300" dirty="0"/>
+          </a:p>
+        </p:txBody>
+      </p:sp>
+      <p:sp>
+        <p:nvSpPr>
+          <p:cNvPr id="12" name="Shape 10"/>
+          <p:cNvSpPr/>
+          <p:nvPr/>
+        </p:nvSpPr>
+        <p:spPr>
+          <a:xfrm>
+            <a:off x="731520" y="2057400"/>
+            <a:ext cx="7680960" cy="438912"/>
+          </a:xfrm>
+          <a:prstGeom prst="rect">
+            <a:avLst/>
+          </a:prstGeom>
+          <a:solidFill>
+            <a:srgbClr val="FFFFFF"/>
+          </a:solidFill>
+          <a:ln/>
+        </p:spPr>
+      </p:sp>
+      <p:sp>
+        <p:nvSpPr>
+          <p:cNvPr id="13" name="Text 11"/>
+          <p:cNvSpPr/>
+          <p:nvPr/>
+        </p:nvSpPr>
+        <p:spPr>
+          <a:xfrm>
+            <a:off x="868680" y="2057400"/>
+            <a:ext cx="320040" cy="438912"/>
+          </a:xfrm>
+          <a:prstGeom prst="rect">
+            <a:avLst/>
+          </a:prstGeom>
+          <a:noFill/>
+          <a:ln/>
+        </p:spPr>
+        <p:txBody>
+          <a:bodyPr wrap="square" rtlCol="0" anchor="ctr"/>
+          <a:lstStyle/>
+          <a:p>
+            <a:pPr indent="0" marL="0">
+              <a:buNone/>
+            </a:pPr>
+            <a:r>
+              <a:rPr lang="en-US" sz="1400" dirty="0">
+                <a:solidFill>
+                  <a:srgbClr val="2A9D8F"/>
+                </a:solidFill>
+              </a:rPr>
+              <a:t>☐</a:t>
+            </a:r>
+            <a:endParaRPr lang="en-US" sz="1400" dirty="0"/>
+          </a:p>
+        </p:txBody>
+      </p:sp>
+      <p:sp>
+        <p:nvSpPr>
+          <p:cNvPr id="14" name="Text 12"/>
+          <p:cNvSpPr/>
+          <p:nvPr/>
+        </p:nvSpPr>
+        <p:spPr>
+          <a:xfrm>
+            <a:off x="1234440" y="2057400"/>
+            <a:ext cx="6949440" cy="438912"/>
+          </a:xfrm>
+          <a:prstGeom prst="rect">
+            <a:avLst/>
+          </a:prstGeom>
+          <a:noFill/>
+          <a:ln/>
+        </p:spPr>
+        <p:txBody>
+          <a:bodyPr wrap="square" rtlCol="0" anchor="ctr"/>
+          <a:lstStyle/>
+          <a:p>
+            <a:pPr indent="0" marL="0">
+              <a:buNone/>
+            </a:pPr>
+            <a:r>
+              <a:rPr lang="en-US" sz="1300" dirty="0">
+                <a:solidFill>
+                  <a:srgbClr val="3D3A36"/>
+                </a:solidFill>
+                <a:latin typeface="Calibri" pitchFamily="34" charset="0"/>
+                <a:ea typeface="Calibri" pitchFamily="34" charset="-122"/>
+                <a:cs typeface="Calibri" pitchFamily="34" charset="-120"/>
+              </a:rPr>
+              <a:t>I know that bar chart bars don't touch (unlike histograms)</a:t>
+            </a:r>
+            <a:endParaRPr lang="en-US" sz="1300" dirty="0"/>
+          </a:p>
+        </p:txBody>
+      </p:sp>
+      <p:sp>
+        <p:nvSpPr>
+          <p:cNvPr id="15" name="Shape 13"/>
+          <p:cNvSpPr/>
+          <p:nvPr/>
+        </p:nvSpPr>
+        <p:spPr>
+          <a:xfrm>
+            <a:off x="731520" y="2560320"/>
+            <a:ext cx="7680960" cy="438912"/>
+          </a:xfrm>
+          <a:prstGeom prst="rect">
+            <a:avLst/>
+          </a:prstGeom>
+          <a:solidFill>
+            <a:srgbClr val="F8F6F3"/>
+          </a:solidFill>
+          <a:ln/>
+        </p:spPr>
+      </p:sp>
+      <p:sp>
+        <p:nvSpPr>
+          <p:cNvPr id="16" name="Text 14"/>
+          <p:cNvSpPr/>
+          <p:nvPr/>
+        </p:nvSpPr>
+        <p:spPr>
+          <a:xfrm>
+            <a:off x="868680" y="2560320"/>
+            <a:ext cx="320040" cy="438912"/>
+          </a:xfrm>
+          <a:prstGeom prst="rect">
+            <a:avLst/>
+          </a:prstGeom>
+          <a:noFill/>
+          <a:ln/>
+        </p:spPr>
+        <p:txBody>
+          <a:bodyPr wrap="square" rtlCol="0" anchor="ctr"/>
+          <a:lstStyle/>
+          <a:p>
+            <a:pPr indent="0" marL="0">
+              <a:buNone/>
+            </a:pPr>
+            <a:r>
+              <a:rPr lang="en-US" sz="1400" dirty="0">
+                <a:solidFill>
+                  <a:srgbClr val="2A9D8F"/>
+                </a:solidFill>
+              </a:rPr>
+              <a:t>☐</a:t>
+            </a:r>
+            <a:endParaRPr lang="en-US" sz="1400" dirty="0"/>
+          </a:p>
+        </p:txBody>
+      </p:sp>
+      <p:sp>
+        <p:nvSpPr>
+          <p:cNvPr id="17" name="Text 15"/>
+          <p:cNvSpPr/>
+          <p:nvPr/>
+        </p:nvSpPr>
+        <p:spPr>
+          <a:xfrm>
+            <a:off x="1234440" y="2560320"/>
+            <a:ext cx="6949440" cy="438912"/>
+          </a:xfrm>
+          <a:prstGeom prst="rect">
+            <a:avLst/>
+          </a:prstGeom>
+          <a:noFill/>
+          <a:ln/>
+        </p:spPr>
+        <p:txBody>
+          <a:bodyPr wrap="square" rtlCol="0" anchor="ctr"/>
+          <a:lstStyle/>
+          <a:p>
+            <a:pPr indent="0" marL="0">
+              <a:buNone/>
+            </a:pPr>
+            <a:r>
+              <a:rPr lang="en-US" sz="1300" dirty="0">
+                <a:solidFill>
+                  <a:srgbClr val="3D3A36"/>
+                </a:solidFill>
+                <a:latin typeface="Calibri" pitchFamily="34" charset="0"/>
+                <a:ea typeface="Calibri" pitchFamily="34" charset="-122"/>
+                <a:cs typeface="Calibri" pitchFamily="34" charset="-120"/>
+              </a:rPr>
+              <a:t>I can read and interpret different types of charts</a:t>
+            </a:r>
+            <a:endParaRPr lang="en-US" sz="1300" dirty="0"/>
+          </a:p>
+        </p:txBody>
+      </p:sp>
+      <p:sp>
+        <p:nvSpPr>
+          <p:cNvPr id="18" name="Shape 16"/>
+          <p:cNvSpPr/>
+          <p:nvPr/>
+        </p:nvSpPr>
+        <p:spPr>
+          <a:xfrm>
+            <a:off x="731520" y="3063240"/>
+            <a:ext cx="7680960" cy="438912"/>
+          </a:xfrm>
+          <a:prstGeom prst="rect">
+            <a:avLst/>
+          </a:prstGeom>
+          <a:solidFill>
+            <a:srgbClr val="FFFFFF"/>
+          </a:solidFill>
+          <a:ln/>
+        </p:spPr>
+      </p:sp>
+      <p:sp>
+        <p:nvSpPr>
+          <p:cNvPr id="19" name="Text 17"/>
+          <p:cNvSpPr/>
+          <p:nvPr/>
+        </p:nvSpPr>
+        <p:spPr>
+          <a:xfrm>
+            <a:off x="868680" y="3063240"/>
+            <a:ext cx="320040" cy="438912"/>
+          </a:xfrm>
+          <a:prstGeom prst="rect">
+            <a:avLst/>
+          </a:prstGeom>
+          <a:noFill/>
+          <a:ln/>
+        </p:spPr>
+        <p:txBody>
+          <a:bodyPr wrap="square" rtlCol="0" anchor="ctr"/>
+          <a:lstStyle/>
+          <a:p>
+            <a:pPr indent="0" marL="0">
+              <a:buNone/>
+            </a:pPr>
+            <a:r>
+              <a:rPr lang="en-US" sz="1400" dirty="0">
+                <a:solidFill>
+                  <a:srgbClr val="2A9D8F"/>
+                </a:solidFill>
+              </a:rPr>
+              <a:t>☐</a:t>
+            </a:r>
+            <a:endParaRPr lang="en-US" sz="1400" dirty="0"/>
+          </a:p>
+        </p:txBody>
+      </p:sp>
+      <p:sp>
+        <p:nvSpPr>
+          <p:cNvPr id="20" name="Text 18"/>
+          <p:cNvSpPr/>
+          <p:nvPr/>
+        </p:nvSpPr>
+        <p:spPr>
+          <a:xfrm>
+            <a:off x="1234440" y="3063240"/>
+            <a:ext cx="6949440" cy="438912"/>
+          </a:xfrm>
+          <a:prstGeom prst="rect">
+            <a:avLst/>
+          </a:prstGeom>
+          <a:noFill/>
+          <a:ln/>
+        </p:spPr>
+        <p:txBody>
+          <a:bodyPr wrap="square" rtlCol="0" anchor="ctr"/>
+          <a:lstStyle/>
+          <a:p>
+            <a:pPr indent="0" marL="0">
+              <a:buNone/>
+            </a:pPr>
+            <a:r>
+              <a:rPr lang="en-US" sz="1300" dirty="0">
+                <a:solidFill>
+                  <a:srgbClr val="3D3A36"/>
+                </a:solidFill>
+                <a:latin typeface="Calibri" pitchFamily="34" charset="0"/>
+                <a:ea typeface="Calibri" pitchFamily="34" charset="-122"/>
+                <a:cs typeface="Calibri" pitchFamily="34" charset="-120"/>
+              </a:rPr>
+              <a:t>I always include a title, labels, and sensible scale</a:t>
+            </a:r>
+            <a:endParaRPr lang="en-US" sz="1300" dirty="0"/>
+          </a:p>
+        </p:txBody>
+      </p:sp>
+      <p:sp>
+        <p:nvSpPr>
+          <p:cNvPr id="21" name="Shape 19"/>
+          <p:cNvSpPr/>
+          <p:nvPr/>
+        </p:nvSpPr>
+        <p:spPr>
+          <a:xfrm>
+            <a:off x="731520" y="3749040"/>
+            <a:ext cx="7680960" cy="594360"/>
+          </a:xfrm>
+          <a:prstGeom prst="rect">
+            <a:avLst/>
+          </a:prstGeom>
+          <a:solidFill>
+            <a:srgbClr val="E8F5F3"/>
+          </a:solidFill>
+          <a:ln/>
+          <a:effectLst>
+            <a:outerShdw sx="100000" sy="100000" kx="0" ky="0" algn="bl" rotWithShape="0" blurRad="50800" dist="25400" dir="8100000">
+              <a:srgbClr val="000000">
+                <a:alpha val="10000"/>
+              </a:srgbClr>
+            </a:outerShdw>
+          </a:effectLst>
+        </p:spPr>
+      </p:sp>
+      <p:sp>
+        <p:nvSpPr>
+          <p:cNvPr id="22" name="Text 20"/>
+          <p:cNvSpPr/>
+          <p:nvPr/>
+        </p:nvSpPr>
+        <p:spPr>
+          <a:xfrm>
+            <a:off x="914400" y="3749040"/>
+            <a:ext cx="7315200" cy="594360"/>
+          </a:xfrm>
+          <a:prstGeom prst="rect">
+            <a:avLst/>
+          </a:prstGeom>
+          <a:noFill/>
+          <a:ln/>
+        </p:spPr>
+        <p:txBody>
+          <a:bodyPr wrap="square" rtlCol="0" anchor="ctr"/>
+          <a:lstStyle/>
+          <a:p>
+            <a:pPr indent="0" marL="0">
+              <a:buNone/>
+            </a:pPr>
+            <a:r>
+              <a:rPr lang="en-US" sz="1200" b="1" dirty="0">
+                <a:solidFill>
+                  <a:srgbClr val="2A9D8F"/>
+                </a:solidFill>
+                <a:latin typeface="Calibri" pitchFamily="34" charset="0"/>
+                <a:ea typeface="Calibri" pitchFamily="34" charset="-122"/>
+                <a:cs typeface="Calibri" pitchFamily="34" charset="-120"/>
+              </a:rPr>
+              <a:t>Key Idea: </a:t>
+            </a:r>
+            <a:pPr indent="0" marL="0">
+              <a:buNone/>
+            </a:pPr>
+            <a:r>
+              <a:rPr lang="en-US" sz="1200" i="1" dirty="0">
+                <a:solidFill>
+                  <a:srgbClr val="3D3A36"/>
+                </a:solidFill>
+                <a:latin typeface="Calibri" pitchFamily="34" charset="0"/>
+                <a:ea typeface="Calibri" pitchFamily="34" charset="-122"/>
+                <a:cs typeface="Calibri" pitchFamily="34" charset="-120"/>
+              </a:rPr>
+              <a:t>Charts turn numbers into pictures — making patterns easy to see.</a:t>
+            </a:r>
+            <a:endParaRPr lang="en-US" sz="1200" dirty="0"/>
+          </a:p>
+        </p:txBody>
+      </p:sp>
+    </p:spTree>
+  </p:cSld>
+  <p:clrMapOvr>
+    <a:masterClrMapping/>
+  </p:clrMapOvr>
+</p:sld>
+</file>
+
+<file path=ppt/slides/slide7.xml><?xml version="1.0" encoding="utf-8"?>
+<p:sld xmlns:a="http://schemas.openxmlformats.org/drawingml/2006/main" xmlns:r="http://schemas.openxmlformats.org/officeDocument/2006/relationships" xmlns:p="http://schemas.openxmlformats.org/presentationml/2006/main">
+  <p:cSld name="Slide 7">
+    <p:spTree>
+      <p:nvGrpSpPr>
+        <p:cNvPr id="1" name=""/>
+        <p:cNvGrpSpPr/>
+        <p:nvPr/>
+      </p:nvGrpSpPr>
+      <p:grpSpPr>
+        <a:xfrm>
+          <a:off x="0" y="0"/>
+          <a:ext cx="0" cy="0"/>
+          <a:chOff x="0" y="0"/>
+          <a:chExt cx="0" cy="0"/>
+        </a:xfrm>
+      </p:grpSpPr>
+      <p:sp>
+        <p:nvSpPr>
+          <p:cNvPr id="2" name="Shape 0"/>
+          <p:cNvSpPr/>
+          <p:nvPr/>
+        </p:nvSpPr>
+        <p:spPr>
+          <a:xfrm>
+            <a:off x="0" y="0"/>
+            <a:ext cx="9144000" cy="5143500"/>
+          </a:xfrm>
+          <a:prstGeom prst="rect">
+            <a:avLst/>
+          </a:prstGeom>
+          <a:solidFill>
+            <a:srgbClr val="1B2A4A"/>
+          </a:solidFill>
+          <a:ln/>
+        </p:spPr>
+      </p:sp>
+      <p:sp>
+        <p:nvSpPr>
+          <p:cNvPr id="3" name="Shape 1"/>
+          <p:cNvSpPr/>
+          <p:nvPr/>
+        </p:nvSpPr>
+        <p:spPr>
+          <a:xfrm>
+            <a:off x="0" y="4777740"/>
+            <a:ext cx="9144000" cy="365760"/>
+          </a:xfrm>
+          <a:prstGeom prst="rect">
+            <a:avLst/>
+          </a:prstGeom>
+          <a:solidFill>
+            <a:srgbClr val="2A9D8F"/>
+          </a:solidFill>
+          <a:ln/>
+        </p:spPr>
+      </p:sp>
+      <p:sp>
+        <p:nvSpPr>
+          <p:cNvPr id="4" name="Shape 2"/>
+          <p:cNvSpPr/>
+          <p:nvPr/>
+        </p:nvSpPr>
+        <p:spPr>
+          <a:xfrm>
+            <a:off x="-914400" y="-914400"/>
+            <a:ext cx="3657600" cy="3657600"/>
+          </a:xfrm>
+          <a:prstGeom prst="ellipse">
+            <a:avLst/>
+          </a:prstGeom>
+          <a:solidFill>
+            <a:srgbClr val="2A9D8F">
+              <a:alpha val="10000"/>
+            </a:srgbClr>
+          </a:solidFill>
+          <a:ln/>
+        </p:spPr>
+      </p:sp>
+      <p:sp>
+        <p:nvSpPr>
+          <p:cNvPr id="5" name="Text 3"/>
+          <p:cNvSpPr/>
+          <p:nvPr/>
+        </p:nvSpPr>
+        <p:spPr>
+          <a:xfrm>
+            <a:off x="731520" y="1463040"/>
+            <a:ext cx="7680960" cy="822960"/>
+          </a:xfrm>
+          <a:prstGeom prst="rect">
+            <a:avLst/>
+          </a:prstGeom>
+          <a:noFill/>
+          <a:ln/>
+        </p:spPr>
+        <p:txBody>
+          <a:bodyPr wrap="square" rtlCol="0" anchor="ctr"/>
+          <a:lstStyle/>
+          <a:p>
+            <a:pPr algn="ctr" indent="0" marL="0">
+              <a:buNone/>
+            </a:pPr>
+            <a:r>
+              <a:rPr lang="en-US" sz="3400" b="1" dirty="0">
                 <a:solidFill>
                   <a:srgbClr val="FFFFFF"/>
                 </a:solidFill>
@@ -2720,149 +5322,22 @@
                 <a:ea typeface="Georgia" pitchFamily="34" charset="-122"/>
                 <a:cs typeface="Georgia" pitchFamily="34" charset="-120"/>
               </a:rPr>
-              <a:t>Key Takeaways</a:t>
-            </a:r>
-            <a:endParaRPr lang="en-US" sz="3200" dirty="0"/>
+              <a:t>Review &amp; Practise</a:t>
+            </a:r>
+            <a:endParaRPr lang="en-US" sz="3400" dirty="0"/>
           </a:p>
         </p:txBody>
       </p:sp>
       <p:sp>
         <p:nvSpPr>
-          <p:cNvPr id="4" name="Text 2"/>
-          <p:cNvSpPr/>
-          <p:nvPr/>
-        </p:nvSpPr>
-        <p:spPr>
-          <a:xfrm>
-            <a:off x="731520" y="1463040"/>
-            <a:ext cx="7772400" cy="3200400"/>
-          </a:xfrm>
-          <a:prstGeom prst="rect">
-            <a:avLst/>
-          </a:prstGeom>
-          <a:noFill/>
-          <a:ln/>
-        </p:spPr>
-        <p:txBody>
-          <a:bodyPr wrap="square" rtlCol="0" anchor="t"/>
-          <a:lstStyle/>
-          <a:p>
-            <a:pPr marL="342900" indent="-342900">
-              <a:spcAft>
-                <a:spcPts val="1000"/>
-              </a:spcAft>
-              <a:buSzPct val="100000"/>
-              <a:buChar char="•"/>
-            </a:pPr>
-            <a:r>
-              <a:rPr lang="en-US" sz="1500" dirty="0">
-                <a:solidFill>
-                  <a:srgbClr val="CADCFC"/>
-                </a:solidFill>
-                <a:latin typeface="Calibri" pitchFamily="34" charset="0"/>
-                <a:ea typeface="Calibri" pitchFamily="34" charset="-122"/>
-                <a:cs typeface="Calibri" pitchFamily="34" charset="-120"/>
-              </a:rPr>
-              <a:t>Bar chart: categories (bars don't touch). Pie: proportions (360°). Line: trends over time</a:t>
-            </a:r>
-            <a:endParaRPr lang="en-US" sz="1500" dirty="0"/>
-          </a:p>
-          <a:p>
-            <a:pPr marL="342900" indent="-342900">
-              <a:spcAft>
-                <a:spcPts val="1000"/>
-              </a:spcAft>
-              <a:buSzPct val="100000"/>
-              <a:buChar char="•"/>
-            </a:pPr>
-            <a:r>
-              <a:rPr lang="en-US" sz="1500" dirty="0">
-                <a:solidFill>
-                  <a:srgbClr val="CADCFC"/>
-                </a:solidFill>
-                <a:latin typeface="Calibri" pitchFamily="34" charset="0"/>
-                <a:ea typeface="Calibri" pitchFamily="34" charset="-122"/>
-                <a:cs typeface="Calibri" pitchFamily="34" charset="-120"/>
-              </a:rPr>
-              <a:t>Title, labelled axes, appropriate scale — essential for every chart</a:t>
-            </a:r>
-            <a:endParaRPr lang="en-US" sz="1500" dirty="0"/>
-          </a:p>
-          <a:p>
-            <a:pPr marL="342900" indent="-342900">
-              <a:spcAft>
-                <a:spcPts val="1000"/>
-              </a:spcAft>
-              <a:buSzPct val="100000"/>
-              <a:buChar char="•"/>
-            </a:pPr>
-            <a:r>
-              <a:rPr lang="en-US" sz="1500" dirty="0">
-                <a:solidFill>
-                  <a:srgbClr val="CADCFC"/>
-                </a:solidFill>
-                <a:latin typeface="Calibri" pitchFamily="34" charset="0"/>
-                <a:ea typeface="Calibri" pitchFamily="34" charset="-122"/>
-                <a:cs typeface="Calibri" pitchFamily="34" charset="-120"/>
-              </a:rPr>
-              <a:t>Pie chart angles: fraction of total × 360°</a:t>
-            </a:r>
-            <a:endParaRPr lang="en-US" sz="1500" dirty="0"/>
-          </a:p>
-          <a:p>
-            <a:pPr marL="342900" indent="-342900">
-              <a:spcAft>
-                <a:spcPts val="1000"/>
-              </a:spcAft>
-              <a:buSzPct val="100000"/>
-              <a:buChar char="•"/>
-            </a:pPr>
-            <a:r>
-              <a:rPr lang="en-US" sz="1500" dirty="0">
-                <a:solidFill>
-                  <a:srgbClr val="CADCFC"/>
-                </a:solidFill>
-                <a:latin typeface="Calibri" pitchFamily="34" charset="0"/>
-                <a:ea typeface="Calibri" pitchFamily="34" charset="-122"/>
-                <a:cs typeface="Calibri" pitchFamily="34" charset="-120"/>
-              </a:rPr>
-              <a:t>Describe trends, compare values, identify patterns</a:t>
-            </a:r>
-            <a:endParaRPr lang="en-US" sz="1500" dirty="0"/>
-          </a:p>
-          <a:p>
-            <a:pPr marL="342900" indent="-342900">
-              <a:spcAft>
-                <a:spcPts val="1000"/>
-              </a:spcAft>
-              <a:buSzPct val="100000"/>
-              <a:buChar char="•"/>
-            </a:pPr>
-            <a:r>
-              <a:rPr lang="en-US" sz="1500" dirty="0">
-                <a:solidFill>
-                  <a:srgbClr val="CADCFC"/>
-                </a:solidFill>
-                <a:latin typeface="Calibri" pitchFamily="34" charset="0"/>
-                <a:ea typeface="Calibri" pitchFamily="34" charset="-122"/>
-                <a:cs typeface="Calibri" pitchFamily="34" charset="-120"/>
-              </a:rPr>
-              <a:t>Choose the right chart for your data type</a:t>
-            </a:r>
-            <a:endParaRPr lang="en-US" sz="1500" dirty="0"/>
-          </a:p>
-        </p:txBody>
-      </p:sp>
-      <p:sp>
-        <p:nvSpPr>
-          <p:cNvPr id="5" name="Text 3"/>
-          <p:cNvSpPr/>
-          <p:nvPr/>
-        </p:nvSpPr>
-        <p:spPr>
-          <a:xfrm>
-            <a:off x="731520" y="4572000"/>
-            <a:ext cx="7772400" cy="365760"/>
+          <p:cNvPr id="6" name="Text 4"/>
+          <p:cNvSpPr/>
+          <p:nvPr/>
+        </p:nvSpPr>
+        <p:spPr>
+          <a:xfrm>
+            <a:off x="731520" y="2468880"/>
+            <a:ext cx="7680960" cy="457200"/>
           </a:xfrm>
           <a:prstGeom prst="rect">
             <a:avLst/>
@@ -2874,13 +5349,13 @@
           <a:bodyPr wrap="square" rtlCol="0" anchor="ctr"/>
           <a:lstStyle/>
           <a:p>
-            <a:pPr indent="0" marL="0">
+            <a:pPr algn="ctr" indent="0" marL="0">
               <a:buNone/>
             </a:pPr>
             <a:r>
-              <a:rPr lang="en-US" sz="1100" dirty="0">
+              <a:rPr lang="en-US" sz="1800" dirty="0">
                 <a:solidFill>
-                  <a:srgbClr val="E9C46A"/>
+                  <a:srgbClr val="2A9D8F"/>
                 </a:solidFill>
                 <a:latin typeface="Calibri" pitchFamily="34" charset="0"/>
                 <a:ea typeface="Calibri" pitchFamily="34" charset="-122"/>
@@ -2888,7 +5363,46 @@
               </a:rPr>
               <a:t>mrzocchi.com</a:t>
             </a:r>
-            <a:endParaRPr lang="en-US" sz="1100" dirty="0"/>
+            <a:endParaRPr lang="en-US" sz="1800" dirty="0"/>
+          </a:p>
+        </p:txBody>
+      </p:sp>
+      <p:sp>
+        <p:nvSpPr>
+          <p:cNvPr id="7" name="Text 5"/>
+          <p:cNvSpPr/>
+          <p:nvPr/>
+        </p:nvSpPr>
+        <p:spPr>
+          <a:xfrm>
+            <a:off x="731520" y="3108960"/>
+            <a:ext cx="7680960" cy="457200"/>
+          </a:xfrm>
+          <a:prstGeom prst="rect">
+            <a:avLst/>
+          </a:prstGeom>
+          <a:noFill/>
+          <a:ln/>
+        </p:spPr>
+        <p:txBody>
+          <a:bodyPr wrap="square" rtlCol="0" anchor="ctr"/>
+          <a:lstStyle/>
+          <a:p>
+            <a:pPr algn="ctr" indent="0" marL="0">
+              <a:buNone/>
+            </a:pPr>
+            <a:r>
+              <a:rPr lang="en-US" sz="1300" dirty="0">
+                <a:solidFill>
+                  <a:srgbClr val="9B9690"/>
+                </a:solidFill>
+                <a:latin typeface="Calibri" pitchFamily="34" charset="0"/>
+                <a:ea typeface="Calibri" pitchFamily="34" charset="-122"/>
+                <a:cs typeface="Calibri" pitchFamily="34" charset="-120"/>
+              </a:rPr>
+              <a:t>Use the Self-Quiz, Review Games, and Practice Builder to test yourself.</a:t>
+            </a:r>
+            <a:endParaRPr lang="en-US" sz="1300" dirty="0"/>
           </a:p>
         </p:txBody>
       </p:sp>
